--- a/Gruppo_66_HTML_ver.pptx
+++ b/Gruppo_66_HTML_ver.pptx
@@ -2095,6 +2095,116 @@
 </pc:chgInfo>
 </file>
 
+<file path=ppt/ink/ink1.xml><?xml version="1.0" encoding="utf-8"?>
+<inkml:ink xmlns:inkml="http://www.w3.org/2003/InkML">
+  <inkml:definitions>
+    <inkml:context xml:id="ctx0">
+      <inkml:inkSource xml:id="inkSrc0">
+        <inkml:traceFormat>
+          <inkml:channel name="X" type="integer" min="-2.14748E9" max="2.14748E9" units="cm"/>
+          <inkml:channel name="Y" type="integer" min="-2.14748E9" max="2.14748E9" units="cm"/>
+          <inkml:channel name="F" type="integer" max="32767" units="dev"/>
+        </inkml:traceFormat>
+        <inkml:channelProperties>
+          <inkml:channelProperty channel="X" name="resolution" value="1000" units="1/cm"/>
+          <inkml:channelProperty channel="Y" name="resolution" value="1000" units="1/cm"/>
+          <inkml:channelProperty channel="F" name="resolution" value="0" units="1/dev"/>
+        </inkml:channelProperties>
+      </inkml:inkSource>
+      <inkml:timestamp xml:id="ts0" timeString="2023-07-03T19:35:15.365"/>
+    </inkml:context>
+    <inkml:brush xml:id="br0">
+      <inkml:brushProperty name="width" value="0.05" units="cm"/>
+      <inkml:brushProperty name="height" value="0.05" units="cm"/>
+    </inkml:brush>
+  </inkml:definitions>
+  <inkml:trace contextRef="#ctx0" brushRef="#br0">73 166 24575,'-8'-8'0,"1"0"0,0-1 0,0 0 0,1 0 0,1 0 0,-1-1 0,2 0 0,-1 0 0,1 0 0,1-1 0,0 1 0,-4-22 0,7 31 0,0 0 0,0 1 0,0-1 0,0 0 0,0 1 0,0-1 0,0 0 0,0 0 0,0 1 0,0-1 0,0 0 0,1 0 0,-1 1 0,0-1 0,0 0 0,1 1 0,-1-1 0,0 0 0,1 1 0,-1-1 0,1 1 0,-1-1 0,1 1 0,-1-1 0,1 1 0,-1-1 0,1 1 0,0-1 0,-1 1 0,1 0 0,-1-1 0,2 1 0,0-1 0,0 2 0,0-1 0,-1 0 0,1 0 0,0 0 0,0 1 0,-1-1 0,1 1 0,0-1 0,0 1 0,-1 0 0,3 2 0,4 1 0,-1 1 0,0 0 0,0 1 0,10 9 0,46 67 0,-59-76-100,2 3 299,-5-20-1663,-7-17-5362</inkml:trace>
+</inkml:ink>
+</file>
+
+<file path=ppt/ink/ink2.xml><?xml version="1.0" encoding="utf-8"?>
+<inkml:ink xmlns:inkml="http://www.w3.org/2003/InkML">
+  <inkml:definitions>
+    <inkml:context xml:id="ctx0">
+      <inkml:inkSource xml:id="inkSrc0">
+        <inkml:traceFormat>
+          <inkml:channel name="X" type="integer" min="-2.14748E9" max="2.14748E9" units="cm"/>
+          <inkml:channel name="Y" type="integer" min="-2.14748E9" max="2.14748E9" units="cm"/>
+          <inkml:channel name="F" type="integer" max="32767" units="dev"/>
+        </inkml:traceFormat>
+        <inkml:channelProperties>
+          <inkml:channelProperty channel="X" name="resolution" value="1000" units="1/cm"/>
+          <inkml:channelProperty channel="Y" name="resolution" value="1000" units="1/cm"/>
+          <inkml:channelProperty channel="F" name="resolution" value="0" units="1/dev"/>
+        </inkml:channelProperties>
+      </inkml:inkSource>
+      <inkml:timestamp xml:id="ts0" timeString="2023-07-03T19:35:19.445"/>
+    </inkml:context>
+    <inkml:brush xml:id="br0">
+      <inkml:brushProperty name="width" value="0.05" units="cm"/>
+      <inkml:brushProperty name="height" value="0.05" units="cm"/>
+    </inkml:brush>
+  </inkml:definitions>
+  <inkml:trace contextRef="#ctx0" brushRef="#br0">149 241 24575,'0'-19'0,"1"0"0,5-34 0,-4 45 0,0 1 0,0 0 0,0 0 0,1 1 0,0-1 0,1 0 0,-1 1 0,1 0 0,1 0 0,5-7 0,-10 12 0,1 0 0,-1 0 0,1 1 0,0-1 0,-1 0 0,1 1 0,-1-1 0,1 1 0,0-1 0,0 0 0,-1 1 0,1 0 0,0-1 0,0 1 0,0-1 0,-1 1 0,1 0 0,0 0 0,0-1 0,0 1 0,0 0 0,0 0 0,0 0 0,0 0 0,-1 0 0,1 0 0,0 0 0,0 0 0,0 0 0,0 1 0,0-1 0,0 0 0,-1 1 0,1-1 0,0 0 0,0 1 0,0-1 0,-1 1 0,1-1 0,0 1 0,-1 0 0,1-1 0,0 1 0,-1 0 0,1-1 0,-1 1 0,1 0 0,-1 0 0,1-1 0,-1 1 0,0 0 0,1 0 0,-1 0 0,0 0 0,1-1 0,-1 1 0,0 2 0,2 2 0,-1 0 0,1 0 0,-1 1 0,0-1 0,0 1 0,-1-1 0,0 0 0,0 8 0,-3-1 0,-1-1 0,-1 0 0,0 0 0,0 0 0,-1-1 0,0 0 0,-1 0 0,0 0 0,-1-1 0,-10 10 0,-27 38 0,43-55 0,1 1 0,-1 0 0,0-1 0,0 0 0,0 1 0,0-1 0,-1 0 0,1 0 0,-1 0 0,-4 3 0,6-5 0,1 0 0,-1 1 0,1-1 0,0 0 0,-1 0 0,1 0 0,-1 0 0,1 0 0,-1 0 0,1 0 0,0 0 0,-1 0 0,1-1 0,-1 1 0,1 0 0,-1 0 0,1 0 0,0 0 0,-1 0 0,1-1 0,-1 1 0,1 0 0,0 0 0,-1-1 0,1 1 0,0 0 0,0-1 0,-1 0 0,-7-22 0,7 11 0,0 0 0,1-1 0,0 1 0,0 0 0,2 0 0,-1 0 0,1 0 0,1 0 0,1 0 0,-1 0 0,2 1 0,-1 0 0,2 0 0,9-16 0,-15 26 0,1 1 0,-1-1 0,0 1 0,1-1 0,-1 1 0,0-1 0,1 1 0,-1-1 0,1 1 0,-1 0 0,0-1 0,1 1 0,-1 0 0,1-1 0,-1 1 0,1 0 0,0 0 0,-1-1 0,1 1 0,-1 0 0,1 0 0,-1 0 0,1 0 0,0 0 0,-1 0 0,1 0 0,-1 0 0,1 0 0,0 0 0,-1 0 0,1 0 0,-1 0 0,1 0 0,-1 0 0,1 1 0,0-1 0,-1 0 0,2 1 0,13 25 0,-1 37 0,-14-52 0,-1 0 0,-1 0 0,1 0 0,-2-1 0,0 1 0,0-1 0,-1 1 0,0-1 0,0 0 0,-1-1 0,-1 1 0,0-1 0,0 0 0,-1 0 0,0-1 0,-8 8 0,14-15 0,0 0 0,0 0 0,0 0 0,0 0 0,0-1 0,0 1 0,0 0 0,0-1 0,0 1 0,-1 0 0,1-1 0,0 0 0,0 1 0,-1-1 0,1 0 0,0 1 0,0-1 0,-1 0 0,1 0 0,0 0 0,-1 0 0,1-1 0,0 1 0,-1 0 0,1 0 0,0-1 0,0 1 0,-3-2 0,2 0 0,-1 0 0,1 0 0,-1 0 0,1-1 0,0 1 0,0-1 0,0 1 0,0-1 0,0 0 0,0 0 0,-1-4 0,-2-5 0,0 0 0,1-1 0,1 1 0,-5-26 0,7 24 0,0 0 0,1-1 0,0 1 0,1 0 0,1-1 0,5-22 0,-5 30 0,0 1 0,1-1 0,0 0 0,0 1 0,1-1 0,0 1 0,0 0 0,0 0 0,1 0 0,0 1 0,0 0 0,0 0 0,1 0 0,11-7 0,-16 10 0,1 1 0,-1 0 0,1 0 0,-1 0 0,1 0 0,0 1 0,-1-1 0,1 0 0,0 1 0,0-1 0,-1 1 0,1 0 0,0-1 0,0 1 0,0 0 0,0 0 0,-1 0 0,1 0 0,0 1 0,0-1 0,0 0 0,-1 1 0,1-1 0,0 1 0,0 0 0,-1-1 0,1 1 0,0 0 0,-1 0 0,1 0 0,-1 0 0,0 0 0,1 1 0,-1-1 0,0 0 0,1 1 0,-1-1 0,0 1 0,0-1 0,0 1 0,0 0 0,-1-1 0,1 1 0,1 3 0,1 2 0,-1 1 0,0 0 0,0-1 0,0 1 0,-1 0 0,0 0 0,0 0 0,-1 0 0,-1 9 0,-11 45 0,11-58 0,0 0 0,-1 0 0,1 0 0,-1 0 0,0-1 0,0 1 0,0-1 0,0 1 0,0-1 0,-1 0 0,0 0 0,0 0 0,-3 4 0,4-7 0,0 1 0,0-1 0,0 1 0,0-1 0,1 1 0,-1-1 0,0 0 0,0 0 0,0 0 0,0 0 0,0 0 0,0-1 0,1 1 0,-1-1 0,0 1 0,0-1 0,0 1 0,1-1 0,-1 0 0,0 0 0,1 0 0,-1 0 0,0 0 0,1 0 0,0 0 0,-1-1 0,1 1 0,0-1 0,-1 1 0,1-1 0,-1-2 0,-3-1 0,1 0 0,1-1 0,-1 1 0,1-1 0,0 0 0,0 0 0,-4-12 0,7 16 0,0 0 0,-1 0 0,1 1 0,0-1 0,0 0 0,0 0 0,0 1 0,0-1 0,1 0 0,-1 0 0,1 1 0,-1-1 0,1 0 0,-1 1 0,1-1 0,0 0 0,0 1 0,0-1 0,0 1 0,0-1 0,0 1 0,0 0 0,0-1 0,0 1 0,1 0 0,-1 0 0,1 0 0,-1 0 0,1 0 0,-1 0 0,1 0 0,-1 1 0,1-1 0,0 0 0,0 1 0,-1-1 0,1 1 0,0 0 0,0 0 0,-1-1 0,1 1 0,0 1 0,0-1 0,-1 0 0,4 1 0,-2-1 0,1 0 0,-1 0 0,0 0 0,1 1 0,-1 0 0,0 0 0,0 0 0,1 0 0,-1 0 0,0 0 0,0 1 0,0 0 0,0 0 0,-1-1 0,1 1 0,0 1 0,-1-1 0,1 0 0,-1 1 0,0-1 0,0 1 0,0 0 0,3 5 0,-5-7 0,1-1 0,-1 1 0,0-1 0,0 1 0,0-1 0,1 1 0,-1-1 0,0 1 0,0 0 0,0-1 0,0 1 0,0-1 0,0 1 0,0 0 0,0-1 0,0 1 0,-1-1 0,1 1 0,0-1 0,0 1 0,0 0 0,-1-1 0,1 1 0,0-1 0,0 1 0,-1-1 0,1 1 0,-1-1 0,1 0 0,0 1 0,-1-1 0,1 1 0,-1-1 0,1 0 0,-1 1 0,1-1 0,-1 0 0,1 0 0,-1 1 0,1-1 0,-1 0 0,1 0 0,-1 0 0,0 0 0,1 0 0,-1 0 0,1 0 0,-1 0 0,0 0 0,1 0 0,-1 0 0,-1 0 0,1 0 0,-1 0 0,1-1 0,-1 1 0,1 0 0,0-1 0,-1 1 0,1-1 0,0 0 0,-1 1 0,1-1 0,0 0 0,0 0 0,0 0 0,0 0 0,0 0 0,0 0 0,0 0 0,0 0 0,0 0 0,-1-2 0,1 0 0,0 0 0,1 1 0,-1-1 0,0 0 0,1 0 0,0 0 0,0 0 0,0 0 0,0 0 0,0 0 0,1 0 0,-1 0 0,1 0 0,-1 0 0,1 1 0,0-1 0,1 0 0,-1 0 0,0 1 0,1-1 0,-1 1 0,1-1 0,0 1 0,2-3 0,2-1 0,-1 1 0,1-1 0,0 1 0,0 0 0,1 1 0,-1 0 0,14-7 0,-20 11 0,1 1 0,0-1 0,-1 0 0,1 0 0,-1 0 0,1 1 0,-1-1 0,1 0 0,-1 1 0,1-1 0,-1 0 0,1 1 0,-1-1 0,1 1 0,-1-1 0,0 1 0,1-1 0,-1 1 0,0-1 0,1 1 0,-1-1 0,0 1 0,0-1 0,0 1 0,1-1 0,-1 1 0,0 0 0,0-1 0,0 1 0,0-1 0,0 1 0,0 0 0,0-1 0,0 1 0,0-1 0,0 1 0,-1 0 0,2 31 0,-1-29 0,-1 15 0,0 1 0,-1-1 0,-1 1 0,-7 22 0,9-35 0,-1-1 0,1 1 0,-1-1 0,-1 0 0,1 1 0,-1-1 0,1 0 0,-2-1 0,1 1 0,0-1 0,-1 1 0,0-1 0,0 0 0,0 0 0,0-1 0,-1 1 0,1-1 0,-8 4 0,12-7 0,-1 1 0,0-1 0,0 0 0,0 1 0,0-1 0,0 0 0,0 0 0,0 0 0,0 0 0,0 0 0,0 0 0,-1 0 0,1 0 0,0 0 0,0 0 0,0-1 0,0 1 0,0 0 0,1-1 0,-1 1 0,0 0 0,0-1 0,0 0 0,0 1 0,0-1 0,-1 0 0,1-1 0,-1 0 0,1 0 0,-1-1 0,1 1 0,0 0 0,0 0 0,0-1 0,0 1 0,1-1 0,-2-3 0,0-5 0,1-1 0,0 0 0,2-19 0,1 16 0,0 1 0,2-1 0,0 1 0,0 0 0,2 0 0,-1 1 0,2-1 0,0 1 0,0 0 0,2 1 0,-1 0 0,1 0 0,1 1 0,16-15 0,-24 24 0,0 0 0,0 1 0,1-1 0,-1 0 0,0 1 0,1-1 0,0 1 0,-1 0 0,1 0 0,0 0 0,0 0 0,-1 1 0,1-1 0,0 1 0,0-1 0,0 1 0,0 0 0,0 0 0,0 1 0,0-1 0,5 2 0,-5-1 0,1 1 0,-1 0 0,0 0 0,0 0 0,0 0 0,0 1 0,0-1 0,-1 1 0,1 0 0,-1-1 0,0 1 0,1 0 0,-1 1 0,3 5 0,-1 0 0,-1-1 0,1 1 0,-1 0 0,-1 0 0,1 0 0,-2 1 0,1-1 0,-1 0 0,-1 1 0,0-1 0,0 0 0,-3 19 0,1-21 0,-1 0 0,0 0 0,0 0 0,0-1 0,-1 1 0,0-1 0,-1 0 0,1 0 0,-1 0 0,0 0 0,-11 8 0,-3 1 0,-1-1 0,-28 16 0,32-21 0,15-8 0,0 0 0,0 0 0,0-1 0,0 1 0,0-1 0,0 1 0,-1-1 0,1 1 0,0-1 0,0 1 0,0-1 0,0 0 0,-1 0 0,1 0 0,0 0 0,0 0 0,-1 0 0,1 0 0,0 0 0,0 0 0,-1 0 0,1-1 0,0 1 0,0 0 0,0-1 0,0 1 0,0-1 0,-1 1 0,1-1 0,0 0 0,-1-1 0,0 0 0,0-1 0,0 0 0,1 0 0,-1 0 0,1 0 0,0 0 0,0-1 0,0 1 0,0 0 0,0-1 0,0-4 0,0-11 0,0-1 0,1 1 0,3-23 0,5 6 0,-7 34 0,-1 1 0,1-1 0,-1 1 0,1-1 0,-1 1 0,1-1 0,0 1 0,0 0 0,0 0 0,0-1 0,0 1 0,0 0 0,0 0 0,0 0 0,0 0 0,0 0 0,1 0 0,-1 0 0,0 0 0,3 0 0,-3 1 0,0 0 0,0 0 0,-1 0 0,1 1 0,0-1 0,0 0 0,0 1 0,0-1 0,-1 0 0,1 1 0,0-1 0,0 1 0,-1-1 0,1 1 0,0 0 0,-1-1 0,1 1 0,-1 0 0,1-1 0,-1 1 0,1 0 0,-1 0 0,1 0 0,-1-1 0,0 1 0,1 0 0,-1 0 0,0 0 0,0 0 0,0-1 0,0 1 0,0 0 0,0 0 0,0 0 0,0 0 0,0 0 0,0 0 0,0 0 0,0-1 0,-1 2 0,-4 39 0,-2-26-341,1-1 0,-1 0-1,-16 22 1,13-21-6485</inkml:trace>
+</inkml:ink>
+</file>
+
+<file path=ppt/ink/ink3.xml><?xml version="1.0" encoding="utf-8"?>
+<inkml:ink xmlns:inkml="http://www.w3.org/2003/InkML">
+  <inkml:definitions>
+    <inkml:context xml:id="ctx0">
+      <inkml:inkSource xml:id="inkSrc0">
+        <inkml:traceFormat>
+          <inkml:channel name="X" type="integer" min="-2.14748E9" max="2.14748E9" units="cm"/>
+          <inkml:channel name="Y" type="integer" min="-2.14748E9" max="2.14748E9" units="cm"/>
+          <inkml:channel name="F" type="integer" max="32767" units="dev"/>
+        </inkml:traceFormat>
+        <inkml:channelProperties>
+          <inkml:channelProperty channel="X" name="resolution" value="1000" units="1/cm"/>
+          <inkml:channelProperty channel="Y" name="resolution" value="1000" units="1/cm"/>
+          <inkml:channelProperty channel="F" name="resolution" value="0" units="1/dev"/>
+        </inkml:channelProperties>
+      </inkml:inkSource>
+      <inkml:timestamp xml:id="ts0" timeString="2023-07-03T19:36:05.770"/>
+    </inkml:context>
+    <inkml:brush xml:id="br0">
+      <inkml:brushProperty name="width" value="0.05" units="cm"/>
+      <inkml:brushProperty name="height" value="0.05" units="cm"/>
+      <inkml:brushProperty name="color" value="#FFFFFF"/>
+    </inkml:brush>
+  </inkml:definitions>
+  <inkml:trace contextRef="#ctx0" brushRef="#br0">0 0 24575,'0'0'-8191</inkml:trace>
+</inkml:ink>
+</file>
+
+<file path=ppt/ink/ink4.xml><?xml version="1.0" encoding="utf-8"?>
+<inkml:ink xmlns:inkml="http://www.w3.org/2003/InkML">
+  <inkml:definitions>
+    <inkml:context xml:id="ctx0">
+      <inkml:inkSource xml:id="inkSrc0">
+        <inkml:traceFormat>
+          <inkml:channel name="X" type="integer" min="-2.14748E9" max="2.14748E9" units="cm"/>
+          <inkml:channel name="Y" type="integer" min="-2.14748E9" max="2.14748E9" units="cm"/>
+          <inkml:channel name="F" type="integer" max="32767" units="dev"/>
+        </inkml:traceFormat>
+        <inkml:channelProperties>
+          <inkml:channelProperty channel="X" name="resolution" value="1000" units="1/cm"/>
+          <inkml:channelProperty channel="Y" name="resolution" value="1000" units="1/cm"/>
+          <inkml:channelProperty channel="F" name="resolution" value="0" units="1/dev"/>
+        </inkml:channelProperties>
+      </inkml:inkSource>
+      <inkml:timestamp xml:id="ts0" timeString="2023-07-03T19:40:19.475"/>
+    </inkml:context>
+    <inkml:brush xml:id="br0">
+      <inkml:brushProperty name="width" value="0.05" units="cm"/>
+      <inkml:brushProperty name="height" value="0.05" units="cm"/>
+      <inkml:brushProperty name="color" value="#FFFFFF"/>
+    </inkml:brush>
+  </inkml:definitions>
+  <inkml:trace contextRef="#ctx0" brushRef="#br0">1 1 24575,'0'0'-8191</inkml:trace>
+</inkml:ink>
+</file>
+
 <file path=ppt/slideLayouts/slideLayout1.xml><?xml version="1.0" encoding="utf-8"?>
 <p:sldLayout xmlns:a="http://schemas.openxmlformats.org/drawingml/2006/main" xmlns:r="http://schemas.openxmlformats.org/officeDocument/2006/relationships" xmlns:p="http://schemas.openxmlformats.org/presentationml/2006/main" type="title" preserve="1">
   <p:cSld name="Title Slide">
@@ -2247,7 +2357,7 @@
           <a:p>
             <a:fld id="{11EAACC7-3B3F-47D1-959A-EF58926E955E}" type="datetimeFigureOut">
               <a:rPr lang="en-US" smtClean="0"/>
-              <a:t>6/30/2023</a:t>
+              <a:t>7/3/2023</a:t>
             </a:fld>
             <a:endParaRPr lang="en-US"/>
           </a:p>
@@ -2445,7 +2555,7 @@
           <a:p>
             <a:fld id="{11EAACC7-3B3F-47D1-959A-EF58926E955E}" type="datetimeFigureOut">
               <a:rPr lang="en-US" smtClean="0"/>
-              <a:t>6/30/2023</a:t>
+              <a:t>7/3/2023</a:t>
             </a:fld>
             <a:endParaRPr lang="en-US"/>
           </a:p>
@@ -2653,7 +2763,7 @@
           <a:p>
             <a:fld id="{11EAACC7-3B3F-47D1-959A-EF58926E955E}" type="datetimeFigureOut">
               <a:rPr lang="en-US" smtClean="0"/>
-              <a:t>6/30/2023</a:t>
+              <a:t>7/3/2023</a:t>
             </a:fld>
             <a:endParaRPr lang="en-US"/>
           </a:p>
@@ -2882,7 +2992,7 @@
           <a:p>
             <a:fld id="{11EAACC7-3B3F-47D1-959A-EF58926E955E}" type="datetimeFigureOut">
               <a:rPr lang="en-US" smtClean="0"/>
-              <a:t>6/30/2023</a:t>
+              <a:t>7/3/2023</a:t>
             </a:fld>
             <a:endParaRPr lang="en-US"/>
           </a:p>
@@ -3157,7 +3267,7 @@
           <a:p>
             <a:fld id="{11EAACC7-3B3F-47D1-959A-EF58926E955E}" type="datetimeFigureOut">
               <a:rPr lang="en-US" smtClean="0"/>
-              <a:t>6/30/2023</a:t>
+              <a:t>7/3/2023</a:t>
             </a:fld>
             <a:endParaRPr lang="en-US"/>
           </a:p>
@@ -3422,7 +3532,7 @@
           <a:p>
             <a:fld id="{11EAACC7-3B3F-47D1-959A-EF58926E955E}" type="datetimeFigureOut">
               <a:rPr lang="en-US" smtClean="0"/>
-              <a:t>6/30/2023</a:t>
+              <a:t>7/3/2023</a:t>
             </a:fld>
             <a:endParaRPr lang="en-US"/>
           </a:p>
@@ -3838,7 +3948,7 @@
           <a:p>
             <a:fld id="{11EAACC7-3B3F-47D1-959A-EF58926E955E}" type="datetimeFigureOut">
               <a:rPr lang="en-US" smtClean="0"/>
-              <a:t>6/30/2023</a:t>
+              <a:t>7/3/2023</a:t>
             </a:fld>
             <a:endParaRPr lang="en-US"/>
           </a:p>
@@ -3979,7 +4089,7 @@
           <a:p>
             <a:fld id="{11EAACC7-3B3F-47D1-959A-EF58926E955E}" type="datetimeFigureOut">
               <a:rPr lang="en-US" smtClean="0"/>
-              <a:t>6/30/2023</a:t>
+              <a:t>7/3/2023</a:t>
             </a:fld>
             <a:endParaRPr lang="en-US"/>
           </a:p>
@@ -4092,7 +4202,7 @@
           <a:p>
             <a:fld id="{11EAACC7-3B3F-47D1-959A-EF58926E955E}" type="datetimeFigureOut">
               <a:rPr lang="en-US" smtClean="0"/>
-              <a:t>6/30/2023</a:t>
+              <a:t>7/3/2023</a:t>
             </a:fld>
             <a:endParaRPr lang="en-US"/>
           </a:p>
@@ -4403,7 +4513,7 @@
           <a:p>
             <a:fld id="{11EAACC7-3B3F-47D1-959A-EF58926E955E}" type="datetimeFigureOut">
               <a:rPr lang="en-US" smtClean="0"/>
-              <a:t>6/30/2023</a:t>
+              <a:t>7/3/2023</a:t>
             </a:fld>
             <a:endParaRPr lang="en-US"/>
           </a:p>
@@ -4694,7 +4804,7 @@
           <a:p>
             <a:fld id="{11EAACC7-3B3F-47D1-959A-EF58926E955E}" type="datetimeFigureOut">
               <a:rPr lang="en-US" smtClean="0"/>
-              <a:t>6/30/2023</a:t>
+              <a:t>7/3/2023</a:t>
             </a:fld>
             <a:endParaRPr lang="en-US"/>
           </a:p>
@@ -5245,7 +5355,7 @@
           <a:p>
             <a:fld id="{11EAACC7-3B3F-47D1-959A-EF58926E955E}" type="datetimeFigureOut">
               <a:rPr lang="en-US" smtClean="0"/>
-              <a:t>6/30/2023</a:t>
+              <a:t>7/3/2023</a:t>
             </a:fld>
             <a:endParaRPr lang="en-US"/>
           </a:p>
@@ -5745,7 +5855,7 @@
           <a:lstStyle/>
           <a:p>
             <a:pPr algn="ctr"/>
-            <a:endParaRPr lang="en-US"/>
+            <a:endParaRPr lang="en-US" dirty="0"/>
           </a:p>
         </p:txBody>
       </p:sp>
@@ -5772,7 +5882,7 @@
           <a:lstStyle/>
           <a:p>
             <a:r>
-              <a:rPr lang="en-US" altLang="zh-CN" sz="7200" b="0">
+              <a:rPr lang="en-US" altLang="zh-CN" sz="7200" b="0" dirty="0">
                 <a:solidFill>
                   <a:srgbClr val="B4A078"/>
                 </a:solidFill>
@@ -6211,7 +6321,7 @@
               <a:t>Project  TIW  2023   no.</a:t>
             </a:r>
             <a:r>
-              <a:rPr lang="en-US" altLang="zh-CN" sz="1500" cap="all">
+              <a:rPr lang="en-US" altLang="zh-CN" sz="1500" cap="all" dirty="0">
                 <a:solidFill>
                   <a:srgbClr val="B4A078"/>
                 </a:solidFill>
@@ -6241,7 +6351,7 @@
           </a:p>
           <a:p>
             <a:r>
-              <a:rPr lang="en-US" altLang="zh-CN" sz="1500" cap="all">
+              <a:rPr lang="en-US" altLang="zh-CN" sz="1500" cap="all" dirty="0">
                 <a:solidFill>
                   <a:srgbClr val="B4A078"/>
                 </a:solidFill>
@@ -6261,7 +6371,7 @@
               <a:t>i</a:t>
             </a:r>
             <a:r>
-              <a:rPr lang="en-US" altLang="zh-CN" sz="1500" cap="all" err="1">
+              <a:rPr lang="en-US" altLang="zh-CN" sz="1500" cap="all" dirty="0" err="1">
                 <a:solidFill>
                   <a:srgbClr val="B4A078"/>
                 </a:solidFill>
@@ -13723,7 +13833,7 @@
           <a:lstStyle/>
           <a:p>
             <a:r>
-              <a:rPr lang="en-US" sz="1800">
+              <a:rPr lang="en-US" sz="1800" dirty="0">
                 <a:solidFill>
                   <a:srgbClr val="333333"/>
                 </a:solidFill>
@@ -13736,7 +13846,7 @@
           </a:p>
           <a:p>
             <a:r>
-              <a:rPr lang="en-US" sz="1800">
+              <a:rPr lang="en-US" sz="1800" dirty="0">
                 <a:solidFill>
                   <a:srgbClr val="333333"/>
                 </a:solidFill>
@@ -13747,7 +13857,7 @@
               <a:t>Item (</a:t>
             </a:r>
             <a:r>
-              <a:rPr lang="en-US" sz="1800" err="1">
+              <a:rPr lang="en-US" sz="1800" dirty="0" err="1">
                 <a:solidFill>
                   <a:srgbClr val="333333"/>
                 </a:solidFill>
@@ -13758,7 +13868,7 @@
               <a:t>Articolo</a:t>
             </a:r>
             <a:r>
-              <a:rPr lang="en-US" sz="1800">
+              <a:rPr lang="en-US" sz="1800" dirty="0">
                 <a:solidFill>
                   <a:srgbClr val="333333"/>
                 </a:solidFill>
@@ -13771,7 +13881,7 @@
           </a:p>
           <a:p>
             <a:r>
-              <a:rPr lang="en-US" sz="1800">
+              <a:rPr lang="en-US" sz="1800" dirty="0">
                 <a:solidFill>
                   <a:srgbClr val="333333"/>
                 </a:solidFill>
@@ -13779,12 +13889,10 @@
                 <a:ea typeface="DengXian"/>
                 <a:cs typeface="Calibri"/>
               </a:rPr>
-              <a:t>Auction (Asta)</a:t>
-            </a:r>
-          </a:p>
-          <a:p>
-            <a:r>
-              <a:rPr lang="en-US" sz="1800">
+              <a:t>Auction (</a:t>
+            </a:r>
+            <a:r>
+              <a:rPr lang="en-US" sz="1800" dirty="0" err="1">
                 <a:solidFill>
                   <a:srgbClr val="333333"/>
                 </a:solidFill>
@@ -13792,11 +13900,35 @@
                 <a:ea typeface="DengXian"/>
                 <a:cs typeface="Calibri"/>
               </a:rPr>
+              <a:t>Asta</a:t>
+            </a:r>
+            <a:r>
+              <a:rPr lang="en-US" sz="1800" dirty="0">
+                <a:solidFill>
+                  <a:srgbClr val="333333"/>
+                </a:solidFill>
+                <a:latin typeface="Times New Roman"/>
+                <a:ea typeface="DengXian"/>
+                <a:cs typeface="Calibri"/>
+              </a:rPr>
+              <a:t>)</a:t>
+            </a:r>
+          </a:p>
+          <a:p>
+            <a:r>
+              <a:rPr lang="en-US" sz="1800" dirty="0">
+                <a:solidFill>
+                  <a:srgbClr val="333333"/>
+                </a:solidFill>
+                <a:latin typeface="Times New Roman"/>
+                <a:ea typeface="DengXian"/>
+                <a:cs typeface="Calibri"/>
+              </a:rPr>
               <a:t>Offer</a:t>
             </a:r>
           </a:p>
           <a:p>
-            <a:endParaRPr lang="it-IT" sz="1800">
+            <a:endParaRPr lang="it-IT" sz="1800" dirty="0">
               <a:solidFill>
                 <a:srgbClr val="333333"/>
               </a:solidFill>
@@ -13806,7 +13938,7 @@
             </a:endParaRPr>
           </a:p>
           <a:p>
-            <a:endParaRPr lang="it-IT" altLang="zh-CN" sz="1100">
+            <a:endParaRPr lang="it-IT" altLang="zh-CN" sz="1100" dirty="0">
               <a:solidFill>
                 <a:srgbClr val="000000"/>
               </a:solidFill>
@@ -13817,7 +13949,7 @@
           </a:p>
           <a:p>
             <a:pPr marL="342900" indent="-342900"/>
-            <a:endParaRPr lang="it-IT" altLang="zh-CN" sz="2000">
+            <a:endParaRPr lang="it-IT" altLang="zh-CN" sz="2000" dirty="0">
               <a:latin typeface="Gill Sans MT"/>
               <a:ea typeface="DengXian"/>
             </a:endParaRPr>
@@ -15391,6 +15523,57 @@
           </a:p>
         </p:txBody>
       </p:sp>
+      <mc:AlternateContent xmlns:mc="http://schemas.openxmlformats.org/markup-compatibility/2006">
+        <mc:Choice xmlns:p14="http://schemas.microsoft.com/office/powerpoint/2010/main" Requires="p14">
+          <p:contentPart p14:bwMode="auto" r:id="rId2">
+            <p14:nvContentPartPr>
+              <p14:cNvPr id="2" name="墨迹 1">
+                <a:extLst>
+                  <a:ext uri="{FF2B5EF4-FFF2-40B4-BE49-F238E27FC236}">
+                    <a16:creationId xmlns:a16="http://schemas.microsoft.com/office/drawing/2014/main" id="{D314786E-92CC-4779-ED03-5FF371772005}"/>
+                  </a:ext>
+                </a:extLst>
+              </p14:cNvPr>
+              <p14:cNvContentPartPr/>
+              <p14:nvPr/>
+            </p14:nvContentPartPr>
+            <p14:xfrm>
+              <a:off x="8499377" y="2211686"/>
+              <a:ext cx="360" cy="360"/>
+            </p14:xfrm>
+          </p:contentPart>
+        </mc:Choice>
+        <mc:Fallback>
+          <p:pic>
+            <p:nvPicPr>
+              <p:cNvPr id="2" name="墨迹 1">
+                <a:extLst>
+                  <a:ext uri="{FF2B5EF4-FFF2-40B4-BE49-F238E27FC236}">
+                    <a16:creationId xmlns:a16="http://schemas.microsoft.com/office/drawing/2014/main" id="{D314786E-92CC-4779-ED03-5FF371772005}"/>
+                  </a:ext>
+                </a:extLst>
+              </p:cNvPr>
+              <p:cNvPicPr/>
+              <p:nvPr/>
+            </p:nvPicPr>
+            <p:blipFill>
+              <a:blip r:embed="rId3"/>
+              <a:stretch>
+                <a:fillRect/>
+              </a:stretch>
+            </p:blipFill>
+            <p:spPr>
+              <a:xfrm>
+                <a:off x="8490737" y="2203046"/>
+                <a:ext cx="18000" cy="18000"/>
+              </a:xfrm>
+              <a:prstGeom prst="rect">
+                <a:avLst/>
+              </a:prstGeom>
+            </p:spPr>
+          </p:pic>
+        </mc:Fallback>
+      </mc:AlternateContent>
     </p:spTree>
     <p:extLst>
       <p:ext uri="{BB962C8B-B14F-4D97-AF65-F5344CB8AC3E}">
@@ -18609,7 +18792,7 @@
           <a:p>
             <a:pPr algn="ctr"/>
             <a:r>
-              <a:rPr lang="en-US" altLang="zh-CN" sz="2800" b="1" cap="all">
+              <a:rPr lang="en-US" altLang="zh-CN" sz="2800" b="1" cap="all" dirty="0">
                 <a:solidFill>
                   <a:srgbClr val="B4A078"/>
                 </a:solidFill>
@@ -18618,7 +18801,7 @@
               <a:t>EVENT: </a:t>
             </a:r>
             <a:r>
-              <a:rPr lang="en-US" altLang="zh-CN" sz="2800" b="1" cap="all" err="1">
+              <a:rPr lang="en-US" altLang="zh-CN" sz="2800" b="1" cap="all" dirty="0" err="1">
                 <a:solidFill>
                   <a:srgbClr val="B4A078"/>
                 </a:solidFill>
@@ -18626,6 +18809,12 @@
               </a:rPr>
               <a:t>createnewIauction</a:t>
             </a:r>
+            <a:endParaRPr lang="en-US" altLang="zh-CN" sz="2800" b="1" cap="all" dirty="0">
+              <a:solidFill>
+                <a:srgbClr val="B4A078"/>
+              </a:solidFill>
+              <a:latin typeface="Gill Sans MT"/>
+            </a:endParaRPr>
           </a:p>
         </p:txBody>
       </p:sp>
@@ -22819,6 +23008,224 @@
           </a:prstGeom>
         </p:spPr>
       </p:pic>
+      <p:sp>
+        <p:nvSpPr>
+          <p:cNvPr id="5" name="文本框 4">
+            <a:extLst>
+              <a:ext uri="{FF2B5EF4-FFF2-40B4-BE49-F238E27FC236}">
+                <a16:creationId xmlns:a16="http://schemas.microsoft.com/office/drawing/2014/main" id="{5F8C3EF5-4D29-A436-32DD-FB4AEA001791}"/>
+              </a:ext>
+            </a:extLst>
+          </p:cNvPr>
+          <p:cNvSpPr txBox="1"/>
+          <p:nvPr/>
+        </p:nvSpPr>
+        <p:spPr>
+          <a:xfrm>
+            <a:off x="3017520" y="3108012"/>
+            <a:ext cx="6122126" cy="646331"/>
+          </a:xfrm>
+          <a:prstGeom prst="rect">
+            <a:avLst/>
+          </a:prstGeom>
+          <a:noFill/>
+        </p:spPr>
+        <p:txBody>
+          <a:bodyPr wrap="square">
+            <a:spAutoFit/>
+          </a:bodyPr>
+          <a:lstStyle/>
+          <a:p>
+            <a:br>
+              <a:rPr lang="it-IT" dirty="0"/>
+            </a:br>
+            <a:endParaRPr lang="it-IT" dirty="0"/>
+          </a:p>
+        </p:txBody>
+      </p:sp>
+      <mc:AlternateContent xmlns:mc="http://schemas.openxmlformats.org/markup-compatibility/2006">
+        <mc:Choice xmlns:p14="http://schemas.microsoft.com/office/powerpoint/2010/main" Requires="p14">
+          <p:contentPart p14:bwMode="auto" r:id="rId3">
+            <p14:nvContentPartPr>
+              <p14:cNvPr id="7" name="墨迹 6">
+                <a:extLst>
+                  <a:ext uri="{FF2B5EF4-FFF2-40B4-BE49-F238E27FC236}">
+                    <a16:creationId xmlns:a16="http://schemas.microsoft.com/office/drawing/2014/main" id="{0AA06460-AD2F-D300-E509-82B272B9CB8A}"/>
+                  </a:ext>
+                </a:extLst>
+              </p14:cNvPr>
+              <p14:cNvContentPartPr/>
+              <p14:nvPr/>
+            </p14:nvContentPartPr>
+            <p14:xfrm>
+              <a:off x="10685297" y="4181246"/>
+              <a:ext cx="56520" cy="60120"/>
+            </p14:xfrm>
+          </p:contentPart>
+        </mc:Choice>
+        <mc:Fallback>
+          <p:pic>
+            <p:nvPicPr>
+              <p:cNvPr id="7" name="墨迹 6">
+                <a:extLst>
+                  <a:ext uri="{FF2B5EF4-FFF2-40B4-BE49-F238E27FC236}">
+                    <a16:creationId xmlns:a16="http://schemas.microsoft.com/office/drawing/2014/main" id="{0AA06460-AD2F-D300-E509-82B272B9CB8A}"/>
+                  </a:ext>
+                </a:extLst>
+              </p:cNvPr>
+              <p:cNvPicPr/>
+              <p:nvPr/>
+            </p:nvPicPr>
+            <p:blipFill>
+              <a:blip r:embed="rId4"/>
+              <a:stretch>
+                <a:fillRect/>
+              </a:stretch>
+            </p:blipFill>
+            <p:spPr>
+              <a:xfrm>
+                <a:off x="10676657" y="4172246"/>
+                <a:ext cx="74160" cy="77760"/>
+              </a:xfrm>
+              <a:prstGeom prst="rect">
+                <a:avLst/>
+              </a:prstGeom>
+            </p:spPr>
+          </p:pic>
+        </mc:Fallback>
+      </mc:AlternateContent>
+      <mc:AlternateContent xmlns:mc="http://schemas.openxmlformats.org/markup-compatibility/2006">
+        <mc:Choice xmlns:p14="http://schemas.microsoft.com/office/powerpoint/2010/main" Requires="p14">
+          <p:contentPart p14:bwMode="auto" r:id="rId5">
+            <p14:nvContentPartPr>
+              <p14:cNvPr id="8" name="墨迹 7">
+                <a:extLst>
+                  <a:ext uri="{FF2B5EF4-FFF2-40B4-BE49-F238E27FC236}">
+                    <a16:creationId xmlns:a16="http://schemas.microsoft.com/office/drawing/2014/main" id="{49D362A0-D863-B1DC-653C-2CFFA209EB1F}"/>
+                  </a:ext>
+                </a:extLst>
+              </p14:cNvPr>
+              <p14:cNvContentPartPr/>
+              <p14:nvPr/>
+            </p14:nvContentPartPr>
+            <p14:xfrm>
+              <a:off x="10666577" y="4111046"/>
+              <a:ext cx="113760" cy="141480"/>
+            </p14:xfrm>
+          </p:contentPart>
+        </mc:Choice>
+        <mc:Fallback>
+          <p:pic>
+            <p:nvPicPr>
+              <p:cNvPr id="8" name="墨迹 7">
+                <a:extLst>
+                  <a:ext uri="{FF2B5EF4-FFF2-40B4-BE49-F238E27FC236}">
+                    <a16:creationId xmlns:a16="http://schemas.microsoft.com/office/drawing/2014/main" id="{49D362A0-D863-B1DC-653C-2CFFA209EB1F}"/>
+                  </a:ext>
+                </a:extLst>
+              </p:cNvPr>
+              <p:cNvPicPr/>
+              <p:nvPr/>
+            </p:nvPicPr>
+            <p:blipFill>
+              <a:blip r:embed="rId6"/>
+              <a:stretch>
+                <a:fillRect/>
+              </a:stretch>
+            </p:blipFill>
+            <p:spPr>
+              <a:xfrm>
+                <a:off x="10657937" y="4102046"/>
+                <a:ext cx="131400" cy="159120"/>
+              </a:xfrm>
+              <a:prstGeom prst="rect">
+                <a:avLst/>
+              </a:prstGeom>
+            </p:spPr>
+          </p:pic>
+        </mc:Fallback>
+      </mc:AlternateContent>
+      <mc:AlternateContent xmlns:mc="http://schemas.openxmlformats.org/markup-compatibility/2006">
+        <mc:Choice xmlns:p14="http://schemas.microsoft.com/office/powerpoint/2010/main" Requires="p14">
+          <p:contentPart p14:bwMode="auto" r:id="rId7">
+            <p14:nvContentPartPr>
+              <p14:cNvPr id="13" name="墨迹 12">
+                <a:extLst>
+                  <a:ext uri="{FF2B5EF4-FFF2-40B4-BE49-F238E27FC236}">
+                    <a16:creationId xmlns:a16="http://schemas.microsoft.com/office/drawing/2014/main" id="{2EC33EB1-03DA-FDC4-7D2F-3B3545673D48}"/>
+                  </a:ext>
+                </a:extLst>
+              </p14:cNvPr>
+              <p14:cNvContentPartPr/>
+              <p14:nvPr/>
+            </p14:nvContentPartPr>
+            <p14:xfrm>
+              <a:off x="10659377" y="3953726"/>
+              <a:ext cx="360" cy="360"/>
+            </p14:xfrm>
+          </p:contentPart>
+        </mc:Choice>
+        <mc:Fallback>
+          <p:pic>
+            <p:nvPicPr>
+              <p:cNvPr id="13" name="墨迹 12">
+                <a:extLst>
+                  <a:ext uri="{FF2B5EF4-FFF2-40B4-BE49-F238E27FC236}">
+                    <a16:creationId xmlns:a16="http://schemas.microsoft.com/office/drawing/2014/main" id="{2EC33EB1-03DA-FDC4-7D2F-3B3545673D48}"/>
+                  </a:ext>
+                </a:extLst>
+              </p:cNvPr>
+              <p:cNvPicPr/>
+              <p:nvPr/>
+            </p:nvPicPr>
+            <p:blipFill>
+              <a:blip r:embed="rId8"/>
+              <a:stretch>
+                <a:fillRect/>
+              </a:stretch>
+            </p:blipFill>
+            <p:spPr>
+              <a:xfrm>
+                <a:off x="10650377" y="3944726"/>
+                <a:ext cx="18000" cy="18000"/>
+              </a:xfrm>
+              <a:prstGeom prst="rect">
+                <a:avLst/>
+              </a:prstGeom>
+            </p:spPr>
+          </p:pic>
+        </mc:Fallback>
+      </mc:AlternateContent>
+      <p:pic>
+        <p:nvPicPr>
+          <p:cNvPr id="15" name="图片 14">
+            <a:extLst>
+              <a:ext uri="{FF2B5EF4-FFF2-40B4-BE49-F238E27FC236}">
+                <a16:creationId xmlns:a16="http://schemas.microsoft.com/office/drawing/2014/main" id="{772EA92A-0053-8FE9-A2F0-56B1B8A38023}"/>
+              </a:ext>
+            </a:extLst>
+          </p:cNvPr>
+          <p:cNvPicPr>
+            <a:picLocks noChangeAspect="1"/>
+          </p:cNvPicPr>
+          <p:nvPr/>
+        </p:nvPicPr>
+        <p:blipFill>
+          <a:blip r:embed="rId9"/>
+          <a:stretch>
+            <a:fillRect/>
+          </a:stretch>
+        </p:blipFill>
+        <p:spPr>
+          <a:xfrm>
+            <a:off x="10589837" y="4097006"/>
+            <a:ext cx="370382" cy="222229"/>
+          </a:xfrm>
+          <a:prstGeom prst="rect">
+            <a:avLst/>
+          </a:prstGeom>
+        </p:spPr>
+      </p:pic>
     </p:spTree>
     <p:extLst>
       <p:ext uri="{BB962C8B-B14F-4D97-AF65-F5344CB8AC3E}">
@@ -22879,7 +23286,7 @@
               <a:buNone/>
             </a:pPr>
             <a:r>
-              <a:rPr lang="zh-CN" sz="1200">
+              <a:rPr lang="zh-CN" sz="1200" dirty="0">
                 <a:solidFill>
                   <a:srgbClr val="CF8E6D"/>
                 </a:solidFill>
@@ -22889,7 +23296,7 @@
               <a:t>CREATE TABLE</a:t>
             </a:r>
             <a:r>
-              <a:rPr lang="zh-CN" sz="1200">
+              <a:rPr lang="zh-CN" sz="1200" dirty="0">
                 <a:solidFill>
                   <a:srgbClr val="BCBEC4"/>
                 </a:solidFill>
@@ -22899,7 +23306,7 @@
               <a:t> `</a:t>
             </a:r>
             <a:r>
-              <a:rPr lang="zh-CN" sz="1200">
+              <a:rPr lang="zh-CN" sz="1200" dirty="0">
                 <a:solidFill>
                   <a:srgbClr val="56A8F5"/>
                 </a:solidFill>
@@ -22909,7 +23316,7 @@
               <a:t>u</a:t>
             </a:r>
             <a:r>
-              <a:rPr lang="en-US" altLang="zh-CN" sz="1200">
+              <a:rPr lang="en-US" altLang="zh-CN" sz="1200" dirty="0">
                 <a:solidFill>
                   <a:srgbClr val="56A8F5"/>
                 </a:solidFill>
@@ -22919,7 +23326,7 @@
               <a:t>s</a:t>
             </a:r>
             <a:r>
-              <a:rPr lang="zh-CN" sz="1200">
+              <a:rPr lang="zh-CN" sz="1200" dirty="0">
                 <a:solidFill>
                   <a:srgbClr val="56A8F5"/>
                 </a:solidFill>
@@ -22929,7 +23336,7 @@
               <a:t>e</a:t>
             </a:r>
             <a:r>
-              <a:rPr lang="en-US" altLang="zh-CN" sz="1200">
+              <a:rPr lang="en-US" altLang="zh-CN" sz="1200" dirty="0">
                 <a:solidFill>
                   <a:srgbClr val="56A8F5"/>
                 </a:solidFill>
@@ -22939,7 +23346,7 @@
               <a:t>r</a:t>
             </a:r>
             <a:r>
-              <a:rPr lang="zh-CN" sz="1200">
+              <a:rPr lang="zh-CN" sz="1200" dirty="0">
                 <a:solidFill>
                   <a:srgbClr val="BCBEC4"/>
                 </a:solidFill>
@@ -22949,7 +23356,7 @@
               <a:t>` (</a:t>
             </a:r>
             <a:br>
-              <a:rPr lang="zh-CN" sz="1200">
+              <a:rPr lang="zh-CN" sz="1200" dirty="0">
                 <a:solidFill>
                   <a:srgbClr val="BCBEC4"/>
                 </a:solidFill>
@@ -22958,7 +23365,7 @@
               </a:rPr>
             </a:br>
             <a:r>
-              <a:rPr lang="zh-CN" sz="1200">
+              <a:rPr lang="zh-CN" sz="1200" dirty="0">
                 <a:solidFill>
                   <a:srgbClr val="BCBEC4"/>
                 </a:solidFill>
@@ -22968,7 +23375,7 @@
               <a:t> `</a:t>
             </a:r>
             <a:r>
-              <a:rPr lang="zh-CN" sz="1200">
+              <a:rPr lang="zh-CN" sz="1200" dirty="0">
                 <a:solidFill>
                   <a:srgbClr val="6AAB73"/>
                 </a:solidFill>
@@ -22978,7 +23385,7 @@
               <a:t>u</a:t>
             </a:r>
             <a:r>
-              <a:rPr lang="en-US" altLang="zh-CN" sz="1200">
+              <a:rPr lang="en-US" altLang="zh-CN" sz="1200" dirty="0">
                 <a:solidFill>
                   <a:srgbClr val="6AAB73"/>
                 </a:solidFill>
@@ -22988,7 +23395,7 @@
               <a:t>ser</a:t>
             </a:r>
             <a:r>
-              <a:rPr lang="zh-CN" sz="1200">
+              <a:rPr lang="zh-CN" sz="1200" dirty="0">
                 <a:solidFill>
                   <a:srgbClr val="6AAB73"/>
                 </a:solidFill>
@@ -22998,7 +23405,7 @@
               <a:t>ID</a:t>
             </a:r>
             <a:r>
-              <a:rPr lang="zh-CN" sz="1200">
+              <a:rPr lang="zh-CN" sz="1200" dirty="0">
                 <a:solidFill>
                   <a:srgbClr val="BCBEC4"/>
                 </a:solidFill>
@@ -23008,7 +23415,7 @@
               <a:t>` </a:t>
             </a:r>
             <a:r>
-              <a:rPr lang="zh-CN" sz="1200">
+              <a:rPr lang="zh-CN" sz="1200" dirty="0">
                 <a:solidFill>
                   <a:srgbClr val="CF8E6D"/>
                 </a:solidFill>
@@ -23018,17 +23425,17 @@
               <a:t>int NOT NULL</a:t>
             </a:r>
             <a:r>
-              <a:rPr lang="zh-CN" altLang="en-US" sz="1200">
-                <a:solidFill>
-                  <a:srgbClr val="BCBEC4"/>
-                </a:solidFill>
-                <a:ea typeface="+mn-lt"/>
-                <a:cs typeface="+mn-lt"/>
-              </a:rPr>
-              <a:t> </a:t>
-            </a:r>
-            <a:r>
-              <a:rPr lang="en-US" altLang="zh-CN" sz="1200">
+              <a:rPr lang="zh-CN" altLang="en-US" sz="1200" dirty="0">
+                <a:solidFill>
+                  <a:srgbClr val="BCBEC4"/>
+                </a:solidFill>
+                <a:ea typeface="+mn-lt"/>
+                <a:cs typeface="+mn-lt"/>
+              </a:rPr>
+              <a:t> </a:t>
+            </a:r>
+            <a:r>
+              <a:rPr lang="en-US" altLang="zh-CN" sz="1200" dirty="0">
                 <a:solidFill>
                   <a:srgbClr val="BCBEC4"/>
                 </a:solidFill>
@@ -23038,7 +23445,7 @@
               <a:t>AUTO_INCRE</a:t>
             </a:r>
             <a:r>
-              <a:rPr lang="zh-CN" sz="1200">
+              <a:rPr lang="zh-CN" sz="1200" dirty="0">
                 <a:solidFill>
                   <a:srgbClr val="BCBEC4"/>
                 </a:solidFill>
@@ -23048,7 +23455,7 @@
               <a:t>M</a:t>
             </a:r>
             <a:r>
-              <a:rPr lang="en-US" altLang="zh-CN" sz="1200">
+              <a:rPr lang="en-US" altLang="zh-CN" sz="1200" dirty="0">
                 <a:solidFill>
                   <a:srgbClr val="BCBEC4"/>
                 </a:solidFill>
@@ -23058,7 +23465,7 @@
               <a:t>ENT</a:t>
             </a:r>
             <a:r>
-              <a:rPr lang="zh-CN" sz="1200">
+              <a:rPr lang="zh-CN" sz="1200" dirty="0">
                 <a:solidFill>
                   <a:srgbClr val="BCBEC4"/>
                 </a:solidFill>
@@ -23068,7 +23475,7 @@
               <a:t>,</a:t>
             </a:r>
             <a:br>
-              <a:rPr lang="zh-CN" sz="1200">
+              <a:rPr lang="zh-CN" sz="1200" dirty="0">
                 <a:solidFill>
                   <a:srgbClr val="BCBEC4"/>
                 </a:solidFill>
@@ -23077,7 +23484,7 @@
               </a:rPr>
             </a:br>
             <a:r>
-              <a:rPr lang="zh-CN" sz="1200">
+              <a:rPr lang="zh-CN" sz="1200" dirty="0">
                 <a:solidFill>
                   <a:srgbClr val="BCBEC4"/>
                 </a:solidFill>
@@ -23087,7 +23494,7 @@
               <a:t> `</a:t>
             </a:r>
             <a:r>
-              <a:rPr lang="en-US" altLang="zh-CN" sz="1200">
+              <a:rPr lang="en-US" altLang="zh-CN" sz="1200" dirty="0">
                 <a:solidFill>
                   <a:srgbClr val="6AAB73"/>
                 </a:solidFill>
@@ -23097,7 +23504,7 @@
               <a:t>us</a:t>
             </a:r>
             <a:r>
-              <a:rPr lang="zh-CN" sz="1200">
+              <a:rPr lang="zh-CN" sz="1200" dirty="0">
                 <a:solidFill>
                   <a:srgbClr val="6AAB73"/>
                 </a:solidFill>
@@ -23107,7 +23514,7 @@
               <a:t>e</a:t>
             </a:r>
             <a:r>
-              <a:rPr lang="en-US" altLang="zh-CN" sz="1200" err="1">
+              <a:rPr lang="en-US" altLang="zh-CN" sz="1200" dirty="0">
                 <a:solidFill>
                   <a:srgbClr val="6AAB73"/>
                 </a:solidFill>
@@ -23117,7 +23524,7 @@
               <a:t>rna</a:t>
             </a:r>
             <a:r>
-              <a:rPr lang="zh-CN" sz="1200">
+              <a:rPr lang="zh-CN" sz="1200" dirty="0">
                 <a:solidFill>
                   <a:srgbClr val="6AAB73"/>
                 </a:solidFill>
@@ -23127,7 +23534,7 @@
               <a:t>m</a:t>
             </a:r>
             <a:r>
-              <a:rPr lang="en-US" altLang="zh-CN" sz="1200">
+              <a:rPr lang="en-US" altLang="zh-CN" sz="1200" dirty="0">
                 <a:solidFill>
                   <a:srgbClr val="6AAB73"/>
                 </a:solidFill>
@@ -23137,7 +23544,7 @@
               <a:t>e</a:t>
             </a:r>
             <a:r>
-              <a:rPr lang="zh-CN" sz="1200">
+              <a:rPr lang="zh-CN" sz="1200" dirty="0">
                 <a:solidFill>
                   <a:srgbClr val="BCBEC4"/>
                 </a:solidFill>
@@ -23147,7 +23554,7 @@
               <a:t>` </a:t>
             </a:r>
             <a:r>
-              <a:rPr lang="en-US" altLang="zh-CN" sz="1200">
+              <a:rPr lang="en-US" altLang="zh-CN" sz="1200" dirty="0">
                 <a:solidFill>
                   <a:srgbClr val="CF8E6D"/>
                 </a:solidFill>
@@ -23157,7 +23564,7 @@
               <a:t>varchar</a:t>
             </a:r>
             <a:r>
-              <a:rPr lang="zh-CN" sz="1200">
+              <a:rPr lang="zh-CN" sz="1200" dirty="0">
                 <a:solidFill>
                   <a:srgbClr val="BCBEC4"/>
                 </a:solidFill>
@@ -23167,7 +23574,7 @@
               <a:t>(</a:t>
             </a:r>
             <a:r>
-              <a:rPr lang="en-US" altLang="zh-CN" sz="1200" i="1">
+              <a:rPr lang="en-US" altLang="zh-CN" sz="1200" i="1" dirty="0">
                 <a:solidFill>
                   <a:srgbClr val="2AACB8"/>
                 </a:solidFill>
@@ -23177,7 +23584,7 @@
               <a:t>45</a:t>
             </a:r>
             <a:r>
-              <a:rPr lang="en-US" altLang="zh-CN" sz="1200">
+              <a:rPr lang="en-US" altLang="zh-CN" sz="1200" dirty="0">
                 <a:solidFill>
                   <a:srgbClr val="BCBEC4"/>
                 </a:solidFill>
@@ -23187,17 +23594,17 @@
               <a:t>)</a:t>
             </a:r>
             <a:r>
-              <a:rPr lang="zh-CN" altLang="en-US" sz="1200">
-                <a:solidFill>
-                  <a:srgbClr val="BCBEC4"/>
-                </a:solidFill>
-                <a:ea typeface="+mn-lt"/>
-                <a:cs typeface="+mn-lt"/>
-              </a:rPr>
-              <a:t> </a:t>
-            </a:r>
-            <a:r>
-              <a:rPr lang="zh-CN" sz="1200">
+              <a:rPr lang="zh-CN" altLang="en-US" sz="1200" dirty="0">
+                <a:solidFill>
+                  <a:srgbClr val="BCBEC4"/>
+                </a:solidFill>
+                <a:ea typeface="+mn-lt"/>
+                <a:cs typeface="+mn-lt"/>
+              </a:rPr>
+              <a:t> </a:t>
+            </a:r>
+            <a:r>
+              <a:rPr lang="zh-CN" sz="1200" dirty="0">
                 <a:solidFill>
                   <a:srgbClr val="CF8E6D"/>
                 </a:solidFill>
@@ -23207,7 +23614,7 @@
               <a:t>NOT NULL</a:t>
             </a:r>
             <a:r>
-              <a:rPr lang="zh-CN" sz="1200">
+              <a:rPr lang="zh-CN" sz="1200" dirty="0">
                 <a:solidFill>
                   <a:srgbClr val="BCBEC4"/>
                 </a:solidFill>
@@ -23217,7 +23624,7 @@
               <a:t>,</a:t>
             </a:r>
             <a:br>
-              <a:rPr lang="zh-CN" sz="1200">
+              <a:rPr lang="zh-CN" sz="1200" dirty="0">
                 <a:solidFill>
                   <a:srgbClr val="BCBEC4"/>
                 </a:solidFill>
@@ -23226,7 +23633,7 @@
               </a:rPr>
             </a:br>
             <a:r>
-              <a:rPr lang="zh-CN" sz="1200">
+              <a:rPr lang="zh-CN" sz="1200" dirty="0">
                 <a:solidFill>
                   <a:srgbClr val="BCBEC4"/>
                 </a:solidFill>
@@ -23236,7 +23643,7 @@
               <a:t> `</a:t>
             </a:r>
             <a:r>
-              <a:rPr lang="zh-CN" sz="1200">
+              <a:rPr lang="zh-CN" sz="1200" dirty="0">
                 <a:solidFill>
                   <a:srgbClr val="6AAB73"/>
                 </a:solidFill>
@@ -23246,7 +23653,7 @@
               <a:t>pa</a:t>
             </a:r>
             <a:r>
-              <a:rPr lang="en-US" altLang="zh-CN" sz="1200" err="1">
+              <a:rPr lang="en-US" altLang="zh-CN" sz="1200" noProof="1">
                 <a:solidFill>
                   <a:srgbClr val="6AAB73"/>
                 </a:solidFill>
@@ -23256,7 +23663,7 @@
               <a:t>ssword</a:t>
             </a:r>
             <a:r>
-              <a:rPr lang="zh-CN" sz="1200">
+              <a:rPr lang="zh-CN" sz="1200" dirty="0">
                 <a:solidFill>
                   <a:srgbClr val="BCBEC4"/>
                 </a:solidFill>
@@ -23266,7 +23673,7 @@
               <a:t>` </a:t>
             </a:r>
             <a:r>
-              <a:rPr lang="en-US" altLang="zh-CN" sz="1200">
+              <a:rPr lang="en-US" altLang="zh-CN" sz="1200" dirty="0">
                 <a:solidFill>
                   <a:srgbClr val="CF8E6D"/>
                 </a:solidFill>
@@ -23276,7 +23683,7 @@
               <a:t>varchar</a:t>
             </a:r>
             <a:r>
-              <a:rPr lang="zh-CN" sz="1200">
+              <a:rPr lang="zh-CN" sz="1200" dirty="0">
                 <a:solidFill>
                   <a:srgbClr val="BCBEC4"/>
                 </a:solidFill>
@@ -23286,7 +23693,7 @@
               <a:t>(</a:t>
             </a:r>
             <a:r>
-              <a:rPr lang="en-US" altLang="zh-CN" sz="1200" i="1">
+              <a:rPr lang="en-US" altLang="zh-CN" sz="1200" i="1" dirty="0">
                 <a:solidFill>
                   <a:srgbClr val="2AACB8"/>
                 </a:solidFill>
@@ -23296,7 +23703,7 @@
               <a:t>45</a:t>
             </a:r>
             <a:r>
-              <a:rPr lang="zh-CN" sz="1200">
+              <a:rPr lang="zh-CN" sz="1200" dirty="0">
                 <a:solidFill>
                   <a:srgbClr val="BCBEC4"/>
                 </a:solidFill>
@@ -23306,17 +23713,17 @@
               <a:t>)</a:t>
             </a:r>
             <a:r>
-              <a:rPr lang="zh-CN" altLang="en-US" sz="1200">
-                <a:solidFill>
-                  <a:srgbClr val="BCBEC4"/>
-                </a:solidFill>
-                <a:ea typeface="+mn-lt"/>
-                <a:cs typeface="+mn-lt"/>
-              </a:rPr>
-              <a:t> </a:t>
-            </a:r>
-            <a:r>
-              <a:rPr lang="en-US" altLang="zh-CN" sz="1200">
+              <a:rPr lang="zh-CN" altLang="en-US" sz="1200" dirty="0">
+                <a:solidFill>
+                  <a:srgbClr val="BCBEC4"/>
+                </a:solidFill>
+                <a:ea typeface="+mn-lt"/>
+                <a:cs typeface="+mn-lt"/>
+              </a:rPr>
+              <a:t> </a:t>
+            </a:r>
+            <a:r>
+              <a:rPr lang="en-US" altLang="zh-CN" sz="1200" dirty="0">
                 <a:solidFill>
                   <a:srgbClr val="CF8E6D"/>
                 </a:solidFill>
@@ -23326,7 +23733,7 @@
               <a:t>N</a:t>
             </a:r>
             <a:r>
-              <a:rPr lang="zh-CN" sz="1200">
+              <a:rPr lang="zh-CN" sz="1200" dirty="0">
                 <a:solidFill>
                   <a:srgbClr val="CF8E6D"/>
                 </a:solidFill>
@@ -23336,7 +23743,7 @@
               <a:t>OT</a:t>
             </a:r>
             <a:r>
-              <a:rPr lang="zh-CN" altLang="en-US" sz="1200">
+              <a:rPr lang="zh-CN" altLang="en-US" sz="1200" dirty="0">
                 <a:solidFill>
                   <a:srgbClr val="CF8E6D"/>
                 </a:solidFill>
@@ -23346,7 +23753,7 @@
               <a:t> </a:t>
             </a:r>
             <a:r>
-              <a:rPr lang="zh-CN" sz="1200">
+              <a:rPr lang="zh-CN" sz="1200" dirty="0">
                 <a:solidFill>
                   <a:srgbClr val="CF8E6D"/>
                 </a:solidFill>
@@ -23356,7 +23763,7 @@
               <a:t>N</a:t>
             </a:r>
             <a:r>
-              <a:rPr lang="en-US" altLang="zh-CN" sz="1200">
+              <a:rPr lang="en-US" altLang="zh-CN" sz="1200" dirty="0">
                 <a:solidFill>
                   <a:srgbClr val="CF8E6D"/>
                 </a:solidFill>
@@ -23366,7 +23773,7 @@
               <a:t>ULL</a:t>
             </a:r>
             <a:r>
-              <a:rPr lang="en-US" altLang="zh-CN" sz="1200">
+              <a:rPr lang="en-US" altLang="zh-CN" sz="1200" dirty="0">
                 <a:solidFill>
                   <a:srgbClr val="BCBEC4"/>
                 </a:solidFill>
@@ -23376,7 +23783,7 @@
               <a:t>,</a:t>
             </a:r>
             <a:br>
-              <a:rPr lang="zh-CN" altLang="en-US" sz="1200">
+              <a:rPr lang="zh-CN" altLang="en-US" sz="1200" dirty="0">
                 <a:solidFill>
                   <a:srgbClr val="BCBEC4"/>
                 </a:solidFill>
@@ -23385,17 +23792,17 @@
               </a:rPr>
             </a:br>
             <a:r>
-              <a:rPr lang="zh-CN" altLang="en-US" sz="1200">
-                <a:solidFill>
-                  <a:srgbClr val="BCBEC4"/>
-                </a:solidFill>
-                <a:ea typeface="+mn-lt"/>
-                <a:cs typeface="+mn-lt"/>
-              </a:rPr>
-              <a:t> </a:t>
-            </a:r>
-            <a:r>
-              <a:rPr lang="zh-CN" sz="1200">
+              <a:rPr lang="zh-CN" altLang="en-US" sz="1200" dirty="0">
+                <a:solidFill>
+                  <a:srgbClr val="BCBEC4"/>
+                </a:solidFill>
+                <a:ea typeface="+mn-lt"/>
+                <a:cs typeface="+mn-lt"/>
+              </a:rPr>
+              <a:t> </a:t>
+            </a:r>
+            <a:r>
+              <a:rPr lang="zh-CN" sz="1200" dirty="0">
                 <a:solidFill>
                   <a:srgbClr val="BCBEC4"/>
                 </a:solidFill>
@@ -23405,7 +23812,7 @@
               <a:t>`</a:t>
             </a:r>
             <a:r>
-              <a:rPr lang="zh-CN" sz="1200">
+              <a:rPr lang="zh-CN" sz="1200" dirty="0">
                 <a:solidFill>
                   <a:srgbClr val="6AAB73"/>
                 </a:solidFill>
@@ -23415,7 +23822,7 @@
               <a:t>a</a:t>
             </a:r>
             <a:r>
-              <a:rPr lang="en-US" altLang="zh-CN" sz="1200" err="1">
+              <a:rPr lang="en-US" altLang="zh-CN" sz="1200" dirty="0" err="1">
                 <a:solidFill>
                   <a:srgbClr val="6AAB73"/>
                 </a:solidFill>
@@ -23425,7 +23832,7 @@
               <a:t>ddr</a:t>
             </a:r>
             <a:r>
-              <a:rPr lang="zh-CN" sz="1200">
+              <a:rPr lang="zh-CN" sz="1200" dirty="0">
                 <a:solidFill>
                   <a:srgbClr val="6AAB73"/>
                 </a:solidFill>
@@ -23435,7 +23842,7 @@
               <a:t>e</a:t>
             </a:r>
             <a:r>
-              <a:rPr lang="en-US" altLang="zh-CN" sz="1200">
+              <a:rPr lang="en-US" altLang="zh-CN" sz="1200" dirty="0">
                 <a:solidFill>
                   <a:srgbClr val="6AAB73"/>
                 </a:solidFill>
@@ -23445,7 +23852,7 @@
               <a:t>ss</a:t>
             </a:r>
             <a:r>
-              <a:rPr lang="zh-CN" sz="1200">
+              <a:rPr lang="zh-CN" sz="1200" dirty="0">
                 <a:solidFill>
                   <a:srgbClr val="BCBEC4"/>
                 </a:solidFill>
@@ -23455,7 +23862,7 @@
               <a:t>` </a:t>
             </a:r>
             <a:r>
-              <a:rPr lang="en-US" altLang="zh-CN" sz="1200">
+              <a:rPr lang="en-US" altLang="zh-CN" sz="1200" dirty="0">
                 <a:solidFill>
                   <a:srgbClr val="CF8E6D"/>
                 </a:solidFill>
@@ -23465,7 +23872,7 @@
               <a:t>varchar</a:t>
             </a:r>
             <a:r>
-              <a:rPr lang="zh-CN" sz="1200">
+              <a:rPr lang="zh-CN" sz="1200" dirty="0">
                 <a:solidFill>
                   <a:srgbClr val="BCBEC4"/>
                 </a:solidFill>
@@ -23475,7 +23882,7 @@
               <a:t>(</a:t>
             </a:r>
             <a:r>
-              <a:rPr lang="en-US" altLang="zh-CN" sz="1200" i="1">
+              <a:rPr lang="en-US" altLang="zh-CN" sz="1200" i="1" dirty="0">
                 <a:solidFill>
                   <a:srgbClr val="2AACB8"/>
                 </a:solidFill>
@@ -23485,7 +23892,7 @@
               <a:t>45</a:t>
             </a:r>
             <a:r>
-              <a:rPr lang="zh-CN" sz="1200">
+              <a:rPr lang="zh-CN" sz="1200" dirty="0">
                 <a:solidFill>
                   <a:srgbClr val="BCBEC4"/>
                 </a:solidFill>
@@ -23495,7 +23902,7 @@
               <a:t>) </a:t>
             </a:r>
             <a:r>
-              <a:rPr lang="zh-CN" sz="1200">
+              <a:rPr lang="zh-CN" sz="1200" dirty="0">
                 <a:solidFill>
                   <a:srgbClr val="CF8E6D"/>
                 </a:solidFill>
@@ -23505,7 +23912,7 @@
               <a:t>NOT</a:t>
             </a:r>
             <a:r>
-              <a:rPr lang="zh-CN" altLang="en-US" sz="1200">
+              <a:rPr lang="zh-CN" altLang="en-US" sz="1200" dirty="0">
                 <a:solidFill>
                   <a:srgbClr val="CF8E6D"/>
                 </a:solidFill>
@@ -23515,7 +23922,7 @@
               <a:t> </a:t>
             </a:r>
             <a:r>
-              <a:rPr lang="zh-CN" sz="1200">
+              <a:rPr lang="zh-CN" sz="1200" dirty="0">
                 <a:solidFill>
                   <a:srgbClr val="CF8E6D"/>
                 </a:solidFill>
@@ -23525,7 +23932,7 @@
               <a:t>NU</a:t>
             </a:r>
             <a:r>
-              <a:rPr lang="en-US" altLang="zh-CN" sz="1200">
+              <a:rPr lang="en-US" altLang="zh-CN" sz="1200" dirty="0">
                 <a:solidFill>
                   <a:srgbClr val="CF8E6D"/>
                 </a:solidFill>
@@ -23535,7 +23942,7 @@
               <a:t>LL</a:t>
             </a:r>
             <a:r>
-              <a:rPr lang="en-US" altLang="zh-CN" sz="1200">
+              <a:rPr lang="en-US" altLang="zh-CN" sz="1200" dirty="0">
                 <a:solidFill>
                   <a:srgbClr val="BCBEC4"/>
                 </a:solidFill>
@@ -23545,7 +23952,7 @@
               <a:t>,</a:t>
             </a:r>
             <a:br>
-              <a:rPr lang="zh-CN" altLang="en-US" sz="1200">
+              <a:rPr lang="zh-CN" altLang="en-US" sz="1200" dirty="0">
                 <a:solidFill>
                   <a:srgbClr val="BCBEC4"/>
                 </a:solidFill>
@@ -23554,17 +23961,17 @@
               </a:rPr>
             </a:br>
             <a:r>
-              <a:rPr lang="zh-CN" altLang="en-US" sz="1200">
-                <a:solidFill>
-                  <a:srgbClr val="BCBEC4"/>
-                </a:solidFill>
-                <a:ea typeface="+mn-lt"/>
-                <a:cs typeface="+mn-lt"/>
-              </a:rPr>
-              <a:t> </a:t>
-            </a:r>
-            <a:r>
-              <a:rPr lang="zh-CN" sz="1200">
+              <a:rPr lang="zh-CN" altLang="en-US" sz="1200" dirty="0">
+                <a:solidFill>
+                  <a:srgbClr val="BCBEC4"/>
+                </a:solidFill>
+                <a:ea typeface="+mn-lt"/>
+                <a:cs typeface="+mn-lt"/>
+              </a:rPr>
+              <a:t> </a:t>
+            </a:r>
+            <a:r>
+              <a:rPr lang="zh-CN" sz="1200" dirty="0">
                 <a:solidFill>
                   <a:srgbClr val="CF8E6D"/>
                 </a:solidFill>
@@ -23574,7 +23981,7 @@
               <a:t>PR</a:t>
             </a:r>
             <a:r>
-              <a:rPr lang="en-US" altLang="zh-CN" sz="1200">
+              <a:rPr lang="en-US" altLang="zh-CN" sz="1200" dirty="0">
                 <a:solidFill>
                   <a:srgbClr val="CF8E6D"/>
                 </a:solidFill>
@@ -23584,7 +23991,7 @@
               <a:t>IM</a:t>
             </a:r>
             <a:r>
-              <a:rPr lang="zh-CN" sz="1200">
+              <a:rPr lang="zh-CN" sz="1200" dirty="0">
                 <a:solidFill>
                   <a:srgbClr val="CF8E6D"/>
                 </a:solidFill>
@@ -23594,7 +24001,7 @@
               <a:t>AR</a:t>
             </a:r>
             <a:r>
-              <a:rPr lang="en-US" altLang="zh-CN" sz="1200">
+              <a:rPr lang="en-US" altLang="zh-CN" sz="1200" dirty="0">
                 <a:solidFill>
                   <a:srgbClr val="CF8E6D"/>
                 </a:solidFill>
@@ -23604,7 +24011,7 @@
               <a:t>Y</a:t>
             </a:r>
             <a:r>
-              <a:rPr lang="zh-CN" altLang="en-US" sz="1200">
+              <a:rPr lang="zh-CN" altLang="en-US" sz="1200" dirty="0">
                 <a:solidFill>
                   <a:srgbClr val="CF8E6D"/>
                 </a:solidFill>
@@ -23614,7 +24021,7 @@
               <a:t> </a:t>
             </a:r>
             <a:r>
-              <a:rPr lang="zh-CN" sz="1200">
+              <a:rPr lang="zh-CN" sz="1200" dirty="0">
                 <a:solidFill>
                   <a:srgbClr val="CF8E6D"/>
                 </a:solidFill>
@@ -23624,7 +24031,7 @@
               <a:t>KEY</a:t>
             </a:r>
             <a:r>
-              <a:rPr lang="zh-CN" sz="1200">
+              <a:rPr lang="zh-CN" sz="1200" dirty="0">
                 <a:solidFill>
                   <a:srgbClr val="BCBEC4"/>
                 </a:solidFill>
@@ -23634,7 +24041,7 @@
               <a:t> (`</a:t>
             </a:r>
             <a:r>
-              <a:rPr lang="zh-CN" sz="1200">
+              <a:rPr lang="zh-CN" sz="1200" dirty="0">
                 <a:solidFill>
                   <a:srgbClr val="6AAB73"/>
                 </a:solidFill>
@@ -23644,7 +24051,7 @@
               <a:t>u</a:t>
             </a:r>
             <a:r>
-              <a:rPr lang="en-US" altLang="zh-CN" sz="1200">
+              <a:rPr lang="en-US" altLang="zh-CN" sz="1200" dirty="0">
                 <a:solidFill>
                   <a:srgbClr val="6AAB73"/>
                 </a:solidFill>
@@ -23654,7 +24061,7 @@
               <a:t>ser</a:t>
             </a:r>
             <a:r>
-              <a:rPr lang="zh-CN" sz="1200">
+              <a:rPr lang="zh-CN" sz="1200" dirty="0">
                 <a:solidFill>
                   <a:srgbClr val="6AAB73"/>
                 </a:solidFill>
@@ -23664,7 +24071,7 @@
               <a:t>ID</a:t>
             </a:r>
             <a:r>
-              <a:rPr lang="zh-CN" sz="1200">
+              <a:rPr lang="zh-CN" sz="1200" dirty="0">
                 <a:solidFill>
                   <a:srgbClr val="BCBEC4"/>
                 </a:solidFill>
@@ -23674,7 +24081,7 @@
               <a:t>`)</a:t>
             </a:r>
             <a:br>
-              <a:rPr lang="zh-CN" sz="1200">
+              <a:rPr lang="zh-CN" sz="1200" dirty="0">
                 <a:solidFill>
                   <a:srgbClr val="BCBEC4"/>
                 </a:solidFill>
@@ -23683,7 +24090,7 @@
               </a:rPr>
             </a:br>
             <a:r>
-              <a:rPr lang="zh-CN" sz="1200">
+              <a:rPr lang="zh-CN" sz="1200" dirty="0">
                 <a:solidFill>
                   <a:srgbClr val="BCBEC4"/>
                 </a:solidFill>
@@ -23692,7 +24099,7 @@
               </a:rPr>
               <a:t>)</a:t>
             </a:r>
-            <a:endParaRPr lang="zh-CN">
+            <a:endParaRPr lang="zh-CN" dirty="0">
               <a:ea typeface="+mn-lt"/>
               <a:cs typeface="+mn-lt"/>
             </a:endParaRPr>
@@ -23702,7 +24109,7 @@
               <a:buNone/>
             </a:pPr>
             <a:r>
-              <a:rPr lang="en-US" altLang="zh-CN" sz="1200">
+              <a:rPr lang="en-US" altLang="zh-CN" sz="1200" dirty="0">
                 <a:solidFill>
                   <a:srgbClr val="CF8E6D"/>
                 </a:solidFill>
@@ -23711,7 +24118,7 @@
               <a:t>CREATE</a:t>
             </a:r>
             <a:r>
-              <a:rPr lang="zh-CN" altLang="en-US" sz="1200">
+              <a:rPr lang="zh-CN" altLang="en-US" sz="1200" dirty="0">
                 <a:solidFill>
                   <a:srgbClr val="CF8E6D"/>
                 </a:solidFill>
@@ -23720,7 +24127,7 @@
               <a:t> </a:t>
             </a:r>
             <a:r>
-              <a:rPr lang="en-US" altLang="zh-CN" sz="1200">
+              <a:rPr lang="en-US" altLang="zh-CN" sz="1200" dirty="0">
                 <a:solidFill>
                   <a:srgbClr val="CF8E6D"/>
                 </a:solidFill>
@@ -23729,7 +24136,7 @@
               <a:t>TABLE</a:t>
             </a:r>
             <a:r>
-              <a:rPr lang="zh-CN" altLang="en-US" sz="1200">
+              <a:rPr lang="zh-CN" altLang="en-US" sz="1200" dirty="0">
                 <a:solidFill>
                   <a:srgbClr val="BCBEC4"/>
                 </a:solidFill>
@@ -23738,7 +24145,7 @@
               <a:t> </a:t>
             </a:r>
             <a:r>
-              <a:rPr lang="en-US" altLang="zh-CN" sz="1200">
+              <a:rPr lang="en-US" altLang="zh-CN" sz="1200" dirty="0">
                 <a:solidFill>
                   <a:srgbClr val="BCBEC4"/>
                 </a:solidFill>
@@ -23747,7 +24154,7 @@
               <a:t>`</a:t>
             </a:r>
             <a:r>
-              <a:rPr lang="en-US" altLang="zh-CN" sz="1200">
+              <a:rPr lang="en-US" altLang="zh-CN" sz="1200" dirty="0">
                 <a:solidFill>
                   <a:srgbClr val="56A8F5"/>
                 </a:solidFill>
@@ -23756,7 +24163,7 @@
               <a:t>item</a:t>
             </a:r>
             <a:r>
-              <a:rPr lang="en-US" altLang="zh-CN" sz="1200">
+              <a:rPr lang="en-US" altLang="zh-CN" sz="1200" dirty="0">
                 <a:solidFill>
                   <a:srgbClr val="BCBEC4"/>
                 </a:solidFill>
@@ -23765,7 +24172,7 @@
               <a:t>`</a:t>
             </a:r>
             <a:r>
-              <a:rPr lang="zh-CN" altLang="en-US" sz="1200">
+              <a:rPr lang="zh-CN" altLang="en-US" sz="1200" dirty="0">
                 <a:solidFill>
                   <a:srgbClr val="BCBEC4"/>
                 </a:solidFill>
@@ -23774,7 +24181,7 @@
               <a:t> </a:t>
             </a:r>
             <a:r>
-              <a:rPr lang="en-US" altLang="zh-CN" sz="1200">
+              <a:rPr lang="en-US" altLang="zh-CN" sz="1200" dirty="0">
                 <a:solidFill>
                   <a:srgbClr val="BCBEC4"/>
                 </a:solidFill>
@@ -23783,7 +24190,7 @@
               <a:t>(</a:t>
             </a:r>
             <a:br>
-              <a:rPr lang="zh-CN" altLang="en-US" sz="1200">
+              <a:rPr lang="zh-CN" altLang="en-US" sz="1200" dirty="0">
                 <a:solidFill>
                   <a:srgbClr val="BCBEC4"/>
                 </a:solidFill>
@@ -23791,7 +24198,7 @@
               </a:rPr>
             </a:br>
             <a:r>
-              <a:rPr lang="en-US" altLang="zh-CN" sz="1200">
+              <a:rPr lang="en-US" altLang="zh-CN" sz="1200" dirty="0">
                 <a:solidFill>
                   <a:srgbClr val="BCBEC4"/>
                 </a:solidFill>
@@ -23800,7 +24207,7 @@
               <a:t>`</a:t>
             </a:r>
             <a:r>
-              <a:rPr lang="en-US" altLang="zh-CN" sz="1200" err="1">
+              <a:rPr lang="en-US" altLang="zh-CN" sz="1200" dirty="0" err="1">
                 <a:solidFill>
                   <a:srgbClr val="6AAB73"/>
                 </a:solidFill>
@@ -23809,7 +24216,7 @@
               <a:t>item</a:t>
             </a:r>
             <a:r>
-              <a:rPr lang="en-US" altLang="zh-CN" sz="1200" err="1">
+              <a:rPr lang="en-US" altLang="zh-CN" sz="1200" dirty="0" err="1">
                 <a:solidFill>
                   <a:srgbClr val="6AAB73"/>
                 </a:solidFill>
@@ -23818,7 +24225,7 @@
               <a:t>ID</a:t>
             </a:r>
             <a:r>
-              <a:rPr lang="en-US" altLang="zh-CN" sz="1200">
+              <a:rPr lang="en-US" altLang="zh-CN" sz="1200" dirty="0">
                 <a:solidFill>
                   <a:srgbClr val="BCBEC4"/>
                 </a:solidFill>
@@ -23827,7 +24234,7 @@
               <a:t>`</a:t>
             </a:r>
             <a:r>
-              <a:rPr lang="zh-CN" altLang="en-US" sz="1200">
+              <a:rPr lang="zh-CN" altLang="en-US" sz="1200" dirty="0">
                 <a:solidFill>
                   <a:srgbClr val="BCBEC4"/>
                 </a:solidFill>
@@ -23836,7 +24243,7 @@
               <a:t> </a:t>
             </a:r>
             <a:r>
-              <a:rPr lang="en-US" altLang="zh-CN" sz="1200">
+              <a:rPr lang="en-US" altLang="zh-CN" sz="1200" dirty="0">
                 <a:solidFill>
                   <a:srgbClr val="CF8E6D"/>
                 </a:solidFill>
@@ -23845,7 +24252,7 @@
               <a:t>int</a:t>
             </a:r>
             <a:r>
-              <a:rPr lang="zh-CN" altLang="en-US" sz="1200">
+              <a:rPr lang="zh-CN" altLang="en-US" sz="1200" dirty="0">
                 <a:solidFill>
                   <a:srgbClr val="CF8E6D"/>
                 </a:solidFill>
@@ -23854,7 +24261,7 @@
               <a:t> </a:t>
             </a:r>
             <a:r>
-              <a:rPr lang="en-US" altLang="zh-CN" sz="1200">
+              <a:rPr lang="en-US" altLang="zh-CN" sz="1200" dirty="0">
                 <a:solidFill>
                   <a:srgbClr val="CF8E6D"/>
                 </a:solidFill>
@@ -23863,7 +24270,7 @@
               <a:t>NOT</a:t>
             </a:r>
             <a:r>
-              <a:rPr lang="zh-CN" altLang="en-US" sz="1200">
+              <a:rPr lang="zh-CN" altLang="en-US" sz="1200" dirty="0">
                 <a:solidFill>
                   <a:srgbClr val="CF8E6D"/>
                 </a:solidFill>
@@ -23872,7 +24279,7 @@
               <a:t> </a:t>
             </a:r>
             <a:r>
-              <a:rPr lang="en-US" altLang="zh-CN" sz="1200">
+              <a:rPr lang="en-US" altLang="zh-CN" sz="1200" dirty="0">
                 <a:solidFill>
                   <a:srgbClr val="CF8E6D"/>
                 </a:solidFill>
@@ -23881,7 +24288,7 @@
               <a:t>NULL</a:t>
             </a:r>
             <a:r>
-              <a:rPr lang="zh-CN" altLang="en-US" sz="1200">
+              <a:rPr lang="zh-CN" altLang="en-US" sz="1200" dirty="0">
                 <a:solidFill>
                   <a:srgbClr val="BCBEC4"/>
                 </a:solidFill>
@@ -23890,7 +24297,7 @@
               <a:t> </a:t>
             </a:r>
             <a:r>
-              <a:rPr lang="en-US" altLang="zh-CN" sz="1200">
+              <a:rPr lang="en-US" altLang="zh-CN" sz="1200" dirty="0">
                 <a:solidFill>
                   <a:srgbClr val="BCBEC4"/>
                 </a:solidFill>
@@ -23899,7 +24306,7 @@
               <a:t>AUT</a:t>
             </a:r>
             <a:r>
-              <a:rPr lang="en-US" altLang="zh-CN" sz="1200">
+              <a:rPr lang="en-US" altLang="zh-CN" sz="1200" dirty="0">
                 <a:solidFill>
                   <a:srgbClr val="BCBEC4"/>
                 </a:solidFill>
@@ -23908,7 +24315,7 @@
               <a:t>O</a:t>
             </a:r>
             <a:r>
-              <a:rPr lang="en-US" altLang="zh-CN" sz="1200">
+              <a:rPr lang="en-US" altLang="zh-CN" sz="1200" dirty="0">
                 <a:solidFill>
                   <a:srgbClr val="BCBEC4"/>
                 </a:solidFill>
@@ -23917,7 +24324,7 @@
               <a:t>_INCREM</a:t>
             </a:r>
             <a:r>
-              <a:rPr lang="en-US" altLang="zh-CN" sz="1200">
+              <a:rPr lang="en-US" altLang="zh-CN" sz="1200" dirty="0">
                 <a:solidFill>
                   <a:srgbClr val="BCBEC4"/>
                 </a:solidFill>
@@ -23926,7 +24333,7 @@
               <a:t>E</a:t>
             </a:r>
             <a:r>
-              <a:rPr lang="en-US" altLang="zh-CN" sz="1200">
+              <a:rPr lang="en-US" altLang="zh-CN" sz="1200" dirty="0">
                 <a:solidFill>
                   <a:srgbClr val="BCBEC4"/>
                 </a:solidFill>
@@ -23935,7 +24342,7 @@
               <a:t>NT</a:t>
             </a:r>
             <a:r>
-              <a:rPr lang="en-US" altLang="zh-CN" sz="1200">
+              <a:rPr lang="en-US" altLang="zh-CN" sz="1200" dirty="0">
                 <a:solidFill>
                   <a:srgbClr val="BCBEC4"/>
                 </a:solidFill>
@@ -23944,7 +24351,7 @@
               <a:t>,</a:t>
             </a:r>
             <a:br>
-              <a:rPr lang="zh-CN" altLang="en-US" sz="1200">
+              <a:rPr lang="zh-CN" altLang="en-US" sz="1200" dirty="0">
                 <a:solidFill>
                   <a:srgbClr val="BCBEC4"/>
                 </a:solidFill>
@@ -23952,7 +24359,7 @@
               </a:rPr>
             </a:br>
             <a:r>
-              <a:rPr lang="en-US" altLang="zh-CN" sz="1200">
+              <a:rPr lang="en-US" altLang="zh-CN" sz="1200" dirty="0">
                 <a:solidFill>
                   <a:srgbClr val="BCBEC4"/>
                 </a:solidFill>
@@ -23961,7 +24368,7 @@
               <a:t>`</a:t>
             </a:r>
             <a:r>
-              <a:rPr lang="en-US" altLang="zh-CN" sz="1200" err="1">
+              <a:rPr lang="en-US" altLang="zh-CN" sz="1200" dirty="0" err="1">
                 <a:solidFill>
                   <a:srgbClr val="6AAB73"/>
                 </a:solidFill>
@@ -23970,7 +24377,7 @@
               <a:t>item</a:t>
             </a:r>
             <a:r>
-              <a:rPr lang="en-US" altLang="zh-CN" sz="1200" err="1">
+              <a:rPr lang="en-US" altLang="zh-CN" sz="1200" dirty="0" err="1">
                 <a:solidFill>
                   <a:srgbClr val="6AAB73"/>
                 </a:solidFill>
@@ -23979,7 +24386,7 @@
               <a:t>Na</a:t>
             </a:r>
             <a:r>
-              <a:rPr lang="en-US" altLang="zh-CN" sz="1200" err="1">
+              <a:rPr lang="en-US" altLang="zh-CN" sz="1200" dirty="0" err="1">
                 <a:solidFill>
                   <a:srgbClr val="6AAB73"/>
                 </a:solidFill>
@@ -23988,7 +24395,7 @@
               <a:t>m</a:t>
             </a:r>
             <a:r>
-              <a:rPr lang="en-US" altLang="zh-CN" sz="1200" err="1">
+              <a:rPr lang="en-US" altLang="zh-CN" sz="1200" dirty="0" err="1">
                 <a:solidFill>
                   <a:srgbClr val="6AAB73"/>
                 </a:solidFill>
@@ -23997,7 +24404,7 @@
               <a:t>e</a:t>
             </a:r>
             <a:r>
-              <a:rPr lang="en-US" altLang="zh-CN" sz="1200">
+              <a:rPr lang="en-US" altLang="zh-CN" sz="1200" dirty="0">
                 <a:solidFill>
                   <a:srgbClr val="BCBEC4"/>
                 </a:solidFill>
@@ -24006,7 +24413,7 @@
               <a:t>`</a:t>
             </a:r>
             <a:r>
-              <a:rPr lang="zh-CN" altLang="en-US" sz="1200">
+              <a:rPr lang="zh-CN" altLang="en-US" sz="1200" dirty="0">
                 <a:solidFill>
                   <a:srgbClr val="BCBEC4"/>
                 </a:solidFill>
@@ -24015,7 +24422,7 @@
               <a:t> </a:t>
             </a:r>
             <a:r>
-              <a:rPr lang="en-US" altLang="zh-CN" sz="1200">
+              <a:rPr lang="en-US" altLang="zh-CN" sz="1200" dirty="0">
                 <a:solidFill>
                   <a:srgbClr val="CF8E6D"/>
                 </a:solidFill>
@@ -24024,7 +24431,7 @@
               <a:t>varchar</a:t>
             </a:r>
             <a:r>
-              <a:rPr lang="en-US" altLang="zh-CN" sz="1200">
+              <a:rPr lang="en-US" altLang="zh-CN" sz="1200" dirty="0">
                 <a:solidFill>
                   <a:srgbClr val="BCBEC4"/>
                 </a:solidFill>
@@ -24033,7 +24440,7 @@
               <a:t>(</a:t>
             </a:r>
             <a:r>
-              <a:rPr lang="en-US" altLang="zh-CN" sz="1200" i="1">
+              <a:rPr lang="en-US" altLang="zh-CN" sz="1200" i="1" dirty="0">
                 <a:solidFill>
                   <a:srgbClr val="2AACB8"/>
                 </a:solidFill>
@@ -24042,7 +24449,7 @@
               <a:t>45</a:t>
             </a:r>
             <a:r>
-              <a:rPr lang="en-US" altLang="zh-CN" sz="1200">
+              <a:rPr lang="en-US" altLang="zh-CN" sz="1200" dirty="0">
                 <a:solidFill>
                   <a:srgbClr val="BCBEC4"/>
                 </a:solidFill>
@@ -24051,7 +24458,7 @@
               <a:t>)</a:t>
             </a:r>
             <a:r>
-              <a:rPr lang="zh-CN" altLang="en-US" sz="1200">
+              <a:rPr lang="zh-CN" altLang="en-US" sz="1200" dirty="0">
                 <a:solidFill>
                   <a:srgbClr val="BCBEC4"/>
                 </a:solidFill>
@@ -24060,7 +24467,7 @@
               <a:t> </a:t>
             </a:r>
             <a:r>
-              <a:rPr lang="en-US" altLang="zh-CN" sz="1200">
+              <a:rPr lang="en-US" altLang="zh-CN" sz="1200" dirty="0">
                 <a:solidFill>
                   <a:srgbClr val="CF8E6D"/>
                 </a:solidFill>
@@ -24069,7 +24476,7 @@
               <a:t>NOT</a:t>
             </a:r>
             <a:r>
-              <a:rPr lang="zh-CN" altLang="en-US" sz="1200">
+              <a:rPr lang="zh-CN" altLang="en-US" sz="1200" dirty="0">
                 <a:solidFill>
                   <a:srgbClr val="CF8E6D"/>
                 </a:solidFill>
@@ -24078,7 +24485,7 @@
               <a:t> </a:t>
             </a:r>
             <a:r>
-              <a:rPr lang="en-US" altLang="zh-CN" sz="1200">
+              <a:rPr lang="en-US" altLang="zh-CN" sz="1200" dirty="0">
                 <a:solidFill>
                   <a:srgbClr val="CF8E6D"/>
                 </a:solidFill>
@@ -24087,7 +24494,7 @@
               <a:t>NULL</a:t>
             </a:r>
             <a:r>
-              <a:rPr lang="en-US" altLang="zh-CN" sz="1200">
+              <a:rPr lang="en-US" altLang="zh-CN" sz="1200" dirty="0">
                 <a:solidFill>
                   <a:srgbClr val="BCBEC4"/>
                 </a:solidFill>
@@ -24096,7 +24503,7 @@
               <a:t>,</a:t>
             </a:r>
             <a:br>
-              <a:rPr lang="zh-CN" altLang="en-US" sz="1200">
+              <a:rPr lang="zh-CN" altLang="en-US" sz="1200" dirty="0">
                 <a:solidFill>
                   <a:srgbClr val="BCBEC4"/>
                 </a:solidFill>
@@ -24104,7 +24511,7 @@
               </a:rPr>
             </a:br>
             <a:r>
-              <a:rPr lang="en-US" altLang="zh-CN" sz="1200">
+              <a:rPr lang="en-US" altLang="zh-CN" sz="1200" dirty="0">
                 <a:solidFill>
                   <a:srgbClr val="BCBEC4"/>
                 </a:solidFill>
@@ -24113,7 +24520,7 @@
               <a:t>`</a:t>
             </a:r>
             <a:r>
-              <a:rPr lang="en-US" altLang="zh-CN" sz="1200">
+              <a:rPr lang="en-US" altLang="zh-CN" sz="1200" dirty="0">
                 <a:solidFill>
                   <a:srgbClr val="6AAB73"/>
                 </a:solidFill>
@@ -24122,7 +24529,7 @@
               <a:t>des</a:t>
             </a:r>
             <a:r>
-              <a:rPr lang="en-US" altLang="zh-CN" sz="1200">
+              <a:rPr lang="en-US" altLang="zh-CN" sz="1200" dirty="0">
                 <a:solidFill>
                   <a:srgbClr val="6AAB73"/>
                 </a:solidFill>
@@ -24131,7 +24538,7 @@
               <a:t>c</a:t>
             </a:r>
             <a:r>
-              <a:rPr lang="en-US" altLang="zh-CN" sz="1200">
+              <a:rPr lang="en-US" altLang="zh-CN" sz="1200" dirty="0">
                 <a:solidFill>
                   <a:srgbClr val="6AAB73"/>
                 </a:solidFill>
@@ -24140,7 +24547,7 @@
               <a:t>rip</a:t>
             </a:r>
             <a:r>
-              <a:rPr lang="en-US" altLang="zh-CN" sz="1200">
+              <a:rPr lang="en-US" altLang="zh-CN" sz="1200" dirty="0">
                 <a:solidFill>
                   <a:srgbClr val="6AAB73"/>
                 </a:solidFill>
@@ -24149,7 +24556,7 @@
               <a:t>t</a:t>
             </a:r>
             <a:r>
-              <a:rPr lang="en-US" altLang="zh-CN" sz="1200">
+              <a:rPr lang="en-US" altLang="zh-CN" sz="1200" dirty="0">
                 <a:solidFill>
                   <a:srgbClr val="6AAB73"/>
                 </a:solidFill>
@@ -24158,7 +24565,7 @@
               <a:t>ion</a:t>
             </a:r>
             <a:r>
-              <a:rPr lang="en-US" altLang="zh-CN" sz="1200">
+              <a:rPr lang="en-US" altLang="zh-CN" sz="1200" dirty="0">
                 <a:solidFill>
                   <a:srgbClr val="BCBEC4"/>
                 </a:solidFill>
@@ -24167,7 +24574,7 @@
               <a:t>`</a:t>
             </a:r>
             <a:r>
-              <a:rPr lang="zh-CN" altLang="en-US" sz="1200">
+              <a:rPr lang="zh-CN" altLang="en-US" sz="1200" dirty="0">
                 <a:solidFill>
                   <a:srgbClr val="BCBEC4"/>
                 </a:solidFill>
@@ -24176,7 +24583,7 @@
               <a:t> </a:t>
             </a:r>
             <a:r>
-              <a:rPr lang="en-US" altLang="zh-CN" sz="1200">
+              <a:rPr lang="en-US" altLang="zh-CN" sz="1200" dirty="0">
                 <a:solidFill>
                   <a:srgbClr val="CF8E6D"/>
                 </a:solidFill>
@@ -24185,7 +24592,7 @@
               <a:t>t</a:t>
             </a:r>
             <a:r>
-              <a:rPr lang="en-US" altLang="zh-CN" sz="1200">
+              <a:rPr lang="en-US" altLang="zh-CN" sz="1200" dirty="0">
                 <a:solidFill>
                   <a:srgbClr val="CF8E6D"/>
                 </a:solidFill>
@@ -24194,7 +24601,7 @@
               <a:t>e</a:t>
             </a:r>
             <a:r>
-              <a:rPr lang="en-US" altLang="zh-CN" sz="1200">
+              <a:rPr lang="en-US" altLang="zh-CN" sz="1200" dirty="0">
                 <a:solidFill>
                   <a:srgbClr val="CF8E6D"/>
                 </a:solidFill>
@@ -24203,7 +24610,7 @@
               <a:t>xt</a:t>
             </a:r>
             <a:r>
-              <a:rPr lang="en-US" altLang="zh-CN" sz="1200">
+              <a:rPr lang="en-US" altLang="zh-CN" sz="1200" dirty="0">
                 <a:solidFill>
                   <a:srgbClr val="BCBEC4"/>
                 </a:solidFill>
@@ -24212,7 +24619,7 @@
               <a:t>,</a:t>
             </a:r>
             <a:br>
-              <a:rPr lang="zh-CN" altLang="en-US" sz="1200">
+              <a:rPr lang="zh-CN" altLang="en-US" sz="1200" dirty="0">
                 <a:solidFill>
                   <a:srgbClr val="BCBEC4"/>
                 </a:solidFill>
@@ -24220,7 +24627,7 @@
               </a:rPr>
             </a:br>
             <a:r>
-              <a:rPr lang="en-US" altLang="zh-CN" sz="1200">
+              <a:rPr lang="en-US" altLang="zh-CN" sz="1200" dirty="0">
                 <a:solidFill>
                   <a:srgbClr val="BCBEC4"/>
                 </a:solidFill>
@@ -24229,7 +24636,7 @@
               <a:t>`</a:t>
             </a:r>
             <a:r>
-              <a:rPr lang="en-US" altLang="zh-CN" sz="1200" err="1">
+              <a:rPr lang="en-US" altLang="zh-CN" sz="1200" dirty="0" err="1">
                 <a:solidFill>
                   <a:srgbClr val="6AAB73"/>
                 </a:solidFill>
@@ -24238,7 +24645,7 @@
               <a:t>itemP</a:t>
             </a:r>
             <a:r>
-              <a:rPr lang="en-US" altLang="zh-CN" sz="1200" err="1">
+              <a:rPr lang="en-US" altLang="zh-CN" sz="1200" dirty="0" err="1">
                 <a:solidFill>
                   <a:srgbClr val="6AAB73"/>
                 </a:solidFill>
@@ -24247,7 +24654,7 @@
               <a:t>rice</a:t>
             </a:r>
             <a:r>
-              <a:rPr lang="en-US" altLang="zh-CN" sz="1200">
+              <a:rPr lang="en-US" altLang="zh-CN" sz="1200" dirty="0">
                 <a:solidFill>
                   <a:srgbClr val="BCBEC4"/>
                 </a:solidFill>
@@ -24256,7 +24663,7 @@
               <a:t>`</a:t>
             </a:r>
             <a:r>
-              <a:rPr lang="zh-CN" altLang="en-US" sz="1200">
+              <a:rPr lang="zh-CN" altLang="en-US" sz="1200" dirty="0">
                 <a:solidFill>
                   <a:srgbClr val="BCBEC4"/>
                 </a:solidFill>
@@ -24265,7 +24672,7 @@
               <a:t> </a:t>
             </a:r>
             <a:r>
-              <a:rPr lang="en-US" altLang="zh-CN" sz="1200">
+              <a:rPr lang="en-US" altLang="zh-CN" sz="1200" dirty="0">
                 <a:solidFill>
                   <a:srgbClr val="CF8E6D"/>
                 </a:solidFill>
@@ -24274,7 +24681,7 @@
               <a:t>float</a:t>
             </a:r>
             <a:r>
-              <a:rPr lang="en-US" altLang="zh-CN" sz="1200">
+              <a:rPr lang="en-US" altLang="zh-CN" sz="1200" dirty="0">
                 <a:solidFill>
                   <a:srgbClr val="BCBEC4"/>
                 </a:solidFill>
@@ -24283,7 +24690,7 @@
               <a:t>(</a:t>
             </a:r>
             <a:r>
-              <a:rPr lang="en-US" altLang="zh-CN" sz="1200" i="1">
+              <a:rPr lang="en-US" altLang="zh-CN" sz="1200" i="1" dirty="0">
                 <a:solidFill>
                   <a:srgbClr val="2AACB8"/>
                 </a:solidFill>
@@ -24292,7 +24699,7 @@
               <a:t>10</a:t>
             </a:r>
             <a:r>
-              <a:rPr lang="en-US" altLang="zh-CN" sz="1200">
+              <a:rPr lang="en-US" altLang="zh-CN" sz="1200" dirty="0">
                 <a:solidFill>
                   <a:srgbClr val="BCBEC4"/>
                 </a:solidFill>
@@ -24301,7 +24708,7 @@
               <a:t>,</a:t>
             </a:r>
             <a:r>
-              <a:rPr lang="en-US" altLang="zh-CN" sz="1200" i="1">
+              <a:rPr lang="en-US" altLang="zh-CN" sz="1200" i="1" dirty="0">
                 <a:solidFill>
                   <a:srgbClr val="2AACB8"/>
                 </a:solidFill>
@@ -24310,7 +24717,7 @@
               <a:t>2</a:t>
             </a:r>
             <a:r>
-              <a:rPr lang="en-US" altLang="zh-CN" sz="1200">
+              <a:rPr lang="en-US" altLang="zh-CN" sz="1200" dirty="0">
                 <a:solidFill>
                   <a:srgbClr val="BCBEC4"/>
                 </a:solidFill>
@@ -24319,7 +24726,7 @@
               <a:t>)</a:t>
             </a:r>
             <a:r>
-              <a:rPr lang="zh-CN" altLang="en-US" sz="1200">
+              <a:rPr lang="zh-CN" altLang="en-US" sz="1200" dirty="0">
                 <a:solidFill>
                   <a:srgbClr val="BCBEC4"/>
                 </a:solidFill>
@@ -24328,7 +24735,7 @@
               <a:t> </a:t>
             </a:r>
             <a:r>
-              <a:rPr lang="en-US" altLang="zh-CN" sz="1200">
+              <a:rPr lang="en-US" altLang="zh-CN" sz="1200" dirty="0">
                 <a:solidFill>
                   <a:srgbClr val="CF8E6D"/>
                 </a:solidFill>
@@ -24337,7 +24744,7 @@
               <a:t>NOT</a:t>
             </a:r>
             <a:r>
-              <a:rPr lang="zh-CN" altLang="en-US" sz="1200">
+              <a:rPr lang="zh-CN" altLang="en-US" sz="1200" dirty="0">
                 <a:solidFill>
                   <a:srgbClr val="CF8E6D"/>
                 </a:solidFill>
@@ -24346,7 +24753,7 @@
               <a:t> </a:t>
             </a:r>
             <a:r>
-              <a:rPr lang="en-US" altLang="zh-CN" sz="1200">
+              <a:rPr lang="en-US" altLang="zh-CN" sz="1200" dirty="0">
                 <a:solidFill>
                   <a:srgbClr val="CF8E6D"/>
                 </a:solidFill>
@@ -24355,7 +24762,7 @@
               <a:t>N</a:t>
             </a:r>
             <a:r>
-              <a:rPr lang="en-US" altLang="zh-CN" sz="1200">
+              <a:rPr lang="en-US" altLang="zh-CN" sz="1200" dirty="0">
                 <a:solidFill>
                   <a:srgbClr val="CF8E6D"/>
                 </a:solidFill>
@@ -24364,7 +24771,7 @@
               <a:t>ULL</a:t>
             </a:r>
             <a:r>
-              <a:rPr lang="en-US" altLang="zh-CN" sz="1200">
+              <a:rPr lang="en-US" altLang="zh-CN" sz="1200" dirty="0">
                 <a:solidFill>
                   <a:srgbClr val="BCBEC4"/>
                 </a:solidFill>
@@ -24373,7 +24780,7 @@
               <a:t>,</a:t>
             </a:r>
             <a:br>
-              <a:rPr lang="zh-CN" altLang="en-US" sz="1200">
+              <a:rPr lang="zh-CN" altLang="en-US" sz="1200" dirty="0">
                 <a:solidFill>
                   <a:srgbClr val="BCBEC4"/>
                 </a:solidFill>
@@ -24381,7 +24788,7 @@
               </a:rPr>
             </a:br>
             <a:r>
-              <a:rPr lang="en-US" altLang="zh-CN" sz="1200">
+              <a:rPr lang="en-US" altLang="zh-CN" sz="1200" dirty="0">
                 <a:solidFill>
                   <a:srgbClr val="BCBEC4"/>
                 </a:solidFill>
@@ -24390,7 +24797,7 @@
               <a:t>`</a:t>
             </a:r>
             <a:r>
-              <a:rPr lang="en-US" altLang="zh-CN" sz="1200" err="1">
+              <a:rPr lang="en-US" altLang="zh-CN" sz="1200" dirty="0" err="1">
                 <a:solidFill>
                   <a:srgbClr val="6AAB73"/>
                 </a:solidFill>
@@ -24399,7 +24806,7 @@
               <a:t>i</a:t>
             </a:r>
             <a:r>
-              <a:rPr lang="en-US" altLang="zh-CN" sz="1200" err="1">
+              <a:rPr lang="en-US" altLang="zh-CN" sz="1200" dirty="0" err="1">
                 <a:solidFill>
                   <a:srgbClr val="6AAB73"/>
                 </a:solidFill>
@@ -24408,7 +24815,7 @@
               <a:t>sSold</a:t>
             </a:r>
             <a:r>
-              <a:rPr lang="en-US" altLang="zh-CN" sz="1200">
+              <a:rPr lang="en-US" altLang="zh-CN" sz="1200" dirty="0">
                 <a:solidFill>
                   <a:srgbClr val="BCBEC4"/>
                 </a:solidFill>
@@ -24417,7 +24824,7 @@
               <a:t>`</a:t>
             </a:r>
             <a:r>
-              <a:rPr lang="zh-CN" altLang="en-US" sz="1200">
+              <a:rPr lang="zh-CN" altLang="en-US" sz="1200" dirty="0">
                 <a:solidFill>
                   <a:srgbClr val="BCBEC4"/>
                 </a:solidFill>
@@ -24426,7 +24833,7 @@
               <a:t> </a:t>
             </a:r>
             <a:r>
-              <a:rPr lang="en-US" altLang="zh-CN" sz="1200" err="1">
+              <a:rPr lang="en-US" altLang="zh-CN" sz="1200" dirty="0" err="1">
                 <a:solidFill>
                   <a:srgbClr val="CF8E6D"/>
                 </a:solidFill>
@@ -24435,7 +24842,7 @@
               <a:t>tiny</a:t>
             </a:r>
             <a:r>
-              <a:rPr lang="en-US" altLang="zh-CN" sz="1200" err="1">
+              <a:rPr lang="en-US" altLang="zh-CN" sz="1200" dirty="0" err="1">
                 <a:solidFill>
                   <a:srgbClr val="CF8E6D"/>
                 </a:solidFill>
@@ -24444,7 +24851,7 @@
               <a:t>i</a:t>
             </a:r>
             <a:r>
-              <a:rPr lang="en-US" altLang="zh-CN" sz="1200" err="1">
+              <a:rPr lang="en-US" altLang="zh-CN" sz="1200" dirty="0" err="1">
                 <a:solidFill>
                   <a:srgbClr val="CF8E6D"/>
                 </a:solidFill>
@@ -24453,7 +24860,7 @@
               <a:t>n</a:t>
             </a:r>
             <a:r>
-              <a:rPr lang="en-US" altLang="zh-CN" sz="1200" err="1">
+              <a:rPr lang="en-US" altLang="zh-CN" sz="1200" dirty="0" err="1">
                 <a:solidFill>
                   <a:srgbClr val="CF8E6D"/>
                 </a:solidFill>
@@ -24462,7 +24869,7 @@
               <a:t>t</a:t>
             </a:r>
             <a:r>
-              <a:rPr lang="en-US" altLang="zh-CN" sz="1200">
+              <a:rPr lang="en-US" altLang="zh-CN" sz="1200" dirty="0">
                 <a:solidFill>
                   <a:srgbClr val="BCBEC4"/>
                 </a:solidFill>
@@ -24471,7 +24878,7 @@
               <a:t>(</a:t>
             </a:r>
             <a:r>
-              <a:rPr lang="en-US" altLang="zh-CN" sz="1200" i="1">
+              <a:rPr lang="en-US" altLang="zh-CN" sz="1200" i="1" dirty="0">
                 <a:solidFill>
                   <a:srgbClr val="2AACB8"/>
                 </a:solidFill>
@@ -24480,7 +24887,7 @@
               <a:t>1</a:t>
             </a:r>
             <a:r>
-              <a:rPr lang="en-US" altLang="zh-CN" sz="1200">
+              <a:rPr lang="en-US" altLang="zh-CN" sz="1200" dirty="0">
                 <a:solidFill>
                   <a:srgbClr val="BCBEC4"/>
                 </a:solidFill>
@@ -24489,7 +24896,7 @@
               <a:t>)</a:t>
             </a:r>
             <a:r>
-              <a:rPr lang="zh-CN" altLang="en-US" sz="1200">
+              <a:rPr lang="zh-CN" altLang="en-US" sz="1200" dirty="0">
                 <a:solidFill>
                   <a:srgbClr val="BCBEC4"/>
                 </a:solidFill>
@@ -24498,7 +24905,7 @@
               <a:t> </a:t>
             </a:r>
             <a:r>
-              <a:rPr lang="en-US" altLang="zh-CN" sz="1200">
+              <a:rPr lang="en-US" altLang="zh-CN" sz="1200" dirty="0">
                 <a:solidFill>
                   <a:srgbClr val="CF8E6D"/>
                 </a:solidFill>
@@ -24507,7 +24914,7 @@
               <a:t>NOT</a:t>
             </a:r>
             <a:r>
-              <a:rPr lang="zh-CN" altLang="en-US" sz="1200">
+              <a:rPr lang="zh-CN" altLang="en-US" sz="1200" dirty="0">
                 <a:solidFill>
                   <a:srgbClr val="CF8E6D"/>
                 </a:solidFill>
@@ -24516,7 +24923,7 @@
               <a:t> </a:t>
             </a:r>
             <a:r>
-              <a:rPr lang="en-US" altLang="zh-CN" sz="1200">
+              <a:rPr lang="en-US" altLang="zh-CN" sz="1200" dirty="0">
                 <a:solidFill>
                   <a:srgbClr val="CF8E6D"/>
                 </a:solidFill>
@@ -24525,7 +24932,7 @@
               <a:t>N</a:t>
             </a:r>
             <a:r>
-              <a:rPr lang="en-US" altLang="zh-CN" sz="1200">
+              <a:rPr lang="en-US" altLang="zh-CN" sz="1200" dirty="0">
                 <a:solidFill>
                   <a:srgbClr val="CF8E6D"/>
                 </a:solidFill>
@@ -24534,7 +24941,7 @@
               <a:t>ULL</a:t>
             </a:r>
             <a:r>
-              <a:rPr lang="en-US" altLang="zh-CN" sz="1200">
+              <a:rPr lang="en-US" altLang="zh-CN" sz="1200" dirty="0">
                 <a:solidFill>
                   <a:srgbClr val="BCBEC4"/>
                 </a:solidFill>
@@ -24543,7 +24950,7 @@
               <a:t>,</a:t>
             </a:r>
             <a:br>
-              <a:rPr lang="en-US" altLang="zh-CN" sz="1200">
+              <a:rPr lang="en-US" altLang="zh-CN" sz="1200" dirty="0">
                 <a:solidFill>
                   <a:srgbClr val="BCBEC4"/>
                 </a:solidFill>
@@ -24551,7 +24958,7 @@
               </a:rPr>
             </a:br>
             <a:r>
-              <a:rPr lang="en-US" altLang="zh-CN" sz="1200">
+              <a:rPr lang="en-US" altLang="zh-CN" sz="1200" dirty="0">
                 <a:solidFill>
                   <a:srgbClr val="BCBEC4"/>
                 </a:solidFill>
@@ -24560,7 +24967,7 @@
               <a:t>`</a:t>
             </a:r>
             <a:r>
-              <a:rPr lang="en-US" altLang="zh-CN" sz="1200" err="1">
+              <a:rPr lang="en-US" altLang="zh-CN" sz="1200" dirty="0" err="1">
                 <a:solidFill>
                   <a:srgbClr val="6AAB73"/>
                 </a:solidFill>
@@ -24569,7 +24976,7 @@
               <a:t>i</a:t>
             </a:r>
             <a:r>
-              <a:rPr lang="en-US" altLang="zh-CN" sz="1200" err="1">
+              <a:rPr lang="en-US" altLang="zh-CN" sz="1200" dirty="0" err="1">
                 <a:solidFill>
                   <a:srgbClr val="6AAB73"/>
                 </a:solidFill>
@@ -24578,7 +24985,7 @@
               <a:t>magePa</a:t>
             </a:r>
             <a:r>
-              <a:rPr lang="en-US" altLang="zh-CN" sz="1200" err="1">
+              <a:rPr lang="en-US" altLang="zh-CN" sz="1200" dirty="0" err="1">
                 <a:solidFill>
                   <a:srgbClr val="6AAB73"/>
                 </a:solidFill>
@@ -24587,7 +24994,7 @@
               <a:t>t</a:t>
             </a:r>
             <a:r>
-              <a:rPr lang="en-US" altLang="zh-CN" sz="1200" err="1">
+              <a:rPr lang="en-US" altLang="zh-CN" sz="1200" dirty="0" err="1">
                 <a:solidFill>
                   <a:srgbClr val="6AAB73"/>
                 </a:solidFill>
@@ -24596,7 +25003,7 @@
               <a:t>h</a:t>
             </a:r>
             <a:r>
-              <a:rPr lang="en-US" altLang="zh-CN" sz="1200">
+              <a:rPr lang="en-US" altLang="zh-CN" sz="1200" dirty="0">
                 <a:solidFill>
                   <a:srgbClr val="BCBEC4"/>
                 </a:solidFill>
@@ -24605,7 +25012,7 @@
               <a:t>`</a:t>
             </a:r>
             <a:r>
-              <a:rPr lang="zh-CN" altLang="en-US" sz="1200">
+              <a:rPr lang="zh-CN" altLang="en-US" sz="1200" dirty="0">
                 <a:solidFill>
                   <a:srgbClr val="BCBEC4"/>
                 </a:solidFill>
@@ -24614,7 +25021,7 @@
               <a:t> </a:t>
             </a:r>
             <a:r>
-              <a:rPr lang="en-US" altLang="zh-CN" sz="1200">
+              <a:rPr lang="en-US" altLang="zh-CN" sz="1200" dirty="0">
                 <a:solidFill>
                   <a:srgbClr val="CF8E6D"/>
                 </a:solidFill>
@@ -24623,7 +25030,7 @@
               <a:t>varchar</a:t>
             </a:r>
             <a:r>
-              <a:rPr lang="en-US" altLang="zh-CN" sz="1200">
+              <a:rPr lang="en-US" altLang="zh-CN" sz="1200" dirty="0">
                 <a:solidFill>
                   <a:srgbClr val="BCBEC4"/>
                 </a:solidFill>
@@ -24632,7 +25039,7 @@
               <a:t>(</a:t>
             </a:r>
             <a:r>
-              <a:rPr lang="en-US" altLang="zh-CN" sz="1200" i="1">
+              <a:rPr lang="en-US" altLang="zh-CN" sz="1200" i="1" dirty="0">
                 <a:solidFill>
                   <a:srgbClr val="2AACB8"/>
                 </a:solidFill>
@@ -24641,7 +25048,7 @@
               <a:t>255</a:t>
             </a:r>
             <a:r>
-              <a:rPr lang="en-US" altLang="zh-CN" sz="1200">
+              <a:rPr lang="en-US" altLang="zh-CN" sz="1200" dirty="0">
                 <a:solidFill>
                   <a:srgbClr val="BCBEC4"/>
                 </a:solidFill>
@@ -24650,7 +25057,7 @@
               <a:t>)</a:t>
             </a:r>
             <a:r>
-              <a:rPr lang="zh-CN" altLang="en-US" sz="1200">
+              <a:rPr lang="zh-CN" altLang="en-US" sz="1200" dirty="0">
                 <a:solidFill>
                   <a:srgbClr val="BCBEC4"/>
                 </a:solidFill>
@@ -24659,7 +25066,7 @@
               <a:t> </a:t>
             </a:r>
             <a:r>
-              <a:rPr lang="en-US" altLang="zh-CN" sz="1200">
+              <a:rPr lang="en-US" altLang="zh-CN" sz="1200" dirty="0">
                 <a:solidFill>
                   <a:srgbClr val="CF8E6D"/>
                 </a:solidFill>
@@ -24668,7 +25075,7 @@
               <a:t>N</a:t>
             </a:r>
             <a:r>
-              <a:rPr lang="en-US" altLang="zh-CN" sz="1200">
+              <a:rPr lang="en-US" altLang="zh-CN" sz="1200" dirty="0">
                 <a:solidFill>
                   <a:srgbClr val="CF8E6D"/>
                 </a:solidFill>
@@ -24677,7 +25084,7 @@
               <a:t>OT</a:t>
             </a:r>
             <a:r>
-              <a:rPr lang="zh-CN" altLang="en-US" sz="1200">
+              <a:rPr lang="zh-CN" altLang="en-US" sz="1200" dirty="0">
                 <a:solidFill>
                   <a:srgbClr val="CF8E6D"/>
                 </a:solidFill>
@@ -24686,7 +25093,7 @@
               <a:t> </a:t>
             </a:r>
             <a:r>
-              <a:rPr lang="en-US" altLang="zh-CN" sz="1200">
+              <a:rPr lang="en-US" altLang="zh-CN" sz="1200" dirty="0">
                 <a:solidFill>
                   <a:srgbClr val="CF8E6D"/>
                 </a:solidFill>
@@ -24695,7 +25102,7 @@
               <a:t>NU</a:t>
             </a:r>
             <a:r>
-              <a:rPr lang="en-US" altLang="zh-CN" sz="1200">
+              <a:rPr lang="en-US" altLang="zh-CN" sz="1200" dirty="0">
                 <a:solidFill>
                   <a:srgbClr val="CF8E6D"/>
                 </a:solidFill>
@@ -24704,7 +25111,7 @@
               <a:t>LL</a:t>
             </a:r>
             <a:r>
-              <a:rPr lang="en-US" altLang="zh-CN" sz="1200">
+              <a:rPr lang="en-US" altLang="zh-CN" sz="1200" dirty="0">
                 <a:solidFill>
                   <a:srgbClr val="BCBEC4"/>
                 </a:solidFill>
@@ -24713,7 +25120,7 @@
               <a:t>,</a:t>
             </a:r>
             <a:br>
-              <a:rPr lang="en-US" altLang="zh-CN" sz="1200">
+              <a:rPr lang="en-US" altLang="zh-CN" sz="1200" dirty="0">
                 <a:solidFill>
                   <a:srgbClr val="BCBEC4"/>
                 </a:solidFill>
@@ -24721,7 +25128,7 @@
               </a:rPr>
             </a:br>
             <a:r>
-              <a:rPr lang="en-US" altLang="zh-CN" sz="1200">
+              <a:rPr lang="en-US" altLang="zh-CN" sz="1200" dirty="0">
                 <a:solidFill>
                   <a:srgbClr val="BCBEC4"/>
                 </a:solidFill>
@@ -24730,7 +25137,7 @@
               <a:t>`</a:t>
             </a:r>
             <a:r>
-              <a:rPr lang="en-US" altLang="zh-CN" sz="1200" err="1">
+              <a:rPr lang="en-US" altLang="zh-CN" sz="1200" dirty="0" err="1">
                 <a:solidFill>
                   <a:srgbClr val="6AAB73"/>
                 </a:solidFill>
@@ -24739,7 +25146,7 @@
               <a:t>cre</a:t>
             </a:r>
             <a:r>
-              <a:rPr lang="en-US" altLang="zh-CN" sz="1200" err="1">
+              <a:rPr lang="en-US" altLang="zh-CN" sz="1200" dirty="0" err="1">
                 <a:solidFill>
                   <a:srgbClr val="6AAB73"/>
                 </a:solidFill>
@@ -24748,7 +25155,7 @@
               <a:t>at</a:t>
             </a:r>
             <a:r>
-              <a:rPr lang="en-US" altLang="zh-CN" sz="1200" err="1">
+              <a:rPr lang="en-US" altLang="zh-CN" sz="1200" dirty="0" err="1">
                 <a:solidFill>
                   <a:srgbClr val="6AAB73"/>
                 </a:solidFill>
@@ -24757,7 +25164,7 @@
               <a:t>orID</a:t>
             </a:r>
             <a:r>
-              <a:rPr lang="en-US" altLang="zh-CN" sz="1200">
+              <a:rPr lang="en-US" altLang="zh-CN" sz="1200" dirty="0">
                 <a:solidFill>
                   <a:srgbClr val="BCBEC4"/>
                 </a:solidFill>
@@ -24766,7 +25173,7 @@
               <a:t>`</a:t>
             </a:r>
             <a:r>
-              <a:rPr lang="zh-CN" altLang="en-US" sz="1200">
+              <a:rPr lang="zh-CN" altLang="en-US" sz="1200" dirty="0">
                 <a:solidFill>
                   <a:srgbClr val="BCBEC4"/>
                 </a:solidFill>
@@ -24775,7 +25182,7 @@
               <a:t> </a:t>
             </a:r>
             <a:r>
-              <a:rPr lang="en-US" altLang="zh-CN" sz="1200">
+              <a:rPr lang="en-US" altLang="zh-CN" sz="1200" dirty="0">
                 <a:solidFill>
                   <a:srgbClr val="CF8E6D"/>
                 </a:solidFill>
@@ -24784,7 +25191,7 @@
               <a:t>int</a:t>
             </a:r>
             <a:r>
-              <a:rPr lang="zh-CN" altLang="en-US" sz="1200">
+              <a:rPr lang="zh-CN" altLang="en-US" sz="1200" dirty="0">
                 <a:solidFill>
                   <a:srgbClr val="CF8E6D"/>
                 </a:solidFill>
@@ -24793,7 +25200,7 @@
               <a:t> </a:t>
             </a:r>
             <a:r>
-              <a:rPr lang="en-US" altLang="zh-CN" sz="1200">
+              <a:rPr lang="en-US" altLang="zh-CN" sz="1200" dirty="0">
                 <a:solidFill>
                   <a:srgbClr val="CF8E6D"/>
                 </a:solidFill>
@@ -24802,7 +25209,7 @@
               <a:t>NO</a:t>
             </a:r>
             <a:r>
-              <a:rPr lang="en-US" altLang="zh-CN" sz="1200">
+              <a:rPr lang="en-US" altLang="zh-CN" sz="1200" dirty="0">
                 <a:solidFill>
                   <a:srgbClr val="CF8E6D"/>
                 </a:solidFill>
@@ -24811,7 +25218,7 @@
               <a:t>T</a:t>
             </a:r>
             <a:r>
-              <a:rPr lang="zh-CN" altLang="en-US" sz="1200">
+              <a:rPr lang="zh-CN" altLang="en-US" sz="1200" dirty="0">
                 <a:solidFill>
                   <a:srgbClr val="CF8E6D"/>
                 </a:solidFill>
@@ -24820,7 +25227,7 @@
               <a:t> </a:t>
             </a:r>
             <a:r>
-              <a:rPr lang="en-US" altLang="zh-CN" sz="1200">
+              <a:rPr lang="en-US" altLang="zh-CN" sz="1200" dirty="0">
                 <a:solidFill>
                   <a:srgbClr val="CF8E6D"/>
                 </a:solidFill>
@@ -24829,7 +25236,7 @@
               <a:t>N</a:t>
             </a:r>
             <a:r>
-              <a:rPr lang="en-US" altLang="zh-CN" sz="1200">
+              <a:rPr lang="en-US" altLang="zh-CN" sz="1200" dirty="0">
                 <a:solidFill>
                   <a:srgbClr val="CF8E6D"/>
                 </a:solidFill>
@@ -24838,7 +25245,7 @@
               <a:t>ULL</a:t>
             </a:r>
             <a:r>
-              <a:rPr lang="en-US" altLang="zh-CN" sz="1200">
+              <a:rPr lang="en-US" altLang="zh-CN" sz="1200" dirty="0">
                 <a:solidFill>
                   <a:srgbClr val="BCBEC4"/>
                 </a:solidFill>
@@ -24847,7 +25254,7 @@
               <a:t>,</a:t>
             </a:r>
             <a:br>
-              <a:rPr lang="en-US" altLang="zh-CN" sz="1200">
+              <a:rPr lang="en-US" altLang="zh-CN" sz="1200" dirty="0">
                 <a:solidFill>
                   <a:srgbClr val="BCBEC4"/>
                 </a:solidFill>
@@ -24855,7 +25262,7 @@
               </a:rPr>
             </a:br>
             <a:r>
-              <a:rPr lang="en-US" altLang="zh-CN" sz="1200">
+              <a:rPr lang="en-US" altLang="zh-CN" sz="1200" dirty="0">
                 <a:solidFill>
                   <a:srgbClr val="BCBEC4"/>
                 </a:solidFill>
@@ -24864,7 +25271,7 @@
               <a:t>PRI</a:t>
             </a:r>
             <a:r>
-              <a:rPr lang="en-US" altLang="zh-CN" sz="1200">
+              <a:rPr lang="en-US" altLang="zh-CN" sz="1200" dirty="0">
                 <a:solidFill>
                   <a:srgbClr val="CF8E6D"/>
                 </a:solidFill>
@@ -24873,7 +25280,7 @@
               <a:t>MARY</a:t>
             </a:r>
             <a:r>
-              <a:rPr lang="zh-CN" altLang="en-US" sz="1200">
+              <a:rPr lang="zh-CN" altLang="en-US" sz="1200" dirty="0">
                 <a:solidFill>
                   <a:srgbClr val="CF8E6D"/>
                 </a:solidFill>
@@ -24882,7 +25289,7 @@
               <a:t> </a:t>
             </a:r>
             <a:r>
-              <a:rPr lang="en-US" altLang="zh-CN" sz="1200">
+              <a:rPr lang="en-US" altLang="zh-CN" sz="1200" dirty="0">
                 <a:solidFill>
                   <a:srgbClr val="CF8E6D"/>
                 </a:solidFill>
@@ -24891,7 +25298,7 @@
               <a:t>KEY</a:t>
             </a:r>
             <a:r>
-              <a:rPr lang="zh-CN" altLang="en-US" sz="1200">
+              <a:rPr lang="zh-CN" altLang="en-US" sz="1200" dirty="0">
                 <a:solidFill>
                   <a:srgbClr val="BCBEC4"/>
                 </a:solidFill>
@@ -24900,7 +25307,7 @@
               <a:t> </a:t>
             </a:r>
             <a:r>
-              <a:rPr lang="en-US" altLang="zh-CN" sz="1200">
+              <a:rPr lang="en-US" altLang="zh-CN" sz="1200" dirty="0">
                 <a:solidFill>
                   <a:srgbClr val="BCBEC4"/>
                 </a:solidFill>
@@ -24909,7 +25316,7 @@
               <a:t>(`</a:t>
             </a:r>
             <a:r>
-              <a:rPr lang="en-US" altLang="zh-CN" sz="1200" err="1">
+              <a:rPr lang="en-US" altLang="zh-CN" sz="1200" dirty="0" err="1">
                 <a:solidFill>
                   <a:srgbClr val="6AAB73"/>
                 </a:solidFill>
@@ -24918,7 +25325,7 @@
               <a:t>itemID</a:t>
             </a:r>
             <a:r>
-              <a:rPr lang="en-US" altLang="zh-CN" sz="1200">
+              <a:rPr lang="en-US" altLang="zh-CN" sz="1200" dirty="0">
                 <a:solidFill>
                   <a:srgbClr val="BCBEC4"/>
                 </a:solidFill>
@@ -24927,7 +25334,7 @@
               <a:t>`)</a:t>
             </a:r>
             <a:r>
-              <a:rPr lang="en-US" altLang="zh-CN" sz="1200">
+              <a:rPr lang="en-US" altLang="zh-CN" sz="1200" dirty="0">
                 <a:solidFill>
                   <a:srgbClr val="BCBEC4"/>
                 </a:solidFill>
@@ -24936,7 +25343,7 @@
               <a:t>,</a:t>
             </a:r>
             <a:br>
-              <a:rPr lang="en-US" altLang="zh-CN" sz="1200">
+              <a:rPr lang="en-US" altLang="zh-CN" sz="1200" dirty="0">
                 <a:solidFill>
                   <a:srgbClr val="BCBEC4"/>
                 </a:solidFill>
@@ -24944,7 +25351,7 @@
               </a:rPr>
             </a:br>
             <a:r>
-              <a:rPr lang="en-US" altLang="zh-CN" sz="1200">
+              <a:rPr lang="en-US" altLang="zh-CN" sz="1200" dirty="0">
                 <a:solidFill>
                   <a:srgbClr val="BCBEC4"/>
                 </a:solidFill>
@@ -24953,7 +25360,7 @@
               <a:t>K</a:t>
             </a:r>
             <a:r>
-              <a:rPr lang="en-US" altLang="zh-CN" sz="1200">
+              <a:rPr lang="en-US" altLang="zh-CN" sz="1200" dirty="0">
                 <a:solidFill>
                   <a:srgbClr val="CF8E6D"/>
                 </a:solidFill>
@@ -24962,7 +25369,7 @@
               <a:t>E</a:t>
             </a:r>
             <a:r>
-              <a:rPr lang="en-US" altLang="zh-CN" sz="1200">
+              <a:rPr lang="en-US" altLang="zh-CN" sz="1200" dirty="0">
                 <a:solidFill>
                   <a:srgbClr val="CF8E6D"/>
                 </a:solidFill>
@@ -24971,7 +25378,7 @@
               <a:t>Y</a:t>
             </a:r>
             <a:r>
-              <a:rPr lang="zh-CN" altLang="en-US" sz="1200">
+              <a:rPr lang="zh-CN" altLang="en-US" sz="1200" dirty="0">
                 <a:solidFill>
                   <a:srgbClr val="CF8E6D"/>
                 </a:solidFill>
@@ -24980,7 +25387,7 @@
               <a:t> </a:t>
             </a:r>
             <a:r>
-              <a:rPr lang="en-US" altLang="zh-CN" sz="1200">
+              <a:rPr lang="en-US" altLang="zh-CN" sz="1200" dirty="0">
                 <a:solidFill>
                   <a:srgbClr val="BCBEC4"/>
                 </a:solidFill>
@@ -24989,7 +25396,7 @@
               <a:t>`</a:t>
             </a:r>
             <a:r>
-              <a:rPr lang="en-US" altLang="zh-CN" sz="1200" err="1">
+              <a:rPr lang="en-US" altLang="zh-CN" sz="1200" dirty="0" err="1">
                 <a:solidFill>
                   <a:srgbClr val="6AAB73"/>
                 </a:solidFill>
@@ -24998,7 +25405,7 @@
               <a:t>userID_</a:t>
             </a:r>
             <a:r>
-              <a:rPr lang="en-US" altLang="zh-CN" sz="1200" err="1">
+              <a:rPr lang="en-US" altLang="zh-CN" sz="1200" dirty="0" err="1">
                 <a:solidFill>
                   <a:srgbClr val="6AAB73"/>
                 </a:solidFill>
@@ -25007,7 +25414,7 @@
               <a:t>id</a:t>
             </a:r>
             <a:r>
-              <a:rPr lang="en-US" altLang="zh-CN" sz="1200" err="1">
+              <a:rPr lang="en-US" altLang="zh-CN" sz="1200" dirty="0" err="1">
                 <a:solidFill>
                   <a:srgbClr val="6AAB73"/>
                 </a:solidFill>
@@ -25016,7 +25423,7 @@
               <a:t>x</a:t>
             </a:r>
             <a:r>
-              <a:rPr lang="en-US" altLang="zh-CN" sz="1200">
+              <a:rPr lang="en-US" altLang="zh-CN" sz="1200" dirty="0">
                 <a:solidFill>
                   <a:srgbClr val="BCBEC4"/>
                 </a:solidFill>
@@ -25025,7 +25432,7 @@
               <a:t>`</a:t>
             </a:r>
             <a:r>
-              <a:rPr lang="zh-CN" altLang="en-US" sz="1200">
+              <a:rPr lang="zh-CN" altLang="en-US" sz="1200" dirty="0">
                 <a:solidFill>
                   <a:srgbClr val="BCBEC4"/>
                 </a:solidFill>
@@ -25034,7 +25441,7 @@
               <a:t> </a:t>
             </a:r>
             <a:r>
-              <a:rPr lang="en-US" altLang="zh-CN" sz="1200">
+              <a:rPr lang="en-US" altLang="zh-CN" sz="1200" dirty="0">
                 <a:solidFill>
                   <a:srgbClr val="BCBEC4"/>
                 </a:solidFill>
@@ -25043,7 +25450,7 @@
               <a:t>(`</a:t>
             </a:r>
             <a:r>
-              <a:rPr lang="en-US" altLang="zh-CN" sz="1200" err="1">
+              <a:rPr lang="en-US" altLang="zh-CN" sz="1200" dirty="0" err="1">
                 <a:solidFill>
                   <a:srgbClr val="6AAB73"/>
                 </a:solidFill>
@@ -25052,7 +25459,7 @@
               <a:t>crea</a:t>
             </a:r>
             <a:r>
-              <a:rPr lang="en-US" altLang="zh-CN" sz="1200" err="1">
+              <a:rPr lang="en-US" altLang="zh-CN" sz="1200" dirty="0" err="1">
                 <a:solidFill>
                   <a:srgbClr val="6AAB73"/>
                 </a:solidFill>
@@ -25061,7 +25468,7 @@
               <a:t>t</a:t>
             </a:r>
             <a:r>
-              <a:rPr lang="en-US" altLang="zh-CN" sz="1200" err="1">
+              <a:rPr lang="en-US" altLang="zh-CN" sz="1200" dirty="0" err="1">
                 <a:solidFill>
                   <a:srgbClr val="6AAB73"/>
                 </a:solidFill>
@@ -25070,7 +25477,7 @@
               <a:t>or</a:t>
             </a:r>
             <a:r>
-              <a:rPr lang="en-US" altLang="zh-CN" sz="1200" err="1">
+              <a:rPr lang="en-US" altLang="zh-CN" sz="1200" dirty="0" err="1">
                 <a:solidFill>
                   <a:srgbClr val="6AAB73"/>
                 </a:solidFill>
@@ -25079,7 +25486,7 @@
               <a:t>ID</a:t>
             </a:r>
             <a:r>
-              <a:rPr lang="en-US" altLang="zh-CN" sz="1200">
+              <a:rPr lang="en-US" altLang="zh-CN" sz="1200" dirty="0">
                 <a:solidFill>
                   <a:srgbClr val="BCBEC4"/>
                 </a:solidFill>
@@ -25088,7 +25495,7 @@
               <a:t>`),</a:t>
             </a:r>
             <a:br>
-              <a:rPr lang="zh-CN" altLang="en-US" sz="1200">
+              <a:rPr lang="zh-CN" altLang="en-US" sz="1200" dirty="0">
                 <a:solidFill>
                   <a:srgbClr val="BCBEC4"/>
                 </a:solidFill>
@@ -25096,7 +25503,7 @@
               </a:rPr>
             </a:br>
             <a:r>
-              <a:rPr lang="en-US" altLang="zh-CN" sz="1200">
+              <a:rPr lang="en-US" altLang="zh-CN" sz="1200" dirty="0">
                 <a:solidFill>
                   <a:srgbClr val="BCBEC4"/>
                 </a:solidFill>
@@ -25105,7 +25512,7 @@
               <a:t>CONSTRAINT</a:t>
             </a:r>
             <a:r>
-              <a:rPr lang="zh-CN" altLang="en-US" sz="1200">
+              <a:rPr lang="zh-CN" altLang="en-US" sz="1200" dirty="0">
                 <a:solidFill>
                   <a:srgbClr val="BCBEC4"/>
                 </a:solidFill>
@@ -25114,7 +25521,7 @@
               <a:t> </a:t>
             </a:r>
             <a:r>
-              <a:rPr lang="en-US" altLang="zh-CN" sz="1200">
+              <a:rPr lang="en-US" altLang="zh-CN" sz="1200" dirty="0">
                 <a:solidFill>
                   <a:srgbClr val="BCBEC4"/>
                 </a:solidFill>
@@ -25123,7 +25530,7 @@
               <a:t>`</a:t>
             </a:r>
             <a:r>
-              <a:rPr lang="en-US" altLang="zh-CN" sz="1200" err="1">
+              <a:rPr lang="en-US" altLang="zh-CN" sz="1200" dirty="0" err="1">
                 <a:solidFill>
                   <a:srgbClr val="6AAB73"/>
                 </a:solidFill>
@@ -25132,7 +25539,7 @@
               <a:t>u</a:t>
             </a:r>
             <a:r>
-              <a:rPr lang="en-US" altLang="zh-CN" sz="1200" err="1">
+              <a:rPr lang="en-US" altLang="zh-CN" sz="1200" dirty="0" err="1">
                 <a:solidFill>
                   <a:srgbClr val="6AAB73"/>
                 </a:solidFill>
@@ -25141,7 +25548,7 @@
               <a:t>s</a:t>
             </a:r>
             <a:r>
-              <a:rPr lang="en-US" altLang="zh-CN" sz="1200" err="1">
+              <a:rPr lang="en-US" altLang="zh-CN" sz="1200" dirty="0" err="1">
                 <a:solidFill>
                   <a:srgbClr val="6AAB73"/>
                 </a:solidFill>
@@ -25150,7 +25557,7 @@
               <a:t>e</a:t>
             </a:r>
             <a:r>
-              <a:rPr lang="en-US" altLang="zh-CN" sz="1200" err="1">
+              <a:rPr lang="en-US" altLang="zh-CN" sz="1200" dirty="0" err="1">
                 <a:solidFill>
                   <a:srgbClr val="6AAB73"/>
                 </a:solidFill>
@@ -25159,7 +25566,7 @@
               <a:t>rID</a:t>
             </a:r>
             <a:r>
-              <a:rPr lang="en-US" altLang="zh-CN" sz="1200">
+              <a:rPr lang="en-US" altLang="zh-CN" sz="1200" dirty="0">
                 <a:solidFill>
                   <a:srgbClr val="BCBEC4"/>
                 </a:solidFill>
@@ -25168,7 +25575,7 @@
               <a:t>`</a:t>
             </a:r>
             <a:r>
-              <a:rPr lang="zh-CN" altLang="en-US" sz="1200">
+              <a:rPr lang="zh-CN" altLang="en-US" sz="1200" dirty="0">
                 <a:solidFill>
                   <a:srgbClr val="BCBEC4"/>
                 </a:solidFill>
@@ -25177,7 +25584,7 @@
               <a:t> </a:t>
             </a:r>
             <a:r>
-              <a:rPr lang="en-US" altLang="zh-CN" sz="1200">
+              <a:rPr lang="en-US" altLang="zh-CN" sz="1200" dirty="0">
                 <a:solidFill>
                   <a:srgbClr val="CF8E6D"/>
                 </a:solidFill>
@@ -25186,7 +25593,7 @@
               <a:t>FOREIGN</a:t>
             </a:r>
             <a:r>
-              <a:rPr lang="zh-CN" altLang="en-US" sz="1200">
+              <a:rPr lang="zh-CN" altLang="en-US" sz="1200" dirty="0">
                 <a:solidFill>
                   <a:srgbClr val="CF8E6D"/>
                 </a:solidFill>
@@ -25195,7 +25602,7 @@
               <a:t> </a:t>
             </a:r>
             <a:r>
-              <a:rPr lang="en-US" altLang="zh-CN" sz="1200">
+              <a:rPr lang="en-US" altLang="zh-CN" sz="1200" dirty="0">
                 <a:solidFill>
                   <a:srgbClr val="CF8E6D"/>
                 </a:solidFill>
@@ -25204,7 +25611,7 @@
               <a:t>KEY</a:t>
             </a:r>
             <a:r>
-              <a:rPr lang="zh-CN" altLang="en-US" sz="1200">
+              <a:rPr lang="zh-CN" altLang="en-US" sz="1200" dirty="0">
                 <a:solidFill>
                   <a:srgbClr val="BCBEC4"/>
                 </a:solidFill>
@@ -25213,7 +25620,7 @@
               <a:t> </a:t>
             </a:r>
             <a:r>
-              <a:rPr lang="en-US" altLang="zh-CN" sz="1200">
+              <a:rPr lang="en-US" altLang="zh-CN" sz="1200" dirty="0">
                 <a:solidFill>
                   <a:srgbClr val="BCBEC4"/>
                 </a:solidFill>
@@ -25222,7 +25629,7 @@
               <a:t>(`</a:t>
             </a:r>
             <a:r>
-              <a:rPr lang="en-US" altLang="zh-CN" sz="1200" err="1">
+              <a:rPr lang="en-US" altLang="zh-CN" sz="1200" dirty="0" err="1">
                 <a:solidFill>
                   <a:srgbClr val="6AAB73"/>
                 </a:solidFill>
@@ -25231,7 +25638,7 @@
               <a:t>c</a:t>
             </a:r>
             <a:r>
-              <a:rPr lang="en-US" altLang="zh-CN" sz="1200" err="1">
+              <a:rPr lang="en-US" altLang="zh-CN" sz="1200" dirty="0" err="1">
                 <a:solidFill>
                   <a:srgbClr val="6AAB73"/>
                 </a:solidFill>
@@ -25240,7 +25647,7 @@
               <a:t>re</a:t>
             </a:r>
             <a:r>
-              <a:rPr lang="en-US" altLang="zh-CN" sz="1200" err="1">
+              <a:rPr lang="en-US" altLang="zh-CN" sz="1200" dirty="0" err="1">
                 <a:solidFill>
                   <a:srgbClr val="6AAB73"/>
                 </a:solidFill>
@@ -25249,7 +25656,7 @@
               <a:t>a</a:t>
             </a:r>
             <a:r>
-              <a:rPr lang="en-US" altLang="zh-CN" sz="1200" err="1">
+              <a:rPr lang="en-US" altLang="zh-CN" sz="1200" dirty="0" err="1">
                 <a:solidFill>
                   <a:srgbClr val="6AAB73"/>
                 </a:solidFill>
@@ -25258,7 +25665,7 @@
               <a:t>tor</a:t>
             </a:r>
             <a:r>
-              <a:rPr lang="en-US" altLang="zh-CN" sz="1200" err="1">
+              <a:rPr lang="en-US" altLang="zh-CN" sz="1200" dirty="0" err="1">
                 <a:solidFill>
                   <a:srgbClr val="6AAB73"/>
                 </a:solidFill>
@@ -25267,7 +25674,7 @@
               <a:t>ID</a:t>
             </a:r>
             <a:r>
-              <a:rPr lang="en-US" altLang="zh-CN" sz="1200">
+              <a:rPr lang="en-US" altLang="zh-CN" sz="1200" dirty="0">
                 <a:solidFill>
                   <a:srgbClr val="BCBEC4"/>
                 </a:solidFill>
@@ -25276,7 +25683,7 @@
               <a:t>`)</a:t>
             </a:r>
             <a:r>
-              <a:rPr lang="zh-CN" altLang="en-US" sz="1200">
+              <a:rPr lang="zh-CN" altLang="en-US" sz="1200" dirty="0">
                 <a:solidFill>
                   <a:srgbClr val="BCBEC4"/>
                 </a:solidFill>
@@ -25285,7 +25692,7 @@
               <a:t> </a:t>
             </a:r>
             <a:r>
-              <a:rPr lang="en-US" altLang="zh-CN" sz="1200">
+              <a:rPr lang="en-US" altLang="zh-CN" sz="1200" dirty="0">
                 <a:solidFill>
                   <a:srgbClr val="CF8E6D"/>
                 </a:solidFill>
@@ -25294,7 +25701,7 @@
               <a:t>REFERENCES</a:t>
             </a:r>
             <a:r>
-              <a:rPr lang="zh-CN" altLang="en-US" sz="1200">
+              <a:rPr lang="zh-CN" altLang="en-US" sz="1200" dirty="0">
                 <a:solidFill>
                   <a:srgbClr val="CF8E6D"/>
                 </a:solidFill>
@@ -25303,7 +25710,7 @@
               <a:t> </a:t>
             </a:r>
             <a:r>
-              <a:rPr lang="en-US" altLang="zh-CN" sz="1200">
+              <a:rPr lang="en-US" altLang="zh-CN" sz="1200" dirty="0">
                 <a:solidFill>
                   <a:srgbClr val="BCBEC4"/>
                 </a:solidFill>
@@ -25312,7 +25719,7 @@
               <a:t>`</a:t>
             </a:r>
             <a:r>
-              <a:rPr lang="en-US" altLang="zh-CN" sz="1200">
+              <a:rPr lang="en-US" altLang="zh-CN" sz="1200" dirty="0">
                 <a:solidFill>
                   <a:srgbClr val="6AAB73"/>
                 </a:solidFill>
@@ -25321,7 +25728,7 @@
               <a:t>u</a:t>
             </a:r>
             <a:r>
-              <a:rPr lang="en-US" altLang="zh-CN" sz="1200">
+              <a:rPr lang="en-US" altLang="zh-CN" sz="1200" dirty="0">
                 <a:solidFill>
                   <a:srgbClr val="6AAB73"/>
                 </a:solidFill>
@@ -25330,7 +25737,7 @@
               <a:t>ser</a:t>
             </a:r>
             <a:r>
-              <a:rPr lang="en-US" altLang="zh-CN" sz="1200">
+              <a:rPr lang="en-US" altLang="zh-CN" sz="1200" dirty="0">
                 <a:solidFill>
                   <a:srgbClr val="BCBEC4"/>
                 </a:solidFill>
@@ -25339,7 +25746,7 @@
               <a:t>`</a:t>
             </a:r>
             <a:r>
-              <a:rPr lang="zh-CN" altLang="en-US" sz="1200">
+              <a:rPr lang="zh-CN" altLang="en-US" sz="1200" dirty="0">
                 <a:solidFill>
                   <a:srgbClr val="BCBEC4"/>
                 </a:solidFill>
@@ -25348,7 +25755,7 @@
               <a:t> </a:t>
             </a:r>
             <a:r>
-              <a:rPr lang="en-US" altLang="zh-CN" sz="1200">
+              <a:rPr lang="en-US" altLang="zh-CN" sz="1200" dirty="0">
                 <a:solidFill>
                   <a:srgbClr val="BCBEC4"/>
                 </a:solidFill>
@@ -25357,7 +25764,7 @@
               <a:t>(`</a:t>
             </a:r>
             <a:r>
-              <a:rPr lang="en-US" altLang="zh-CN" sz="1200" err="1">
+              <a:rPr lang="en-US" altLang="zh-CN" sz="1200" dirty="0" err="1">
                 <a:solidFill>
                   <a:srgbClr val="6AAB73"/>
                 </a:solidFill>
@@ -25366,7 +25773,7 @@
               <a:t>u</a:t>
             </a:r>
             <a:r>
-              <a:rPr lang="en-US" altLang="zh-CN" sz="1200" err="1">
+              <a:rPr lang="en-US" altLang="zh-CN" sz="1200" dirty="0" err="1">
                 <a:solidFill>
                   <a:srgbClr val="6AAB73"/>
                 </a:solidFill>
@@ -25375,7 +25782,7 @@
               <a:t>ser</a:t>
             </a:r>
             <a:r>
-              <a:rPr lang="en-US" altLang="zh-CN" sz="1200" err="1">
+              <a:rPr lang="en-US" altLang="zh-CN" sz="1200" dirty="0" err="1">
                 <a:solidFill>
                   <a:srgbClr val="6AAB73"/>
                 </a:solidFill>
@@ -25384,7 +25791,7 @@
               <a:t>ID</a:t>
             </a:r>
             <a:r>
-              <a:rPr lang="en-US" altLang="zh-CN" sz="1200">
+              <a:rPr lang="en-US" altLang="zh-CN" sz="1200" dirty="0">
                 <a:solidFill>
                   <a:srgbClr val="BCBEC4"/>
                 </a:solidFill>
@@ -25393,7 +25800,7 @@
               <a:t>`)</a:t>
             </a:r>
             <a:r>
-              <a:rPr lang="zh-CN" altLang="en-US" sz="1200">
+              <a:rPr lang="zh-CN" altLang="en-US" sz="1200" dirty="0">
                 <a:solidFill>
                   <a:srgbClr val="BCBEC4"/>
                 </a:solidFill>
@@ -25402,7 +25809,7 @@
               <a:t> </a:t>
             </a:r>
             <a:r>
-              <a:rPr lang="en-US" altLang="zh-CN" sz="1200">
+              <a:rPr lang="en-US" altLang="zh-CN" sz="1200" dirty="0">
                 <a:solidFill>
                   <a:srgbClr val="CF8E6D"/>
                 </a:solidFill>
@@ -25411,7 +25818,7 @@
               <a:t>ON</a:t>
             </a:r>
             <a:r>
-              <a:rPr lang="zh-CN" altLang="en-US" sz="1200">
+              <a:rPr lang="zh-CN" altLang="en-US" sz="1200" dirty="0">
                 <a:solidFill>
                   <a:srgbClr val="CF8E6D"/>
                 </a:solidFill>
@@ -25420,7 +25827,7 @@
               <a:t> </a:t>
             </a:r>
             <a:r>
-              <a:rPr lang="en-US" altLang="zh-CN" sz="1200">
+              <a:rPr lang="en-US" altLang="zh-CN" sz="1200" dirty="0">
                 <a:solidFill>
                   <a:srgbClr val="CF8E6D"/>
                 </a:solidFill>
@@ -25429,7 +25836,7 @@
               <a:t>DELETE</a:t>
             </a:r>
             <a:r>
-              <a:rPr lang="zh-CN" altLang="en-US" sz="1200">
+              <a:rPr lang="zh-CN" altLang="en-US" sz="1200" dirty="0">
                 <a:solidFill>
                   <a:srgbClr val="CF8E6D"/>
                 </a:solidFill>
@@ -25438,7 +25845,7 @@
               <a:t> </a:t>
             </a:r>
             <a:r>
-              <a:rPr lang="en-US" altLang="zh-CN" sz="1200">
+              <a:rPr lang="en-US" altLang="zh-CN" sz="1200" dirty="0">
                 <a:solidFill>
                   <a:srgbClr val="CF8E6D"/>
                 </a:solidFill>
@@ -25447,7 +25854,7 @@
               <a:t>CASCADE</a:t>
             </a:r>
             <a:r>
-              <a:rPr lang="zh-CN" altLang="en-US" sz="1200">
+              <a:rPr lang="zh-CN" altLang="en-US" sz="1200" dirty="0">
                 <a:solidFill>
                   <a:srgbClr val="CF8E6D"/>
                 </a:solidFill>
@@ -25456,7 +25863,7 @@
               <a:t> </a:t>
             </a:r>
             <a:r>
-              <a:rPr lang="en-US" altLang="zh-CN" sz="1200">
+              <a:rPr lang="en-US" altLang="zh-CN" sz="1200" dirty="0">
                 <a:solidFill>
                   <a:srgbClr val="CF8E6D"/>
                 </a:solidFill>
@@ -25465,7 +25872,7 @@
               <a:t>ON</a:t>
             </a:r>
             <a:r>
-              <a:rPr lang="zh-CN" altLang="en-US" sz="1200">
+              <a:rPr lang="zh-CN" altLang="en-US" sz="1200" dirty="0">
                 <a:solidFill>
                   <a:srgbClr val="CF8E6D"/>
                 </a:solidFill>
@@ -25474,7 +25881,7 @@
               <a:t> </a:t>
             </a:r>
             <a:r>
-              <a:rPr lang="en-US" altLang="zh-CN" sz="1200">
+              <a:rPr lang="en-US" altLang="zh-CN" sz="1200" dirty="0">
                 <a:solidFill>
                   <a:srgbClr val="CF8E6D"/>
                 </a:solidFill>
@@ -25483,7 +25890,7 @@
               <a:t>UPDATE</a:t>
             </a:r>
             <a:r>
-              <a:rPr lang="zh-CN" altLang="en-US" sz="1200">
+              <a:rPr lang="zh-CN" altLang="en-US" sz="1200" dirty="0">
                 <a:solidFill>
                   <a:srgbClr val="BCBEC4"/>
                 </a:solidFill>
@@ -25492,7 +25899,7 @@
               <a:t> </a:t>
             </a:r>
             <a:r>
-              <a:rPr lang="en-US" altLang="zh-CN" sz="1200">
+              <a:rPr lang="en-US" altLang="zh-CN" sz="1200" dirty="0">
                 <a:solidFill>
                   <a:srgbClr val="BCBEC4"/>
                 </a:solidFill>
@@ -25501,7 +25908,7 @@
               <a:t>CASCADE</a:t>
             </a:r>
             <a:br>
-              <a:rPr lang="zh-CN" altLang="en-US" sz="1200">
+              <a:rPr lang="zh-CN" altLang="en-US" sz="1200" dirty="0">
                 <a:solidFill>
                   <a:srgbClr val="BCBEC4"/>
                 </a:solidFill>
@@ -25509,7 +25916,7 @@
               </a:rPr>
             </a:br>
             <a:r>
-              <a:rPr lang="en-US" altLang="zh-CN" sz="1200">
+              <a:rPr lang="en-US" altLang="zh-CN" sz="1200" dirty="0">
                 <a:solidFill>
                   <a:srgbClr val="BCBEC4"/>
                 </a:solidFill>
@@ -25517,13 +25924,13 @@
               </a:rPr>
               <a:t>)</a:t>
             </a:r>
-            <a:endParaRPr lang="zh-CN"/>
+            <a:endParaRPr lang="zh-CN" dirty="0"/>
           </a:p>
           <a:p>
             <a:pPr>
               <a:buNone/>
             </a:pPr>
-            <a:endParaRPr lang="zh-CN" sz="1200">
+            <a:endParaRPr lang="zh-CN" sz="1200" dirty="0">
               <a:solidFill>
                 <a:srgbClr val="BCBEC4"/>
               </a:solidFill>
@@ -25536,7 +25943,7 @@
             <a:pPr>
               <a:buNone/>
             </a:pPr>
-            <a:endParaRPr lang="zh-CN" sz="1400">
+            <a:endParaRPr lang="zh-CN" sz="1400" dirty="0">
               <a:solidFill>
                 <a:srgbClr val="BCBEC4"/>
               </a:solidFill>
@@ -25549,7 +25956,7 @@
             <a:pPr marL="0" indent="0">
               <a:buNone/>
             </a:pPr>
-            <a:endParaRPr lang="zh-CN" altLang="en-US" sz="2000">
+            <a:endParaRPr lang="zh-CN" altLang="en-US" sz="2000" dirty="0">
               <a:solidFill>
                 <a:srgbClr val="366091"/>
               </a:solidFill>
@@ -25559,7 +25966,7 @@
             </a:endParaRPr>
           </a:p>
           <a:p>
-            <a:endParaRPr lang="en-GB" sz="1100">
+            <a:endParaRPr lang="en-GB" sz="1100" dirty="0">
               <a:solidFill>
                 <a:srgbClr val="000000"/>
               </a:solidFill>
@@ -25569,7 +25976,7 @@
             </a:endParaRPr>
           </a:p>
           <a:p>
-            <a:endParaRPr lang="it-IT" sz="1400">
+            <a:endParaRPr lang="it-IT" sz="1400" dirty="0">
               <a:solidFill>
                 <a:srgbClr val="333333"/>
               </a:solidFill>
@@ -25579,7 +25986,7 @@
             </a:endParaRPr>
           </a:p>
           <a:p>
-            <a:endParaRPr lang="it-IT" altLang="zh-CN" sz="1100">
+            <a:endParaRPr lang="it-IT" altLang="zh-CN" sz="1100" dirty="0">
               <a:solidFill>
                 <a:srgbClr val="000000"/>
               </a:solidFill>
@@ -25590,7 +25997,7 @@
           </a:p>
           <a:p>
             <a:pPr marL="342900" indent="-342900"/>
-            <a:endParaRPr lang="it-IT" altLang="zh-CN" sz="2000">
+            <a:endParaRPr lang="it-IT" altLang="zh-CN" sz="2000" dirty="0">
               <a:latin typeface="Gill Sans MT"/>
               <a:ea typeface="DengXian"/>
             </a:endParaRPr>
@@ -27750,7 +28157,7 @@
               <a:buNone/>
             </a:pPr>
             <a:r>
-              <a:rPr lang="zh-CN" sz="1200">
+              <a:rPr lang="zh-CN" sz="1200" dirty="0">
                 <a:solidFill>
                   <a:srgbClr val="CF8E6D"/>
                 </a:solidFill>
@@ -27760,7 +28167,7 @@
               <a:t>CREATE TABLE</a:t>
             </a:r>
             <a:r>
-              <a:rPr lang="zh-CN" sz="1200">
+              <a:rPr lang="zh-CN" sz="1200" dirty="0">
                 <a:solidFill>
                   <a:srgbClr val="BCBEC4"/>
                 </a:solidFill>
@@ -27770,7 +28177,7 @@
               <a:t> `</a:t>
             </a:r>
             <a:r>
-              <a:rPr lang="zh-CN" sz="1200">
+              <a:rPr lang="zh-CN" sz="1200" dirty="0">
                 <a:solidFill>
                   <a:srgbClr val="56A8F5"/>
                 </a:solidFill>
@@ -27780,7 +28187,7 @@
               <a:t>auc_item</a:t>
             </a:r>
             <a:r>
-              <a:rPr lang="zh-CN" sz="1200">
+              <a:rPr lang="zh-CN" sz="1200" dirty="0">
                 <a:solidFill>
                   <a:srgbClr val="BCBEC4"/>
                 </a:solidFill>
@@ -27790,13 +28197,13 @@
               <a:t>` (</a:t>
             </a:r>
             <a:br>
-              <a:rPr lang="zh-CN" sz="1200">
+              <a:rPr lang="zh-CN" sz="1200" dirty="0">
                 <a:ea typeface="+mn-lt"/>
                 <a:cs typeface="+mn-lt"/>
               </a:rPr>
             </a:br>
             <a:r>
-              <a:rPr lang="zh-CN" sz="1200">
+              <a:rPr lang="zh-CN" sz="1200" dirty="0">
                 <a:solidFill>
                   <a:srgbClr val="BCBEC4"/>
                 </a:solidFill>
@@ -27806,7 +28213,7 @@
               <a:t> `</a:t>
             </a:r>
             <a:r>
-              <a:rPr lang="zh-CN" sz="1200">
+              <a:rPr lang="zh-CN" sz="1200" dirty="0">
                 <a:solidFill>
                   <a:srgbClr val="6AAB73"/>
                 </a:solidFill>
@@ -27816,7 +28223,7 @@
               <a:t>aucID</a:t>
             </a:r>
             <a:r>
-              <a:rPr lang="zh-CN" sz="1200">
+              <a:rPr lang="zh-CN" sz="1200" dirty="0">
                 <a:solidFill>
                   <a:srgbClr val="BCBEC4"/>
                 </a:solidFill>
@@ -27826,7 +28233,7 @@
               <a:t>` </a:t>
             </a:r>
             <a:r>
-              <a:rPr lang="zh-CN" sz="1200">
+              <a:rPr lang="zh-CN" sz="1200" dirty="0">
                 <a:solidFill>
                   <a:srgbClr val="CF8E6D"/>
                 </a:solidFill>
@@ -27836,7 +28243,7 @@
               <a:t>int NOT NULL</a:t>
             </a:r>
             <a:r>
-              <a:rPr lang="zh-CN" sz="1200">
+              <a:rPr lang="zh-CN" sz="1200" dirty="0">
                 <a:solidFill>
                   <a:srgbClr val="BCBEC4"/>
                 </a:solidFill>
@@ -27846,13 +28253,13 @@
               <a:t>,</a:t>
             </a:r>
             <a:br>
-              <a:rPr lang="zh-CN" sz="1200">
+              <a:rPr lang="zh-CN" sz="1200" dirty="0">
                 <a:ea typeface="+mn-lt"/>
                 <a:cs typeface="+mn-lt"/>
               </a:rPr>
             </a:br>
             <a:r>
-              <a:rPr lang="zh-CN" sz="1200">
+              <a:rPr lang="zh-CN" sz="1200" dirty="0">
                 <a:solidFill>
                   <a:srgbClr val="BCBEC4"/>
                 </a:solidFill>
@@ -27862,7 +28269,7 @@
               <a:t> `</a:t>
             </a:r>
             <a:r>
-              <a:rPr lang="zh-CN" sz="1200">
+              <a:rPr lang="zh-CN" sz="1200" dirty="0">
                 <a:solidFill>
                   <a:srgbClr val="6AAB73"/>
                 </a:solidFill>
@@ -27872,7 +28279,7 @@
               <a:t>itemID</a:t>
             </a:r>
             <a:r>
-              <a:rPr lang="zh-CN" sz="1200">
+              <a:rPr lang="zh-CN" sz="1200" dirty="0">
                 <a:solidFill>
                   <a:srgbClr val="BCBEC4"/>
                 </a:solidFill>
@@ -27882,7 +28289,7 @@
               <a:t>` </a:t>
             </a:r>
             <a:r>
-              <a:rPr lang="zh-CN" sz="1200">
+              <a:rPr lang="zh-CN" sz="1200" dirty="0">
                 <a:solidFill>
                   <a:srgbClr val="CF8E6D"/>
                 </a:solidFill>
@@ -27892,7 +28299,7 @@
               <a:t>int NOT NULL</a:t>
             </a:r>
             <a:r>
-              <a:rPr lang="zh-CN" sz="1200">
+              <a:rPr lang="zh-CN" sz="1200" dirty="0">
                 <a:solidFill>
                   <a:srgbClr val="BCBEC4"/>
                 </a:solidFill>
@@ -27902,23 +28309,23 @@
               <a:t>,</a:t>
             </a:r>
             <a:br>
-              <a:rPr lang="zh-CN" sz="1200">
+              <a:rPr lang="zh-CN" sz="1200" dirty="0">
                 <a:ea typeface="+mn-lt"/>
                 <a:cs typeface="+mn-lt"/>
               </a:rPr>
             </a:br>
             <a:r>
-              <a:rPr lang="zh-CN" sz="1200">
-                <a:solidFill>
-                  <a:srgbClr val="BCBEC4"/>
-                </a:solidFill>
-                <a:ea typeface="+mn-lt"/>
-                <a:cs typeface="+mn-lt"/>
-              </a:rPr>
-              <a:t> </a:t>
-            </a:r>
-            <a:r>
-              <a:rPr lang="zh-CN" sz="1200">
+              <a:rPr lang="zh-CN" sz="1200" dirty="0">
+                <a:solidFill>
+                  <a:srgbClr val="BCBEC4"/>
+                </a:solidFill>
+                <a:ea typeface="+mn-lt"/>
+                <a:cs typeface="+mn-lt"/>
+              </a:rPr>
+              <a:t> </a:t>
+            </a:r>
+            <a:r>
+              <a:rPr lang="zh-CN" sz="1200" dirty="0">
                 <a:solidFill>
                   <a:srgbClr val="CF8E6D"/>
                 </a:solidFill>
@@ -27928,7 +28335,7 @@
               <a:t>PRIMARY KEY</a:t>
             </a:r>
             <a:r>
-              <a:rPr lang="zh-CN" sz="1200">
+              <a:rPr lang="zh-CN" sz="1200" dirty="0">
                 <a:solidFill>
                   <a:srgbClr val="BCBEC4"/>
                 </a:solidFill>
@@ -27938,7 +28345,7 @@
               <a:t> (`</a:t>
             </a:r>
             <a:r>
-              <a:rPr lang="zh-CN" sz="1200">
+              <a:rPr lang="zh-CN" sz="1200" dirty="0">
                 <a:solidFill>
                   <a:srgbClr val="6AAB73"/>
                 </a:solidFill>
@@ -27948,7 +28355,7 @@
               <a:t>aucID</a:t>
             </a:r>
             <a:r>
-              <a:rPr lang="zh-CN" sz="1200">
+              <a:rPr lang="zh-CN" sz="1200" dirty="0">
                 <a:solidFill>
                   <a:srgbClr val="BCBEC4"/>
                 </a:solidFill>
@@ -27958,7 +28365,7 @@
               <a:t>`,`</a:t>
             </a:r>
             <a:r>
-              <a:rPr lang="zh-CN" sz="1200">
+              <a:rPr lang="zh-CN" sz="1200" dirty="0">
                 <a:solidFill>
                   <a:srgbClr val="6AAB73"/>
                 </a:solidFill>
@@ -27968,7 +28375,7 @@
               <a:t>itemID</a:t>
             </a:r>
             <a:r>
-              <a:rPr lang="zh-CN" sz="1200">
+              <a:rPr lang="zh-CN" sz="1200" dirty="0">
                 <a:solidFill>
                   <a:srgbClr val="BCBEC4"/>
                 </a:solidFill>
@@ -27978,23 +28385,23 @@
               <a:t>`),</a:t>
             </a:r>
             <a:br>
-              <a:rPr lang="zh-CN" sz="1200">
+              <a:rPr lang="zh-CN" sz="1200" dirty="0">
                 <a:ea typeface="+mn-lt"/>
                 <a:cs typeface="+mn-lt"/>
               </a:rPr>
             </a:br>
             <a:r>
-              <a:rPr lang="zh-CN" sz="1200">
-                <a:solidFill>
-                  <a:srgbClr val="BCBEC4"/>
-                </a:solidFill>
-                <a:ea typeface="+mn-lt"/>
-                <a:cs typeface="+mn-lt"/>
-              </a:rPr>
-              <a:t> </a:t>
-            </a:r>
-            <a:r>
-              <a:rPr lang="zh-CN" sz="1200">
+              <a:rPr lang="zh-CN" sz="1200" dirty="0">
+                <a:solidFill>
+                  <a:srgbClr val="BCBEC4"/>
+                </a:solidFill>
+                <a:ea typeface="+mn-lt"/>
+                <a:cs typeface="+mn-lt"/>
+              </a:rPr>
+              <a:t> </a:t>
+            </a:r>
+            <a:r>
+              <a:rPr lang="zh-CN" sz="1200" dirty="0">
                 <a:solidFill>
                   <a:srgbClr val="CF8E6D"/>
                 </a:solidFill>
@@ -28004,7 +28411,7 @@
               <a:t>KEY </a:t>
             </a:r>
             <a:r>
-              <a:rPr lang="zh-CN" sz="1200">
+              <a:rPr lang="zh-CN" sz="1200" dirty="0">
                 <a:solidFill>
                   <a:srgbClr val="BCBEC4"/>
                 </a:solidFill>
@@ -28014,7 +28421,7 @@
               <a:t>`</a:t>
             </a:r>
             <a:r>
-              <a:rPr lang="zh-CN" sz="1200">
+              <a:rPr lang="zh-CN" sz="1200" dirty="0">
                 <a:solidFill>
                   <a:srgbClr val="6AAB73"/>
                 </a:solidFill>
@@ -28024,7 +28431,7 @@
               <a:t>itemID</a:t>
             </a:r>
             <a:r>
-              <a:rPr lang="zh-CN" sz="1200">
+              <a:rPr lang="zh-CN" sz="1200" dirty="0">
                 <a:solidFill>
                   <a:srgbClr val="BCBEC4"/>
                 </a:solidFill>
@@ -28034,7 +28441,7 @@
               <a:t>` (`</a:t>
             </a:r>
             <a:r>
-              <a:rPr lang="zh-CN" sz="1200">
+              <a:rPr lang="zh-CN" sz="1200" dirty="0">
                 <a:solidFill>
                   <a:srgbClr val="6AAB73"/>
                 </a:solidFill>
@@ -28044,7 +28451,7 @@
               <a:t>itemID</a:t>
             </a:r>
             <a:r>
-              <a:rPr lang="zh-CN" sz="1200">
+              <a:rPr lang="zh-CN" sz="1200" dirty="0">
                 <a:solidFill>
                   <a:srgbClr val="BCBEC4"/>
                 </a:solidFill>
@@ -28054,23 +28461,23 @@
               <a:t>`),</a:t>
             </a:r>
             <a:br>
-              <a:rPr lang="zh-CN" sz="1200">
+              <a:rPr lang="zh-CN" sz="1200" dirty="0">
                 <a:ea typeface="+mn-lt"/>
                 <a:cs typeface="+mn-lt"/>
               </a:rPr>
             </a:br>
             <a:r>
-              <a:rPr lang="zh-CN" sz="1200">
-                <a:solidFill>
-                  <a:srgbClr val="BCBEC4"/>
-                </a:solidFill>
-                <a:ea typeface="+mn-lt"/>
-                <a:cs typeface="+mn-lt"/>
-              </a:rPr>
-              <a:t> </a:t>
-            </a:r>
-            <a:r>
-              <a:rPr lang="zh-CN" sz="1200">
+              <a:rPr lang="zh-CN" sz="1200" dirty="0">
+                <a:solidFill>
+                  <a:srgbClr val="BCBEC4"/>
+                </a:solidFill>
+                <a:ea typeface="+mn-lt"/>
+                <a:cs typeface="+mn-lt"/>
+              </a:rPr>
+              <a:t> </a:t>
+            </a:r>
+            <a:r>
+              <a:rPr lang="zh-CN" sz="1200" dirty="0">
                 <a:solidFill>
                   <a:srgbClr val="CF8E6D"/>
                 </a:solidFill>
@@ -28080,7 +28487,7 @@
               <a:t>CONSTRAINT </a:t>
             </a:r>
             <a:r>
-              <a:rPr lang="zh-CN" sz="1200">
+              <a:rPr lang="zh-CN" sz="1200" dirty="0">
                 <a:solidFill>
                   <a:srgbClr val="BCBEC4"/>
                 </a:solidFill>
@@ -28090,7 +28497,7 @@
               <a:t>`</a:t>
             </a:r>
             <a:r>
-              <a:rPr lang="zh-CN" sz="1200">
+              <a:rPr lang="zh-CN" sz="1200" dirty="0">
                 <a:solidFill>
                   <a:srgbClr val="6AAB73"/>
                 </a:solidFill>
@@ -28100,7 +28507,7 @@
               <a:t>auc_item_ibfk_1</a:t>
             </a:r>
             <a:r>
-              <a:rPr lang="zh-CN" sz="1200">
+              <a:rPr lang="zh-CN" sz="1200" dirty="0">
                 <a:solidFill>
                   <a:srgbClr val="BCBEC4"/>
                 </a:solidFill>
@@ -28110,7 +28517,7 @@
               <a:t>` </a:t>
             </a:r>
             <a:r>
-              <a:rPr lang="zh-CN" sz="1200">
+              <a:rPr lang="zh-CN" sz="1200" dirty="0">
                 <a:solidFill>
                   <a:srgbClr val="CF8E6D"/>
                 </a:solidFill>
@@ -28120,7 +28527,7 @@
               <a:t>FOREIGN KEY</a:t>
             </a:r>
             <a:r>
-              <a:rPr lang="zh-CN" sz="1200">
+              <a:rPr lang="zh-CN" sz="1200" dirty="0">
                 <a:solidFill>
                   <a:srgbClr val="BCBEC4"/>
                 </a:solidFill>
@@ -28130,7 +28537,7 @@
               <a:t> (`</a:t>
             </a:r>
             <a:r>
-              <a:rPr lang="zh-CN" sz="1200">
+              <a:rPr lang="zh-CN" sz="1200" dirty="0">
                 <a:solidFill>
                   <a:srgbClr val="6AAB73"/>
                 </a:solidFill>
@@ -28140,7 +28547,7 @@
               <a:t>itemID</a:t>
             </a:r>
             <a:r>
-              <a:rPr lang="zh-CN" sz="1200">
+              <a:rPr lang="zh-CN" sz="1200" dirty="0">
                 <a:solidFill>
                   <a:srgbClr val="BCBEC4"/>
                 </a:solidFill>
@@ -28150,7 +28557,7 @@
               <a:t>`) </a:t>
             </a:r>
             <a:r>
-              <a:rPr lang="zh-CN" sz="1200">
+              <a:rPr lang="zh-CN" sz="1200" dirty="0">
                 <a:solidFill>
                   <a:srgbClr val="CF8E6D"/>
                 </a:solidFill>
@@ -28160,7 +28567,7 @@
               <a:t>REFERENCES </a:t>
             </a:r>
             <a:r>
-              <a:rPr lang="zh-CN" sz="1200">
+              <a:rPr lang="zh-CN" sz="1200" dirty="0">
                 <a:solidFill>
                   <a:srgbClr val="BCBEC4"/>
                 </a:solidFill>
@@ -28170,7 +28577,7 @@
               <a:t>`</a:t>
             </a:r>
             <a:r>
-              <a:rPr lang="zh-CN" sz="1200">
+              <a:rPr lang="zh-CN" sz="1200" dirty="0">
                 <a:solidFill>
                   <a:srgbClr val="6AAB73"/>
                 </a:solidFill>
@@ -28180,7 +28587,7 @@
               <a:t>item</a:t>
             </a:r>
             <a:r>
-              <a:rPr lang="zh-CN" sz="1200">
+              <a:rPr lang="zh-CN" sz="1200" dirty="0">
                 <a:solidFill>
                   <a:srgbClr val="BCBEC4"/>
                 </a:solidFill>
@@ -28190,7 +28597,7 @@
               <a:t>` (`</a:t>
             </a:r>
             <a:r>
-              <a:rPr lang="zh-CN" sz="1200">
+              <a:rPr lang="zh-CN" sz="1200" dirty="0">
                 <a:solidFill>
                   <a:srgbClr val="6AAB73"/>
                 </a:solidFill>
@@ -28200,7 +28607,7 @@
               <a:t>itemID</a:t>
             </a:r>
             <a:r>
-              <a:rPr lang="zh-CN" sz="1200">
+              <a:rPr lang="zh-CN" sz="1200" dirty="0">
                 <a:solidFill>
                   <a:srgbClr val="BCBEC4"/>
                 </a:solidFill>
@@ -28210,7 +28617,7 @@
               <a:t>`) </a:t>
             </a:r>
             <a:r>
-              <a:rPr lang="zh-CN" sz="1200">
+              <a:rPr lang="zh-CN" sz="1200" dirty="0">
                 <a:solidFill>
                   <a:srgbClr val="CF8E6D"/>
                 </a:solidFill>
@@ -28220,7 +28627,7 @@
               <a:t>ON DELETE CASCADE ON UPDATE</a:t>
             </a:r>
             <a:r>
-              <a:rPr lang="zh-CN" sz="1200">
+              <a:rPr lang="zh-CN" sz="1200" dirty="0">
                 <a:solidFill>
                   <a:srgbClr val="BCBEC4"/>
                 </a:solidFill>
@@ -28230,23 +28637,23 @@
               <a:t> CASCADE,</a:t>
             </a:r>
             <a:br>
-              <a:rPr lang="zh-CN" sz="1200">
+              <a:rPr lang="zh-CN" sz="1200" dirty="0">
                 <a:ea typeface="+mn-lt"/>
                 <a:cs typeface="+mn-lt"/>
               </a:rPr>
             </a:br>
             <a:r>
-              <a:rPr lang="zh-CN" sz="1200">
-                <a:solidFill>
-                  <a:srgbClr val="BCBEC4"/>
-                </a:solidFill>
-                <a:ea typeface="+mn-lt"/>
-                <a:cs typeface="+mn-lt"/>
-              </a:rPr>
-              <a:t> </a:t>
-            </a:r>
-            <a:r>
-              <a:rPr lang="zh-CN" sz="1200">
+              <a:rPr lang="zh-CN" sz="1200" dirty="0">
+                <a:solidFill>
+                  <a:srgbClr val="BCBEC4"/>
+                </a:solidFill>
+                <a:ea typeface="+mn-lt"/>
+                <a:cs typeface="+mn-lt"/>
+              </a:rPr>
+              <a:t> </a:t>
+            </a:r>
+            <a:r>
+              <a:rPr lang="zh-CN" sz="1200" dirty="0">
                 <a:solidFill>
                   <a:srgbClr val="CF8E6D"/>
                 </a:solidFill>
@@ -28256,7 +28663,7 @@
               <a:t>CONSTRAINT </a:t>
             </a:r>
             <a:r>
-              <a:rPr lang="zh-CN" sz="1200">
+              <a:rPr lang="zh-CN" sz="1200" dirty="0">
                 <a:solidFill>
                   <a:srgbClr val="BCBEC4"/>
                 </a:solidFill>
@@ -28266,7 +28673,7 @@
               <a:t>`</a:t>
             </a:r>
             <a:r>
-              <a:rPr lang="zh-CN" sz="1200">
+              <a:rPr lang="zh-CN" sz="1200" dirty="0">
                 <a:solidFill>
                   <a:srgbClr val="6AAB73"/>
                 </a:solidFill>
@@ -28276,7 +28683,7 @@
               <a:t>auc_item_ibfk_2</a:t>
             </a:r>
             <a:r>
-              <a:rPr lang="zh-CN" sz="1200">
+              <a:rPr lang="zh-CN" sz="1200" dirty="0">
                 <a:solidFill>
                   <a:srgbClr val="BCBEC4"/>
                 </a:solidFill>
@@ -28286,7 +28693,7 @@
               <a:t>` </a:t>
             </a:r>
             <a:r>
-              <a:rPr lang="zh-CN" sz="1200">
+              <a:rPr lang="zh-CN" sz="1200" dirty="0">
                 <a:solidFill>
                   <a:srgbClr val="CF8E6D"/>
                 </a:solidFill>
@@ -28296,7 +28703,7 @@
               <a:t>FOREIGN KEY</a:t>
             </a:r>
             <a:r>
-              <a:rPr lang="zh-CN" sz="1200">
+              <a:rPr lang="zh-CN" sz="1200" dirty="0">
                 <a:solidFill>
                   <a:srgbClr val="BCBEC4"/>
                 </a:solidFill>
@@ -28306,7 +28713,7 @@
               <a:t> (`</a:t>
             </a:r>
             <a:r>
-              <a:rPr lang="zh-CN" sz="1200">
+              <a:rPr lang="zh-CN" sz="1200" dirty="0">
                 <a:solidFill>
                   <a:srgbClr val="6AAB73"/>
                 </a:solidFill>
@@ -28316,7 +28723,7 @@
               <a:t>aucID</a:t>
             </a:r>
             <a:r>
-              <a:rPr lang="zh-CN" sz="1200">
+              <a:rPr lang="zh-CN" sz="1200" dirty="0">
                 <a:solidFill>
                   <a:srgbClr val="BCBEC4"/>
                 </a:solidFill>
@@ -28326,7 +28733,7 @@
               <a:t>`) </a:t>
             </a:r>
             <a:r>
-              <a:rPr lang="zh-CN" sz="1200">
+              <a:rPr lang="zh-CN" sz="1200" dirty="0">
                 <a:solidFill>
                   <a:srgbClr val="CF8E6D"/>
                 </a:solidFill>
@@ -28336,7 +28743,7 @@
               <a:t>REFERENCES </a:t>
             </a:r>
             <a:r>
-              <a:rPr lang="zh-CN" sz="1200">
+              <a:rPr lang="zh-CN" sz="1200" dirty="0">
                 <a:solidFill>
                   <a:srgbClr val="BCBEC4"/>
                 </a:solidFill>
@@ -28346,7 +28753,7 @@
               <a:t>`</a:t>
             </a:r>
             <a:r>
-              <a:rPr lang="zh-CN" sz="1200">
+              <a:rPr lang="zh-CN" sz="1200" dirty="0">
                 <a:solidFill>
                   <a:srgbClr val="6AAB73"/>
                 </a:solidFill>
@@ -28356,7 +28763,7 @@
               <a:t>auction</a:t>
             </a:r>
             <a:r>
-              <a:rPr lang="zh-CN" sz="1200">
+              <a:rPr lang="zh-CN" sz="1200" dirty="0">
                 <a:solidFill>
                   <a:srgbClr val="BCBEC4"/>
                 </a:solidFill>
@@ -28366,7 +28773,7 @@
               <a:t>` (`</a:t>
             </a:r>
             <a:r>
-              <a:rPr lang="zh-CN" sz="1200">
+              <a:rPr lang="zh-CN" sz="1200" dirty="0">
                 <a:solidFill>
                   <a:srgbClr val="6AAB73"/>
                 </a:solidFill>
@@ -28376,7 +28783,7 @@
               <a:t>aucID</a:t>
             </a:r>
             <a:r>
-              <a:rPr lang="zh-CN" sz="1200">
+              <a:rPr lang="zh-CN" sz="1200" dirty="0">
                 <a:solidFill>
                   <a:srgbClr val="BCBEC4"/>
                 </a:solidFill>
@@ -28386,7 +28793,7 @@
               <a:t>`) </a:t>
             </a:r>
             <a:r>
-              <a:rPr lang="zh-CN" sz="1200">
+              <a:rPr lang="zh-CN" sz="1200" dirty="0">
                 <a:solidFill>
                   <a:srgbClr val="CF8E6D"/>
                 </a:solidFill>
@@ -28396,7 +28803,7 @@
               <a:t>ON DELETE CASCADE ON UPDATE</a:t>
             </a:r>
             <a:r>
-              <a:rPr lang="zh-CN" sz="1200">
+              <a:rPr lang="zh-CN" sz="1200" dirty="0">
                 <a:solidFill>
                   <a:srgbClr val="BCBEC4"/>
                 </a:solidFill>
@@ -28406,13 +28813,13 @@
               <a:t> CASCADE</a:t>
             </a:r>
             <a:br>
-              <a:rPr lang="zh-CN" sz="1200">
+              <a:rPr lang="zh-CN" sz="1200" dirty="0">
                 <a:ea typeface="+mn-lt"/>
                 <a:cs typeface="+mn-lt"/>
               </a:rPr>
             </a:br>
             <a:r>
-              <a:rPr lang="zh-CN" sz="1200">
+              <a:rPr lang="zh-CN" sz="1200" dirty="0">
                 <a:solidFill>
                   <a:srgbClr val="BCBEC4"/>
                 </a:solidFill>
@@ -28421,7 +28828,7 @@
               </a:rPr>
               <a:t>)</a:t>
             </a:r>
-            <a:endParaRPr lang="zh-CN" sz="1200">
+            <a:endParaRPr lang="zh-CN" sz="1200" dirty="0">
               <a:ea typeface="DengXian"/>
             </a:endParaRPr>
           </a:p>
@@ -28430,7 +28837,7 @@
               <a:buNone/>
             </a:pPr>
             <a:r>
-              <a:rPr lang="en-US" altLang="zh-CN" sz="1200">
+              <a:rPr lang="en-US" altLang="zh-CN" sz="1200" dirty="0">
                 <a:solidFill>
                   <a:srgbClr val="CF8E6D"/>
                 </a:solidFill>
@@ -28440,7 +28847,7 @@
               <a:t>CREATE</a:t>
             </a:r>
             <a:r>
-              <a:rPr lang="zh-CN" altLang="en-US" sz="1200">
+              <a:rPr lang="zh-CN" altLang="en-US" sz="1200" dirty="0">
                 <a:solidFill>
                   <a:srgbClr val="CF8E6D"/>
                 </a:solidFill>
@@ -28450,7 +28857,7 @@
               <a:t> </a:t>
             </a:r>
             <a:r>
-              <a:rPr lang="en-US" altLang="zh-CN" sz="1200">
+              <a:rPr lang="en-US" altLang="zh-CN" sz="1200" dirty="0">
                 <a:solidFill>
                   <a:srgbClr val="CF8E6D"/>
                 </a:solidFill>
@@ -28460,17 +28867,17 @@
               <a:t>TABLE</a:t>
             </a:r>
             <a:r>
-              <a:rPr lang="zh-CN" altLang="en-US" sz="1200">
-                <a:solidFill>
-                  <a:srgbClr val="BCBEC4"/>
-                </a:solidFill>
-                <a:ea typeface="+mn-lt"/>
-                <a:cs typeface="+mn-lt"/>
-              </a:rPr>
-              <a:t> </a:t>
-            </a:r>
-            <a:r>
-              <a:rPr lang="en-US" altLang="zh-CN" sz="1200">
+              <a:rPr lang="zh-CN" altLang="en-US" sz="1200" dirty="0">
+                <a:solidFill>
+                  <a:srgbClr val="BCBEC4"/>
+                </a:solidFill>
+                <a:ea typeface="+mn-lt"/>
+                <a:cs typeface="+mn-lt"/>
+              </a:rPr>
+              <a:t> </a:t>
+            </a:r>
+            <a:r>
+              <a:rPr lang="en-US" altLang="zh-CN" sz="1200" dirty="0">
                 <a:solidFill>
                   <a:srgbClr val="BCBEC4"/>
                 </a:solidFill>
@@ -28480,7 +28887,7 @@
               <a:t>`</a:t>
             </a:r>
             <a:r>
-              <a:rPr lang="en-US" altLang="zh-CN" sz="1200">
+              <a:rPr lang="en-US" altLang="zh-CN" sz="1200" dirty="0">
                 <a:solidFill>
                   <a:srgbClr val="56A8F5"/>
                 </a:solidFill>
@@ -28490,7 +28897,7 @@
               <a:t>auction</a:t>
             </a:r>
             <a:r>
-              <a:rPr lang="en-US" altLang="zh-CN" sz="1200">
+              <a:rPr lang="en-US" altLang="zh-CN" sz="1200" dirty="0">
                 <a:solidFill>
                   <a:srgbClr val="BCBEC4"/>
                 </a:solidFill>
@@ -28500,17 +28907,17 @@
               <a:t>`</a:t>
             </a:r>
             <a:r>
-              <a:rPr lang="zh-CN" altLang="en-US" sz="1200">
-                <a:solidFill>
-                  <a:srgbClr val="BCBEC4"/>
-                </a:solidFill>
-                <a:ea typeface="+mn-lt"/>
-                <a:cs typeface="+mn-lt"/>
-              </a:rPr>
-              <a:t> </a:t>
-            </a:r>
-            <a:r>
-              <a:rPr lang="en-US" altLang="zh-CN" sz="1200">
+              <a:rPr lang="zh-CN" altLang="en-US" sz="1200" dirty="0">
+                <a:solidFill>
+                  <a:srgbClr val="BCBEC4"/>
+                </a:solidFill>
+                <a:ea typeface="+mn-lt"/>
+                <a:cs typeface="+mn-lt"/>
+              </a:rPr>
+              <a:t> </a:t>
+            </a:r>
+            <a:r>
+              <a:rPr lang="en-US" altLang="zh-CN" sz="1200" dirty="0">
                 <a:solidFill>
                   <a:srgbClr val="BCBEC4"/>
                 </a:solidFill>
@@ -28520,23 +28927,23 @@
               <a:t>(</a:t>
             </a:r>
             <a:br>
-              <a:rPr lang="zh-CN" altLang="en-US" sz="1200">
+              <a:rPr lang="zh-CN" altLang="en-US" sz="1200" dirty="0">
                 <a:ea typeface="+mn-lt"/>
                 <a:cs typeface="+mn-lt"/>
               </a:rPr>
             </a:br>
             <a:r>
-              <a:rPr lang="zh-CN" altLang="en-US" sz="1200">
-                <a:solidFill>
-                  <a:srgbClr val="BCBEC4"/>
-                </a:solidFill>
-                <a:ea typeface="+mn-lt"/>
-                <a:cs typeface="+mn-lt"/>
-              </a:rPr>
-              <a:t> </a:t>
-            </a:r>
-            <a:r>
-              <a:rPr lang="en-US" altLang="zh-CN" sz="1200">
+              <a:rPr lang="zh-CN" altLang="en-US" sz="1200" dirty="0">
+                <a:solidFill>
+                  <a:srgbClr val="BCBEC4"/>
+                </a:solidFill>
+                <a:ea typeface="+mn-lt"/>
+                <a:cs typeface="+mn-lt"/>
+              </a:rPr>
+              <a:t> </a:t>
+            </a:r>
+            <a:r>
+              <a:rPr lang="en-US" altLang="zh-CN" sz="1200" dirty="0">
                 <a:solidFill>
                   <a:srgbClr val="BCBEC4"/>
                 </a:solidFill>
@@ -28546,7 +28953,7 @@
               <a:t>`</a:t>
             </a:r>
             <a:r>
-              <a:rPr lang="en-US" altLang="zh-CN" sz="1200" err="1">
+              <a:rPr lang="en-US" altLang="zh-CN" sz="1200" dirty="0" err="1">
                 <a:solidFill>
                   <a:srgbClr val="6AAB73"/>
                 </a:solidFill>
@@ -28556,7 +28963,7 @@
               <a:t>aucID</a:t>
             </a:r>
             <a:r>
-              <a:rPr lang="en-US" altLang="zh-CN" sz="1200">
+              <a:rPr lang="en-US" altLang="zh-CN" sz="1200" dirty="0">
                 <a:solidFill>
                   <a:srgbClr val="BCBEC4"/>
                 </a:solidFill>
@@ -28566,17 +28973,17 @@
               <a:t>`</a:t>
             </a:r>
             <a:r>
-              <a:rPr lang="zh-CN" altLang="en-US" sz="1200">
-                <a:solidFill>
-                  <a:srgbClr val="BCBEC4"/>
-                </a:solidFill>
-                <a:ea typeface="+mn-lt"/>
-                <a:cs typeface="+mn-lt"/>
-              </a:rPr>
-              <a:t> </a:t>
-            </a:r>
-            <a:r>
-              <a:rPr lang="en-US" altLang="zh-CN" sz="1200">
+              <a:rPr lang="zh-CN" altLang="en-US" sz="1200" dirty="0">
+                <a:solidFill>
+                  <a:srgbClr val="BCBEC4"/>
+                </a:solidFill>
+                <a:ea typeface="+mn-lt"/>
+                <a:cs typeface="+mn-lt"/>
+              </a:rPr>
+              <a:t> </a:t>
+            </a:r>
+            <a:r>
+              <a:rPr lang="en-US" altLang="zh-CN" sz="1200" dirty="0">
                 <a:solidFill>
                   <a:srgbClr val="CF8E6D"/>
                 </a:solidFill>
@@ -28586,7 +28993,7 @@
               <a:t>int</a:t>
             </a:r>
             <a:r>
-              <a:rPr lang="zh-CN" altLang="en-US" sz="1200">
+              <a:rPr lang="zh-CN" altLang="en-US" sz="1200" dirty="0">
                 <a:solidFill>
                   <a:srgbClr val="CF8E6D"/>
                 </a:solidFill>
@@ -28596,7 +29003,7 @@
               <a:t> </a:t>
             </a:r>
             <a:r>
-              <a:rPr lang="en-US" altLang="zh-CN" sz="1200">
+              <a:rPr lang="en-US" altLang="zh-CN" sz="1200" dirty="0">
                 <a:solidFill>
                   <a:srgbClr val="CF8E6D"/>
                 </a:solidFill>
@@ -28606,7 +29013,7 @@
               <a:t>NOT</a:t>
             </a:r>
             <a:r>
-              <a:rPr lang="zh-CN" altLang="en-US" sz="1200">
+              <a:rPr lang="zh-CN" altLang="en-US" sz="1200" dirty="0">
                 <a:solidFill>
                   <a:srgbClr val="CF8E6D"/>
                 </a:solidFill>
@@ -28616,7 +29023,7 @@
               <a:t> </a:t>
             </a:r>
             <a:r>
-              <a:rPr lang="en-US" altLang="zh-CN" sz="1200">
+              <a:rPr lang="en-US" altLang="zh-CN" sz="1200" dirty="0">
                 <a:solidFill>
                   <a:srgbClr val="CF8E6D"/>
                 </a:solidFill>
@@ -28626,17 +29033,17 @@
               <a:t>NULL</a:t>
             </a:r>
             <a:r>
-              <a:rPr lang="zh-CN" altLang="en-US" sz="1200">
-                <a:solidFill>
-                  <a:srgbClr val="BCBEC4"/>
-                </a:solidFill>
-                <a:ea typeface="+mn-lt"/>
-                <a:cs typeface="+mn-lt"/>
-              </a:rPr>
-              <a:t> </a:t>
-            </a:r>
-            <a:r>
-              <a:rPr lang="en-US" altLang="zh-CN" sz="1200">
+              <a:rPr lang="zh-CN" altLang="en-US" sz="1200" dirty="0">
+                <a:solidFill>
+                  <a:srgbClr val="BCBEC4"/>
+                </a:solidFill>
+                <a:ea typeface="+mn-lt"/>
+                <a:cs typeface="+mn-lt"/>
+              </a:rPr>
+              <a:t> </a:t>
+            </a:r>
+            <a:r>
+              <a:rPr lang="en-US" altLang="zh-CN" sz="1200" dirty="0">
                 <a:solidFill>
                   <a:srgbClr val="BCBEC4"/>
                 </a:solidFill>
@@ -28646,23 +29053,23 @@
               <a:t>AUTO_INCREMENT,</a:t>
             </a:r>
             <a:br>
-              <a:rPr lang="zh-CN" altLang="en-US" sz="1200">
+              <a:rPr lang="zh-CN" altLang="en-US" sz="1200" dirty="0">
                 <a:ea typeface="+mn-lt"/>
                 <a:cs typeface="+mn-lt"/>
               </a:rPr>
             </a:br>
             <a:r>
-              <a:rPr lang="zh-CN" altLang="en-US" sz="1200">
-                <a:solidFill>
-                  <a:srgbClr val="BCBEC4"/>
-                </a:solidFill>
-                <a:ea typeface="+mn-lt"/>
-                <a:cs typeface="+mn-lt"/>
-              </a:rPr>
-              <a:t> </a:t>
-            </a:r>
-            <a:r>
-              <a:rPr lang="en-US" altLang="zh-CN" sz="1200">
+              <a:rPr lang="zh-CN" altLang="en-US" sz="1200" dirty="0">
+                <a:solidFill>
+                  <a:srgbClr val="BCBEC4"/>
+                </a:solidFill>
+                <a:ea typeface="+mn-lt"/>
+                <a:cs typeface="+mn-lt"/>
+              </a:rPr>
+              <a:t> </a:t>
+            </a:r>
+            <a:r>
+              <a:rPr lang="en-US" altLang="zh-CN" sz="1200" dirty="0">
                 <a:solidFill>
                   <a:srgbClr val="BCBEC4"/>
                 </a:solidFill>
@@ -28672,7 +29079,7 @@
               <a:t>`</a:t>
             </a:r>
             <a:r>
-              <a:rPr lang="en-US" altLang="zh-CN" sz="1200" err="1">
+              <a:rPr lang="en-US" altLang="zh-CN" sz="1200" dirty="0" err="1">
                 <a:solidFill>
                   <a:srgbClr val="6AAB73"/>
                 </a:solidFill>
@@ -28682,7 +29089,7 @@
               <a:t>ownerID</a:t>
             </a:r>
             <a:r>
-              <a:rPr lang="en-US" altLang="zh-CN" sz="1200">
+              <a:rPr lang="en-US" altLang="zh-CN" sz="1200" dirty="0">
                 <a:solidFill>
                   <a:srgbClr val="BCBEC4"/>
                 </a:solidFill>
@@ -28692,17 +29099,17 @@
               <a:t>`</a:t>
             </a:r>
             <a:r>
-              <a:rPr lang="zh-CN" altLang="en-US" sz="1200">
-                <a:solidFill>
-                  <a:srgbClr val="BCBEC4"/>
-                </a:solidFill>
-                <a:ea typeface="+mn-lt"/>
-                <a:cs typeface="+mn-lt"/>
-              </a:rPr>
-              <a:t> </a:t>
-            </a:r>
-            <a:r>
-              <a:rPr lang="en-US" altLang="zh-CN" sz="1200">
+              <a:rPr lang="zh-CN" altLang="en-US" sz="1200" dirty="0">
+                <a:solidFill>
+                  <a:srgbClr val="BCBEC4"/>
+                </a:solidFill>
+                <a:ea typeface="+mn-lt"/>
+                <a:cs typeface="+mn-lt"/>
+              </a:rPr>
+              <a:t> </a:t>
+            </a:r>
+            <a:r>
+              <a:rPr lang="en-US" altLang="zh-CN" sz="1200" dirty="0">
                 <a:solidFill>
                   <a:srgbClr val="CF8E6D"/>
                 </a:solidFill>
@@ -28712,7 +29119,7 @@
               <a:t>int</a:t>
             </a:r>
             <a:r>
-              <a:rPr lang="zh-CN" altLang="en-US" sz="1200">
+              <a:rPr lang="zh-CN" altLang="en-US" sz="1200" dirty="0">
                 <a:solidFill>
                   <a:srgbClr val="CF8E6D"/>
                 </a:solidFill>
@@ -28722,7 +29129,7 @@
               <a:t> </a:t>
             </a:r>
             <a:r>
-              <a:rPr lang="en-US" altLang="zh-CN" sz="1200">
+              <a:rPr lang="en-US" altLang="zh-CN" sz="1200" dirty="0">
                 <a:solidFill>
                   <a:srgbClr val="CF8E6D"/>
                 </a:solidFill>
@@ -28732,7 +29139,7 @@
               <a:t>NOT</a:t>
             </a:r>
             <a:r>
-              <a:rPr lang="zh-CN" altLang="en-US" sz="1200">
+              <a:rPr lang="zh-CN" altLang="en-US" sz="1200" dirty="0">
                 <a:solidFill>
                   <a:srgbClr val="CF8E6D"/>
                 </a:solidFill>
@@ -28742,7 +29149,7 @@
               <a:t> </a:t>
             </a:r>
             <a:r>
-              <a:rPr lang="en-US" altLang="zh-CN" sz="1200">
+              <a:rPr lang="en-US" altLang="zh-CN" sz="1200" dirty="0">
                 <a:solidFill>
                   <a:srgbClr val="CF8E6D"/>
                 </a:solidFill>
@@ -28752,7 +29159,7 @@
               <a:t>NULL</a:t>
             </a:r>
             <a:r>
-              <a:rPr lang="en-US" altLang="zh-CN" sz="1200">
+              <a:rPr lang="en-US" altLang="zh-CN" sz="1200" dirty="0">
                 <a:solidFill>
                   <a:srgbClr val="BCBEC4"/>
                 </a:solidFill>
@@ -28762,23 +29169,23 @@
               <a:t>,</a:t>
             </a:r>
             <a:br>
-              <a:rPr lang="zh-CN" altLang="en-US" sz="1200">
+              <a:rPr lang="zh-CN" altLang="en-US" sz="1200" dirty="0">
                 <a:ea typeface="+mn-lt"/>
                 <a:cs typeface="+mn-lt"/>
               </a:rPr>
             </a:br>
             <a:r>
-              <a:rPr lang="zh-CN" altLang="en-US" sz="1200">
-                <a:solidFill>
-                  <a:srgbClr val="BCBEC4"/>
-                </a:solidFill>
-                <a:ea typeface="+mn-lt"/>
-                <a:cs typeface="+mn-lt"/>
-              </a:rPr>
-              <a:t> </a:t>
-            </a:r>
-            <a:r>
-              <a:rPr lang="en-US" altLang="zh-CN" sz="1200">
+              <a:rPr lang="zh-CN" altLang="en-US" sz="1200" dirty="0">
+                <a:solidFill>
+                  <a:srgbClr val="BCBEC4"/>
+                </a:solidFill>
+                <a:ea typeface="+mn-lt"/>
+                <a:cs typeface="+mn-lt"/>
+              </a:rPr>
+              <a:t> </a:t>
+            </a:r>
+            <a:r>
+              <a:rPr lang="en-US" altLang="zh-CN" sz="1200" dirty="0">
                 <a:solidFill>
                   <a:srgbClr val="BCBEC4"/>
                 </a:solidFill>
@@ -28788,7 +29195,7 @@
               <a:t>`</a:t>
             </a:r>
             <a:r>
-              <a:rPr lang="en-US" altLang="zh-CN" sz="1200" err="1">
+              <a:rPr lang="en-US" altLang="zh-CN" sz="1200" dirty="0" err="1">
                 <a:solidFill>
                   <a:srgbClr val="6AAB73"/>
                 </a:solidFill>
@@ -28798,7 +29205,7 @@
               <a:t>aucPrice</a:t>
             </a:r>
             <a:r>
-              <a:rPr lang="en-US" altLang="zh-CN" sz="1200">
+              <a:rPr lang="en-US" altLang="zh-CN" sz="1200" dirty="0">
                 <a:solidFill>
                   <a:srgbClr val="BCBEC4"/>
                 </a:solidFill>
@@ -28808,17 +29215,17 @@
               <a:t>`</a:t>
             </a:r>
             <a:r>
-              <a:rPr lang="zh-CN" altLang="en-US" sz="1200">
-                <a:solidFill>
-                  <a:srgbClr val="BCBEC4"/>
-                </a:solidFill>
-                <a:ea typeface="+mn-lt"/>
-                <a:cs typeface="+mn-lt"/>
-              </a:rPr>
-              <a:t> </a:t>
-            </a:r>
-            <a:r>
-              <a:rPr lang="en-US" altLang="zh-CN" sz="1200">
+              <a:rPr lang="zh-CN" altLang="en-US" sz="1200" dirty="0">
+                <a:solidFill>
+                  <a:srgbClr val="BCBEC4"/>
+                </a:solidFill>
+                <a:ea typeface="+mn-lt"/>
+                <a:cs typeface="+mn-lt"/>
+              </a:rPr>
+              <a:t> </a:t>
+            </a:r>
+            <a:r>
+              <a:rPr lang="en-US" altLang="zh-CN" sz="1200" dirty="0">
                 <a:solidFill>
                   <a:srgbClr val="CF8E6D"/>
                 </a:solidFill>
@@ -28828,7 +29235,7 @@
               <a:t>float</a:t>
             </a:r>
             <a:r>
-              <a:rPr lang="en-US" altLang="zh-CN" sz="1200">
+              <a:rPr lang="en-US" altLang="zh-CN" sz="1200" dirty="0">
                 <a:solidFill>
                   <a:srgbClr val="BCBEC4"/>
                 </a:solidFill>
@@ -28838,7 +29245,7 @@
               <a:t>(</a:t>
             </a:r>
             <a:r>
-              <a:rPr lang="en-US" altLang="zh-CN" sz="1200" i="1">
+              <a:rPr lang="en-US" altLang="zh-CN" sz="1200" i="1" dirty="0">
                 <a:solidFill>
                   <a:srgbClr val="2AACB8"/>
                 </a:solidFill>
@@ -28848,7 +29255,7 @@
               <a:t>10</a:t>
             </a:r>
             <a:r>
-              <a:rPr lang="en-US" altLang="zh-CN" sz="1200">
+              <a:rPr lang="en-US" altLang="zh-CN" sz="1200" dirty="0">
                 <a:solidFill>
                   <a:srgbClr val="BCBEC4"/>
                 </a:solidFill>
@@ -28858,7 +29265,7 @@
               <a:t>,</a:t>
             </a:r>
             <a:r>
-              <a:rPr lang="en-US" altLang="zh-CN" sz="1200" i="1">
+              <a:rPr lang="en-US" altLang="zh-CN" sz="1200" i="1" dirty="0">
                 <a:solidFill>
                   <a:srgbClr val="2AACB8"/>
                 </a:solidFill>
@@ -28868,7 +29275,7 @@
               <a:t>2</a:t>
             </a:r>
             <a:r>
-              <a:rPr lang="en-US" altLang="zh-CN" sz="1200">
+              <a:rPr lang="en-US" altLang="zh-CN" sz="1200" dirty="0">
                 <a:solidFill>
                   <a:srgbClr val="BCBEC4"/>
                 </a:solidFill>
@@ -28878,17 +29285,17 @@
               <a:t>)</a:t>
             </a:r>
             <a:r>
-              <a:rPr lang="zh-CN" altLang="en-US" sz="1200">
-                <a:solidFill>
-                  <a:srgbClr val="BCBEC4"/>
-                </a:solidFill>
-                <a:ea typeface="+mn-lt"/>
-                <a:cs typeface="+mn-lt"/>
-              </a:rPr>
-              <a:t> </a:t>
-            </a:r>
-            <a:r>
-              <a:rPr lang="en-US" altLang="zh-CN" sz="1200">
+              <a:rPr lang="zh-CN" altLang="en-US" sz="1200" dirty="0">
+                <a:solidFill>
+                  <a:srgbClr val="BCBEC4"/>
+                </a:solidFill>
+                <a:ea typeface="+mn-lt"/>
+                <a:cs typeface="+mn-lt"/>
+              </a:rPr>
+              <a:t> </a:t>
+            </a:r>
+            <a:r>
+              <a:rPr lang="en-US" altLang="zh-CN" sz="1200" dirty="0">
                 <a:solidFill>
                   <a:srgbClr val="CF8E6D"/>
                 </a:solidFill>
@@ -28898,7 +29305,7 @@
               <a:t>NOT</a:t>
             </a:r>
             <a:r>
-              <a:rPr lang="zh-CN" altLang="en-US" sz="1200">
+              <a:rPr lang="zh-CN" altLang="en-US" sz="1200" dirty="0">
                 <a:solidFill>
                   <a:srgbClr val="CF8E6D"/>
                 </a:solidFill>
@@ -28908,7 +29315,7 @@
               <a:t> </a:t>
             </a:r>
             <a:r>
-              <a:rPr lang="en-US" altLang="zh-CN" sz="1200">
+              <a:rPr lang="en-US" altLang="zh-CN" sz="1200" dirty="0">
                 <a:solidFill>
                   <a:srgbClr val="CF8E6D"/>
                 </a:solidFill>
@@ -28918,7 +29325,7 @@
               <a:t>NULL</a:t>
             </a:r>
             <a:r>
-              <a:rPr lang="en-US" altLang="zh-CN" sz="1200">
+              <a:rPr lang="en-US" altLang="zh-CN" sz="1200" dirty="0">
                 <a:solidFill>
                   <a:srgbClr val="BCBEC4"/>
                 </a:solidFill>
@@ -28928,23 +29335,23 @@
               <a:t>,</a:t>
             </a:r>
             <a:br>
-              <a:rPr lang="zh-CN" altLang="en-US" sz="1200">
+              <a:rPr lang="zh-CN" altLang="en-US" sz="1200" dirty="0">
                 <a:ea typeface="+mn-lt"/>
                 <a:cs typeface="+mn-lt"/>
               </a:rPr>
             </a:br>
             <a:r>
-              <a:rPr lang="zh-CN" altLang="en-US" sz="1200">
-                <a:solidFill>
-                  <a:srgbClr val="BCBEC4"/>
-                </a:solidFill>
-                <a:ea typeface="+mn-lt"/>
-                <a:cs typeface="+mn-lt"/>
-              </a:rPr>
-              <a:t> </a:t>
-            </a:r>
-            <a:r>
-              <a:rPr lang="en-US" altLang="zh-CN" sz="1200">
+              <a:rPr lang="zh-CN" altLang="en-US" sz="1200" dirty="0">
+                <a:solidFill>
+                  <a:srgbClr val="BCBEC4"/>
+                </a:solidFill>
+                <a:ea typeface="+mn-lt"/>
+                <a:cs typeface="+mn-lt"/>
+              </a:rPr>
+              <a:t> </a:t>
+            </a:r>
+            <a:r>
+              <a:rPr lang="en-US" altLang="zh-CN" sz="1200" dirty="0">
                 <a:solidFill>
                   <a:srgbClr val="BCBEC4"/>
                 </a:solidFill>
@@ -28954,7 +29361,7 @@
               <a:t>`</a:t>
             </a:r>
             <a:r>
-              <a:rPr lang="en-US" altLang="zh-CN" sz="1200" err="1">
+              <a:rPr lang="en-US" altLang="zh-CN" sz="1200" dirty="0" err="1">
                 <a:solidFill>
                   <a:srgbClr val="6AAB73"/>
                 </a:solidFill>
@@ -28964,7 +29371,7 @@
               <a:t>minUP</a:t>
             </a:r>
             <a:r>
-              <a:rPr lang="en-US" altLang="zh-CN" sz="1200">
+              <a:rPr lang="en-US" altLang="zh-CN" sz="1200" dirty="0">
                 <a:solidFill>
                   <a:srgbClr val="BCBEC4"/>
                 </a:solidFill>
@@ -28974,17 +29381,17 @@
               <a:t>`</a:t>
             </a:r>
             <a:r>
-              <a:rPr lang="zh-CN" altLang="en-US" sz="1200">
-                <a:solidFill>
-                  <a:srgbClr val="BCBEC4"/>
-                </a:solidFill>
-                <a:ea typeface="+mn-lt"/>
-                <a:cs typeface="+mn-lt"/>
-              </a:rPr>
-              <a:t> </a:t>
-            </a:r>
-            <a:r>
-              <a:rPr lang="en-US" altLang="zh-CN" sz="1200">
+              <a:rPr lang="zh-CN" altLang="en-US" sz="1200" dirty="0">
+                <a:solidFill>
+                  <a:srgbClr val="BCBEC4"/>
+                </a:solidFill>
+                <a:ea typeface="+mn-lt"/>
+                <a:cs typeface="+mn-lt"/>
+              </a:rPr>
+              <a:t> </a:t>
+            </a:r>
+            <a:r>
+              <a:rPr lang="en-US" altLang="zh-CN" sz="1200" dirty="0">
                 <a:solidFill>
                   <a:srgbClr val="CF8E6D"/>
                 </a:solidFill>
@@ -28994,7 +29401,7 @@
               <a:t>float</a:t>
             </a:r>
             <a:r>
-              <a:rPr lang="en-US" altLang="zh-CN" sz="1200">
+              <a:rPr lang="en-US" altLang="zh-CN" sz="1200" dirty="0">
                 <a:solidFill>
                   <a:srgbClr val="BCBEC4"/>
                 </a:solidFill>
@@ -29004,7 +29411,7 @@
               <a:t>(</a:t>
             </a:r>
             <a:r>
-              <a:rPr lang="en-US" altLang="zh-CN" sz="1200" i="1">
+              <a:rPr lang="en-US" altLang="zh-CN" sz="1200" i="1" dirty="0">
                 <a:solidFill>
                   <a:srgbClr val="2AACB8"/>
                 </a:solidFill>
@@ -29014,7 +29421,7 @@
               <a:t>10</a:t>
             </a:r>
             <a:r>
-              <a:rPr lang="en-US" altLang="zh-CN" sz="1200">
+              <a:rPr lang="en-US" altLang="zh-CN" sz="1200" dirty="0">
                 <a:solidFill>
                   <a:srgbClr val="BCBEC4"/>
                 </a:solidFill>
@@ -29024,7 +29431,7 @@
               <a:t>,</a:t>
             </a:r>
             <a:r>
-              <a:rPr lang="en-US" altLang="zh-CN" sz="1200" i="1">
+              <a:rPr lang="en-US" altLang="zh-CN" sz="1200" i="1" dirty="0">
                 <a:solidFill>
                   <a:srgbClr val="2AACB8"/>
                 </a:solidFill>
@@ -29034,7 +29441,7 @@
               <a:t>2</a:t>
             </a:r>
             <a:r>
-              <a:rPr lang="en-US" altLang="zh-CN" sz="1200">
+              <a:rPr lang="en-US" altLang="zh-CN" sz="1200" dirty="0">
                 <a:solidFill>
                   <a:srgbClr val="BCBEC4"/>
                 </a:solidFill>
@@ -29044,17 +29451,17 @@
               <a:t>)</a:t>
             </a:r>
             <a:r>
-              <a:rPr lang="zh-CN" altLang="en-US" sz="1200">
-                <a:solidFill>
-                  <a:srgbClr val="BCBEC4"/>
-                </a:solidFill>
-                <a:ea typeface="+mn-lt"/>
-                <a:cs typeface="+mn-lt"/>
-              </a:rPr>
-              <a:t> </a:t>
-            </a:r>
-            <a:r>
-              <a:rPr lang="en-US" altLang="zh-CN" sz="1200">
+              <a:rPr lang="zh-CN" altLang="en-US" sz="1200" dirty="0">
+                <a:solidFill>
+                  <a:srgbClr val="BCBEC4"/>
+                </a:solidFill>
+                <a:ea typeface="+mn-lt"/>
+                <a:cs typeface="+mn-lt"/>
+              </a:rPr>
+              <a:t> </a:t>
+            </a:r>
+            <a:r>
+              <a:rPr lang="en-US" altLang="zh-CN" sz="1200" dirty="0">
                 <a:solidFill>
                   <a:srgbClr val="CF8E6D"/>
                 </a:solidFill>
@@ -29064,7 +29471,7 @@
               <a:t>NOT</a:t>
             </a:r>
             <a:r>
-              <a:rPr lang="zh-CN" altLang="en-US" sz="1200">
+              <a:rPr lang="zh-CN" altLang="en-US" sz="1200" dirty="0">
                 <a:solidFill>
                   <a:srgbClr val="CF8E6D"/>
                 </a:solidFill>
@@ -29074,7 +29481,7 @@
               <a:t> </a:t>
             </a:r>
             <a:r>
-              <a:rPr lang="en-US" altLang="zh-CN" sz="1200">
+              <a:rPr lang="en-US" altLang="zh-CN" sz="1200" dirty="0">
                 <a:solidFill>
                   <a:srgbClr val="CF8E6D"/>
                 </a:solidFill>
@@ -29084,7 +29491,7 @@
               <a:t>NULL</a:t>
             </a:r>
             <a:r>
-              <a:rPr lang="en-US" altLang="zh-CN" sz="1200">
+              <a:rPr lang="en-US" altLang="zh-CN" sz="1200" dirty="0">
                 <a:solidFill>
                   <a:srgbClr val="BCBEC4"/>
                 </a:solidFill>
@@ -29094,23 +29501,23 @@
               <a:t>,</a:t>
             </a:r>
             <a:br>
-              <a:rPr lang="zh-CN" altLang="en-US" sz="1200">
+              <a:rPr lang="zh-CN" altLang="en-US" sz="1200" dirty="0">
                 <a:ea typeface="+mn-lt"/>
                 <a:cs typeface="+mn-lt"/>
               </a:rPr>
             </a:br>
             <a:r>
-              <a:rPr lang="zh-CN" altLang="en-US" sz="1200">
-                <a:solidFill>
-                  <a:srgbClr val="BCBEC4"/>
-                </a:solidFill>
-                <a:ea typeface="+mn-lt"/>
-                <a:cs typeface="+mn-lt"/>
-              </a:rPr>
-              <a:t> </a:t>
-            </a:r>
-            <a:r>
-              <a:rPr lang="en-US" altLang="zh-CN" sz="1200">
+              <a:rPr lang="zh-CN" altLang="en-US" sz="1200" dirty="0">
+                <a:solidFill>
+                  <a:srgbClr val="BCBEC4"/>
+                </a:solidFill>
+                <a:ea typeface="+mn-lt"/>
+                <a:cs typeface="+mn-lt"/>
+              </a:rPr>
+              <a:t> </a:t>
+            </a:r>
+            <a:r>
+              <a:rPr lang="en-US" altLang="zh-CN" sz="1200" dirty="0">
                 <a:solidFill>
                   <a:srgbClr val="BCBEC4"/>
                 </a:solidFill>
@@ -29120,7 +29527,7 @@
               <a:t>`</a:t>
             </a:r>
             <a:r>
-              <a:rPr lang="en-US" altLang="zh-CN" sz="1200" err="1">
+              <a:rPr lang="en-US" altLang="zh-CN" sz="1200" dirty="0" err="1">
                 <a:solidFill>
                   <a:srgbClr val="6AAB73"/>
                 </a:solidFill>
@@ -29130,7 +29537,7 @@
               <a:t>expiryDateTime</a:t>
             </a:r>
             <a:r>
-              <a:rPr lang="en-US" altLang="zh-CN" sz="1200">
+              <a:rPr lang="en-US" altLang="zh-CN" sz="1200" dirty="0">
                 <a:solidFill>
                   <a:srgbClr val="BCBEC4"/>
                 </a:solidFill>
@@ -29140,17 +29547,17 @@
               <a:t>`</a:t>
             </a:r>
             <a:r>
-              <a:rPr lang="zh-CN" altLang="en-US" sz="1200">
-                <a:solidFill>
-                  <a:srgbClr val="BCBEC4"/>
-                </a:solidFill>
-                <a:ea typeface="+mn-lt"/>
-                <a:cs typeface="+mn-lt"/>
-              </a:rPr>
-              <a:t> </a:t>
-            </a:r>
-            <a:r>
-              <a:rPr lang="en-US" altLang="zh-CN" sz="1200">
+              <a:rPr lang="zh-CN" altLang="en-US" sz="1200" dirty="0">
+                <a:solidFill>
+                  <a:srgbClr val="BCBEC4"/>
+                </a:solidFill>
+                <a:ea typeface="+mn-lt"/>
+                <a:cs typeface="+mn-lt"/>
+              </a:rPr>
+              <a:t> </a:t>
+            </a:r>
+            <a:r>
+              <a:rPr lang="en-US" altLang="zh-CN" sz="1200" dirty="0">
                 <a:solidFill>
                   <a:srgbClr val="CF8E6D"/>
                 </a:solidFill>
@@ -29160,7 +29567,7 @@
               <a:t>datetime</a:t>
             </a:r>
             <a:r>
-              <a:rPr lang="zh-CN" altLang="en-US" sz="1200">
+              <a:rPr lang="zh-CN" altLang="en-US" sz="1200" dirty="0">
                 <a:solidFill>
                   <a:srgbClr val="CF8E6D"/>
                 </a:solidFill>
@@ -29170,7 +29577,7 @@
               <a:t> </a:t>
             </a:r>
             <a:r>
-              <a:rPr lang="en-US" altLang="zh-CN" sz="1200">
+              <a:rPr lang="en-US" altLang="zh-CN" sz="1200" dirty="0">
                 <a:solidFill>
                   <a:srgbClr val="CF8E6D"/>
                 </a:solidFill>
@@ -29180,7 +29587,7 @@
               <a:t>NOT</a:t>
             </a:r>
             <a:r>
-              <a:rPr lang="zh-CN" altLang="en-US" sz="1200">
+              <a:rPr lang="zh-CN" altLang="en-US" sz="1200" dirty="0">
                 <a:solidFill>
                   <a:srgbClr val="CF8E6D"/>
                 </a:solidFill>
@@ -29190,7 +29597,7 @@
               <a:t> </a:t>
             </a:r>
             <a:r>
-              <a:rPr lang="en-US" altLang="zh-CN" sz="1200">
+              <a:rPr lang="en-US" altLang="zh-CN" sz="1200" dirty="0">
                 <a:solidFill>
                   <a:srgbClr val="CF8E6D"/>
                 </a:solidFill>
@@ -29200,7 +29607,7 @@
               <a:t>NULL</a:t>
             </a:r>
             <a:r>
-              <a:rPr lang="en-US" altLang="zh-CN" sz="1200">
+              <a:rPr lang="en-US" altLang="zh-CN" sz="1200" dirty="0">
                 <a:solidFill>
                   <a:srgbClr val="BCBEC4"/>
                 </a:solidFill>
@@ -29210,23 +29617,23 @@
               <a:t>,</a:t>
             </a:r>
             <a:br>
-              <a:rPr lang="zh-CN" altLang="en-US" sz="1200">
+              <a:rPr lang="zh-CN" altLang="en-US" sz="1200" dirty="0">
                 <a:ea typeface="+mn-lt"/>
                 <a:cs typeface="+mn-lt"/>
               </a:rPr>
             </a:br>
             <a:r>
-              <a:rPr lang="zh-CN" altLang="en-US" sz="1200">
-                <a:solidFill>
-                  <a:srgbClr val="BCBEC4"/>
-                </a:solidFill>
-                <a:ea typeface="+mn-lt"/>
-                <a:cs typeface="+mn-lt"/>
-              </a:rPr>
-              <a:t> </a:t>
-            </a:r>
-            <a:r>
-              <a:rPr lang="en-US" altLang="zh-CN" sz="1200">
+              <a:rPr lang="zh-CN" altLang="en-US" sz="1200" dirty="0">
+                <a:solidFill>
+                  <a:srgbClr val="BCBEC4"/>
+                </a:solidFill>
+                <a:ea typeface="+mn-lt"/>
+                <a:cs typeface="+mn-lt"/>
+              </a:rPr>
+              <a:t> </a:t>
+            </a:r>
+            <a:r>
+              <a:rPr lang="en-US" altLang="zh-CN" sz="1200" dirty="0">
                 <a:solidFill>
                   <a:srgbClr val="BCBEC4"/>
                 </a:solidFill>
@@ -29236,7 +29643,7 @@
               <a:t>`</a:t>
             </a:r>
             <a:r>
-              <a:rPr lang="en-US" altLang="zh-CN" sz="1200" err="1">
+              <a:rPr lang="en-US" altLang="zh-CN" sz="1200" dirty="0" err="1">
                 <a:solidFill>
                   <a:srgbClr val="6AAB73"/>
                 </a:solidFill>
@@ -29246,7 +29653,7 @@
               <a:t>isClosed</a:t>
             </a:r>
             <a:r>
-              <a:rPr lang="en-US" altLang="zh-CN" sz="1200">
+              <a:rPr lang="en-US" altLang="zh-CN" sz="1200" dirty="0">
                 <a:solidFill>
                   <a:srgbClr val="BCBEC4"/>
                 </a:solidFill>
@@ -29256,17 +29663,17 @@
               <a:t>`</a:t>
             </a:r>
             <a:r>
-              <a:rPr lang="zh-CN" altLang="en-US" sz="1200">
-                <a:solidFill>
-                  <a:srgbClr val="BCBEC4"/>
-                </a:solidFill>
-                <a:ea typeface="+mn-lt"/>
-                <a:cs typeface="+mn-lt"/>
-              </a:rPr>
-              <a:t> </a:t>
-            </a:r>
-            <a:r>
-              <a:rPr lang="en-US" altLang="zh-CN" sz="1200" err="1">
+              <a:rPr lang="zh-CN" altLang="en-US" sz="1200" dirty="0">
+                <a:solidFill>
+                  <a:srgbClr val="BCBEC4"/>
+                </a:solidFill>
+                <a:ea typeface="+mn-lt"/>
+                <a:cs typeface="+mn-lt"/>
+              </a:rPr>
+              <a:t> </a:t>
+            </a:r>
+            <a:r>
+              <a:rPr lang="en-US" altLang="zh-CN" sz="1200" dirty="0" err="1">
                 <a:solidFill>
                   <a:srgbClr val="CF8E6D"/>
                 </a:solidFill>
@@ -29276,7 +29683,7 @@
               <a:t>tinyint</a:t>
             </a:r>
             <a:r>
-              <a:rPr lang="en-US" altLang="zh-CN" sz="1200">
+              <a:rPr lang="en-US" altLang="zh-CN" sz="1200" dirty="0">
                 <a:solidFill>
                   <a:srgbClr val="BCBEC4"/>
                 </a:solidFill>
@@ -29286,7 +29693,7 @@
               <a:t>(</a:t>
             </a:r>
             <a:r>
-              <a:rPr lang="en-US" altLang="zh-CN" sz="1200" i="1">
+              <a:rPr lang="en-US" altLang="zh-CN" sz="1200" i="1" dirty="0">
                 <a:solidFill>
                   <a:srgbClr val="2AACB8"/>
                 </a:solidFill>
@@ -29296,7 +29703,7 @@
               <a:t>1</a:t>
             </a:r>
             <a:r>
-              <a:rPr lang="en-US" altLang="zh-CN" sz="1200">
+              <a:rPr lang="en-US" altLang="zh-CN" sz="1200" dirty="0">
                 <a:solidFill>
                   <a:srgbClr val="BCBEC4"/>
                 </a:solidFill>
@@ -29306,17 +29713,17 @@
               <a:t>)</a:t>
             </a:r>
             <a:r>
-              <a:rPr lang="zh-CN" altLang="en-US" sz="1200">
-                <a:solidFill>
-                  <a:srgbClr val="BCBEC4"/>
-                </a:solidFill>
-                <a:ea typeface="+mn-lt"/>
-                <a:cs typeface="+mn-lt"/>
-              </a:rPr>
-              <a:t> </a:t>
-            </a:r>
-            <a:r>
-              <a:rPr lang="en-US" altLang="zh-CN" sz="1200">
+              <a:rPr lang="zh-CN" altLang="en-US" sz="1200" dirty="0">
+                <a:solidFill>
+                  <a:srgbClr val="BCBEC4"/>
+                </a:solidFill>
+                <a:ea typeface="+mn-lt"/>
+                <a:cs typeface="+mn-lt"/>
+              </a:rPr>
+              <a:t> </a:t>
+            </a:r>
+            <a:r>
+              <a:rPr lang="en-US" altLang="zh-CN" sz="1200" dirty="0">
                 <a:solidFill>
                   <a:srgbClr val="CF8E6D"/>
                 </a:solidFill>
@@ -29326,7 +29733,7 @@
               <a:t>NOT</a:t>
             </a:r>
             <a:r>
-              <a:rPr lang="zh-CN" altLang="en-US" sz="1200">
+              <a:rPr lang="zh-CN" altLang="en-US" sz="1200" dirty="0">
                 <a:solidFill>
                   <a:srgbClr val="CF8E6D"/>
                 </a:solidFill>
@@ -29336,7 +29743,7 @@
               <a:t> </a:t>
             </a:r>
             <a:r>
-              <a:rPr lang="en-US" altLang="zh-CN" sz="1200">
+              <a:rPr lang="en-US" altLang="zh-CN" sz="1200" dirty="0">
                 <a:solidFill>
                   <a:srgbClr val="CF8E6D"/>
                 </a:solidFill>
@@ -29346,7 +29753,7 @@
               <a:t>NULL</a:t>
             </a:r>
             <a:r>
-              <a:rPr lang="en-US" altLang="zh-CN" sz="1200">
+              <a:rPr lang="en-US" altLang="zh-CN" sz="1200" dirty="0">
                 <a:solidFill>
                   <a:srgbClr val="BCBEC4"/>
                 </a:solidFill>
@@ -29356,23 +29763,23 @@
               <a:t>,</a:t>
             </a:r>
             <a:br>
-              <a:rPr lang="zh-CN" altLang="en-US" sz="1200">
+              <a:rPr lang="zh-CN" altLang="en-US" sz="1200" dirty="0">
                 <a:ea typeface="+mn-lt"/>
                 <a:cs typeface="+mn-lt"/>
               </a:rPr>
             </a:br>
             <a:r>
-              <a:rPr lang="zh-CN" altLang="en-US" sz="1200">
-                <a:solidFill>
-                  <a:srgbClr val="BCBEC4"/>
-                </a:solidFill>
-                <a:ea typeface="+mn-lt"/>
-                <a:cs typeface="+mn-lt"/>
-              </a:rPr>
-              <a:t> </a:t>
-            </a:r>
-            <a:r>
-              <a:rPr lang="en-US" altLang="zh-CN" sz="1200">
+              <a:rPr lang="zh-CN" altLang="en-US" sz="1200" dirty="0">
+                <a:solidFill>
+                  <a:srgbClr val="BCBEC4"/>
+                </a:solidFill>
+                <a:ea typeface="+mn-lt"/>
+                <a:cs typeface="+mn-lt"/>
+              </a:rPr>
+              <a:t> </a:t>
+            </a:r>
+            <a:r>
+              <a:rPr lang="en-US" altLang="zh-CN" sz="1200" dirty="0">
                 <a:solidFill>
                   <a:srgbClr val="CF8E6D"/>
                 </a:solidFill>
@@ -29382,7 +29789,7 @@
               <a:t>PRIMARY</a:t>
             </a:r>
             <a:r>
-              <a:rPr lang="zh-CN" altLang="en-US" sz="1200">
+              <a:rPr lang="zh-CN" altLang="en-US" sz="1200" dirty="0">
                 <a:solidFill>
                   <a:srgbClr val="CF8E6D"/>
                 </a:solidFill>
@@ -29392,7 +29799,7 @@
               <a:t> </a:t>
             </a:r>
             <a:r>
-              <a:rPr lang="en-US" altLang="zh-CN" sz="1200">
+              <a:rPr lang="en-US" altLang="zh-CN" sz="1200" dirty="0">
                 <a:solidFill>
                   <a:srgbClr val="CF8E6D"/>
                 </a:solidFill>
@@ -29402,17 +29809,17 @@
               <a:t>KEY</a:t>
             </a:r>
             <a:r>
-              <a:rPr lang="zh-CN" altLang="en-US" sz="1200">
-                <a:solidFill>
-                  <a:srgbClr val="BCBEC4"/>
-                </a:solidFill>
-                <a:ea typeface="+mn-lt"/>
-                <a:cs typeface="+mn-lt"/>
-              </a:rPr>
-              <a:t> </a:t>
-            </a:r>
-            <a:r>
-              <a:rPr lang="en-US" altLang="zh-CN" sz="1200">
+              <a:rPr lang="zh-CN" altLang="en-US" sz="1200" dirty="0">
+                <a:solidFill>
+                  <a:srgbClr val="BCBEC4"/>
+                </a:solidFill>
+                <a:ea typeface="+mn-lt"/>
+                <a:cs typeface="+mn-lt"/>
+              </a:rPr>
+              <a:t> </a:t>
+            </a:r>
+            <a:r>
+              <a:rPr lang="en-US" altLang="zh-CN" sz="1200" dirty="0">
                 <a:solidFill>
                   <a:srgbClr val="BCBEC4"/>
                 </a:solidFill>
@@ -29422,7 +29829,7 @@
               <a:t>(`</a:t>
             </a:r>
             <a:r>
-              <a:rPr lang="en-US" altLang="zh-CN" sz="1200" err="1">
+              <a:rPr lang="en-US" altLang="zh-CN" sz="1200" dirty="0" err="1">
                 <a:solidFill>
                   <a:srgbClr val="6AAB73"/>
                 </a:solidFill>
@@ -29432,7 +29839,7 @@
               <a:t>aucID</a:t>
             </a:r>
             <a:r>
-              <a:rPr lang="en-US" altLang="zh-CN" sz="1200">
+              <a:rPr lang="en-US" altLang="zh-CN" sz="1200" dirty="0">
                 <a:solidFill>
                   <a:srgbClr val="BCBEC4"/>
                 </a:solidFill>
@@ -29442,23 +29849,23 @@
               <a:t>`),</a:t>
             </a:r>
             <a:br>
-              <a:rPr lang="zh-CN" altLang="en-US" sz="1200">
+              <a:rPr lang="zh-CN" altLang="en-US" sz="1200" dirty="0">
                 <a:ea typeface="+mn-lt"/>
                 <a:cs typeface="+mn-lt"/>
               </a:rPr>
             </a:br>
             <a:r>
-              <a:rPr lang="zh-CN" altLang="en-US" sz="1200">
-                <a:solidFill>
-                  <a:srgbClr val="BCBEC4"/>
-                </a:solidFill>
-                <a:ea typeface="+mn-lt"/>
-                <a:cs typeface="+mn-lt"/>
-              </a:rPr>
-              <a:t> </a:t>
-            </a:r>
-            <a:r>
-              <a:rPr lang="en-US" altLang="zh-CN" sz="1200">
+              <a:rPr lang="zh-CN" altLang="en-US" sz="1200" dirty="0">
+                <a:solidFill>
+                  <a:srgbClr val="BCBEC4"/>
+                </a:solidFill>
+                <a:ea typeface="+mn-lt"/>
+                <a:cs typeface="+mn-lt"/>
+              </a:rPr>
+              <a:t> </a:t>
+            </a:r>
+            <a:r>
+              <a:rPr lang="en-US" altLang="zh-CN" sz="1200" dirty="0">
                 <a:solidFill>
                   <a:srgbClr val="CF8E6D"/>
                 </a:solidFill>
@@ -29468,7 +29875,7 @@
               <a:t>KEY</a:t>
             </a:r>
             <a:r>
-              <a:rPr lang="zh-CN" altLang="en-US" sz="1200">
+              <a:rPr lang="zh-CN" altLang="en-US" sz="1200" dirty="0">
                 <a:solidFill>
                   <a:srgbClr val="CF8E6D"/>
                 </a:solidFill>
@@ -29478,7 +29885,7 @@
               <a:t> </a:t>
             </a:r>
             <a:r>
-              <a:rPr lang="en-US" altLang="zh-CN" sz="1200">
+              <a:rPr lang="en-US" altLang="zh-CN" sz="1200" dirty="0">
                 <a:solidFill>
                   <a:srgbClr val="BCBEC4"/>
                 </a:solidFill>
@@ -29488,7 +29895,7 @@
               <a:t>`</a:t>
             </a:r>
             <a:r>
-              <a:rPr lang="en-US" altLang="zh-CN" sz="1200" err="1">
+              <a:rPr lang="en-US" altLang="zh-CN" sz="1200" dirty="0" err="1">
                 <a:solidFill>
                   <a:srgbClr val="6AAB73"/>
                 </a:solidFill>
@@ -29498,7 +29905,7 @@
               <a:t>ownerID</a:t>
             </a:r>
             <a:r>
-              <a:rPr lang="en-US" altLang="zh-CN" sz="1200">
+              <a:rPr lang="en-US" altLang="zh-CN" sz="1200" dirty="0">
                 <a:solidFill>
                   <a:srgbClr val="BCBEC4"/>
                 </a:solidFill>
@@ -29508,17 +29915,17 @@
               <a:t>`</a:t>
             </a:r>
             <a:r>
-              <a:rPr lang="zh-CN" altLang="en-US" sz="1200">
-                <a:solidFill>
-                  <a:srgbClr val="BCBEC4"/>
-                </a:solidFill>
-                <a:ea typeface="+mn-lt"/>
-                <a:cs typeface="+mn-lt"/>
-              </a:rPr>
-              <a:t> </a:t>
-            </a:r>
-            <a:r>
-              <a:rPr lang="en-US" altLang="zh-CN" sz="1200">
+              <a:rPr lang="zh-CN" altLang="en-US" sz="1200" dirty="0">
+                <a:solidFill>
+                  <a:srgbClr val="BCBEC4"/>
+                </a:solidFill>
+                <a:ea typeface="+mn-lt"/>
+                <a:cs typeface="+mn-lt"/>
+              </a:rPr>
+              <a:t> </a:t>
+            </a:r>
+            <a:r>
+              <a:rPr lang="en-US" altLang="zh-CN" sz="1200" dirty="0">
                 <a:solidFill>
                   <a:srgbClr val="BCBEC4"/>
                 </a:solidFill>
@@ -29528,7 +29935,7 @@
               <a:t>(`</a:t>
             </a:r>
             <a:r>
-              <a:rPr lang="en-US" altLang="zh-CN" sz="1200" err="1">
+              <a:rPr lang="en-US" altLang="zh-CN" sz="1200" dirty="0" err="1">
                 <a:solidFill>
                   <a:srgbClr val="6AAB73"/>
                 </a:solidFill>
@@ -29538,7 +29945,7 @@
               <a:t>ownerID</a:t>
             </a:r>
             <a:r>
-              <a:rPr lang="en-US" altLang="zh-CN" sz="1200">
+              <a:rPr lang="en-US" altLang="zh-CN" sz="1200" dirty="0">
                 <a:solidFill>
                   <a:srgbClr val="BCBEC4"/>
                 </a:solidFill>
@@ -29548,23 +29955,23 @@
               <a:t>`),</a:t>
             </a:r>
             <a:br>
-              <a:rPr lang="zh-CN" altLang="en-US" sz="1200">
+              <a:rPr lang="zh-CN" altLang="en-US" sz="1200" dirty="0">
                 <a:ea typeface="+mn-lt"/>
                 <a:cs typeface="+mn-lt"/>
               </a:rPr>
             </a:br>
             <a:r>
-              <a:rPr lang="zh-CN" altLang="en-US" sz="1200">
-                <a:solidFill>
-                  <a:srgbClr val="BCBEC4"/>
-                </a:solidFill>
-                <a:ea typeface="+mn-lt"/>
-                <a:cs typeface="+mn-lt"/>
-              </a:rPr>
-              <a:t> </a:t>
-            </a:r>
-            <a:r>
-              <a:rPr lang="en-US" altLang="zh-CN" sz="1200">
+              <a:rPr lang="zh-CN" altLang="en-US" sz="1200" dirty="0">
+                <a:solidFill>
+                  <a:srgbClr val="BCBEC4"/>
+                </a:solidFill>
+                <a:ea typeface="+mn-lt"/>
+                <a:cs typeface="+mn-lt"/>
+              </a:rPr>
+              <a:t> </a:t>
+            </a:r>
+            <a:r>
+              <a:rPr lang="en-US" altLang="zh-CN" sz="1200" dirty="0">
                 <a:solidFill>
                   <a:srgbClr val="CF8E6D"/>
                 </a:solidFill>
@@ -29574,7 +29981,7 @@
               <a:t>CONSTRAINT</a:t>
             </a:r>
             <a:r>
-              <a:rPr lang="zh-CN" altLang="en-US" sz="1200">
+              <a:rPr lang="zh-CN" altLang="en-US" sz="1200" dirty="0">
                 <a:solidFill>
                   <a:srgbClr val="CF8E6D"/>
                 </a:solidFill>
@@ -29584,7 +29991,7 @@
               <a:t> </a:t>
             </a:r>
             <a:r>
-              <a:rPr lang="en-US" altLang="zh-CN" sz="1200">
+              <a:rPr lang="en-US" altLang="zh-CN" sz="1200" dirty="0">
                 <a:solidFill>
                   <a:srgbClr val="BCBEC4"/>
                 </a:solidFill>
@@ -29594,7 +30001,7 @@
               <a:t>`</a:t>
             </a:r>
             <a:r>
-              <a:rPr lang="en-US" altLang="zh-CN" sz="1200">
+              <a:rPr lang="en-US" altLang="zh-CN" sz="1200" dirty="0">
                 <a:solidFill>
                   <a:srgbClr val="6AAB73"/>
                 </a:solidFill>
@@ -29604,7 +30011,7 @@
               <a:t>auction_ibfk_1</a:t>
             </a:r>
             <a:r>
-              <a:rPr lang="en-US" altLang="zh-CN" sz="1200">
+              <a:rPr lang="en-US" altLang="zh-CN" sz="1200" dirty="0">
                 <a:solidFill>
                   <a:srgbClr val="BCBEC4"/>
                 </a:solidFill>
@@ -29614,17 +30021,17 @@
               <a:t>`</a:t>
             </a:r>
             <a:r>
-              <a:rPr lang="zh-CN" altLang="en-US" sz="1200">
-                <a:solidFill>
-                  <a:srgbClr val="BCBEC4"/>
-                </a:solidFill>
-                <a:ea typeface="+mn-lt"/>
-                <a:cs typeface="+mn-lt"/>
-              </a:rPr>
-              <a:t> </a:t>
-            </a:r>
-            <a:r>
-              <a:rPr lang="en-US" altLang="zh-CN" sz="1200">
+              <a:rPr lang="zh-CN" altLang="en-US" sz="1200" dirty="0">
+                <a:solidFill>
+                  <a:srgbClr val="BCBEC4"/>
+                </a:solidFill>
+                <a:ea typeface="+mn-lt"/>
+                <a:cs typeface="+mn-lt"/>
+              </a:rPr>
+              <a:t> </a:t>
+            </a:r>
+            <a:r>
+              <a:rPr lang="en-US" altLang="zh-CN" sz="1200" dirty="0">
                 <a:solidFill>
                   <a:srgbClr val="CF8E6D"/>
                 </a:solidFill>
@@ -29634,7 +30041,7 @@
               <a:t>FOREIGN</a:t>
             </a:r>
             <a:r>
-              <a:rPr lang="zh-CN" altLang="en-US" sz="1200">
+              <a:rPr lang="zh-CN" altLang="en-US" sz="1200" dirty="0">
                 <a:solidFill>
                   <a:srgbClr val="CF8E6D"/>
                 </a:solidFill>
@@ -29644,7 +30051,7 @@
               <a:t> </a:t>
             </a:r>
             <a:r>
-              <a:rPr lang="en-US" altLang="zh-CN" sz="1200">
+              <a:rPr lang="en-US" altLang="zh-CN" sz="1200" dirty="0">
                 <a:solidFill>
                   <a:srgbClr val="CF8E6D"/>
                 </a:solidFill>
@@ -29654,17 +30061,17 @@
               <a:t>KEY</a:t>
             </a:r>
             <a:r>
-              <a:rPr lang="zh-CN" altLang="en-US" sz="1200">
-                <a:solidFill>
-                  <a:srgbClr val="BCBEC4"/>
-                </a:solidFill>
-                <a:ea typeface="+mn-lt"/>
-                <a:cs typeface="+mn-lt"/>
-              </a:rPr>
-              <a:t> </a:t>
-            </a:r>
-            <a:r>
-              <a:rPr lang="en-US" altLang="zh-CN" sz="1200">
+              <a:rPr lang="zh-CN" altLang="en-US" sz="1200" dirty="0">
+                <a:solidFill>
+                  <a:srgbClr val="BCBEC4"/>
+                </a:solidFill>
+                <a:ea typeface="+mn-lt"/>
+                <a:cs typeface="+mn-lt"/>
+              </a:rPr>
+              <a:t> </a:t>
+            </a:r>
+            <a:r>
+              <a:rPr lang="en-US" altLang="zh-CN" sz="1200" dirty="0">
                 <a:solidFill>
                   <a:srgbClr val="BCBEC4"/>
                 </a:solidFill>
@@ -29674,7 +30081,7 @@
               <a:t>(`</a:t>
             </a:r>
             <a:r>
-              <a:rPr lang="en-US" altLang="zh-CN" sz="1200" err="1">
+              <a:rPr lang="en-US" altLang="zh-CN" sz="1200" dirty="0" err="1">
                 <a:solidFill>
                   <a:srgbClr val="6AAB73"/>
                 </a:solidFill>
@@ -29684,7 +30091,7 @@
               <a:t>ownerID</a:t>
             </a:r>
             <a:r>
-              <a:rPr lang="en-US" altLang="zh-CN" sz="1200">
+              <a:rPr lang="en-US" altLang="zh-CN" sz="1200" dirty="0">
                 <a:solidFill>
                   <a:srgbClr val="BCBEC4"/>
                 </a:solidFill>
@@ -29694,17 +30101,17 @@
               <a:t>`)</a:t>
             </a:r>
             <a:r>
-              <a:rPr lang="zh-CN" altLang="en-US" sz="1200">
-                <a:solidFill>
-                  <a:srgbClr val="BCBEC4"/>
-                </a:solidFill>
-                <a:ea typeface="+mn-lt"/>
-                <a:cs typeface="+mn-lt"/>
-              </a:rPr>
-              <a:t> </a:t>
-            </a:r>
-            <a:r>
-              <a:rPr lang="en-US" altLang="zh-CN" sz="1200">
+              <a:rPr lang="zh-CN" altLang="en-US" sz="1200" dirty="0">
+                <a:solidFill>
+                  <a:srgbClr val="BCBEC4"/>
+                </a:solidFill>
+                <a:ea typeface="+mn-lt"/>
+                <a:cs typeface="+mn-lt"/>
+              </a:rPr>
+              <a:t> </a:t>
+            </a:r>
+            <a:r>
+              <a:rPr lang="en-US" altLang="zh-CN" sz="1200" dirty="0">
                 <a:solidFill>
                   <a:srgbClr val="CF8E6D"/>
                 </a:solidFill>
@@ -29714,7 +30121,7 @@
               <a:t>REFERENCES</a:t>
             </a:r>
             <a:r>
-              <a:rPr lang="zh-CN" altLang="en-US" sz="1200">
+              <a:rPr lang="zh-CN" altLang="en-US" sz="1200" dirty="0">
                 <a:solidFill>
                   <a:srgbClr val="CF8E6D"/>
                 </a:solidFill>
@@ -29724,7 +30131,7 @@
               <a:t> </a:t>
             </a:r>
             <a:r>
-              <a:rPr lang="en-US" altLang="zh-CN" sz="1200">
+              <a:rPr lang="en-US" altLang="zh-CN" sz="1200" dirty="0">
                 <a:solidFill>
                   <a:srgbClr val="BCBEC4"/>
                 </a:solidFill>
@@ -29734,7 +30141,7 @@
               <a:t>`</a:t>
             </a:r>
             <a:r>
-              <a:rPr lang="en-US" altLang="zh-CN" sz="1200">
+              <a:rPr lang="en-US" altLang="zh-CN" sz="1200" dirty="0">
                 <a:solidFill>
                   <a:srgbClr val="6AAB73"/>
                 </a:solidFill>
@@ -29744,7 +30151,7 @@
               <a:t>user</a:t>
             </a:r>
             <a:r>
-              <a:rPr lang="en-US" altLang="zh-CN" sz="1200">
+              <a:rPr lang="en-US" altLang="zh-CN" sz="1200" dirty="0">
                 <a:solidFill>
                   <a:srgbClr val="BCBEC4"/>
                 </a:solidFill>
@@ -29754,17 +30161,17 @@
               <a:t>`</a:t>
             </a:r>
             <a:r>
-              <a:rPr lang="zh-CN" altLang="en-US" sz="1200">
-                <a:solidFill>
-                  <a:srgbClr val="BCBEC4"/>
-                </a:solidFill>
-                <a:ea typeface="+mn-lt"/>
-                <a:cs typeface="+mn-lt"/>
-              </a:rPr>
-              <a:t> </a:t>
-            </a:r>
-            <a:r>
-              <a:rPr lang="en-US" altLang="zh-CN" sz="1200">
+              <a:rPr lang="zh-CN" altLang="en-US" sz="1200" dirty="0">
+                <a:solidFill>
+                  <a:srgbClr val="BCBEC4"/>
+                </a:solidFill>
+                <a:ea typeface="+mn-lt"/>
+                <a:cs typeface="+mn-lt"/>
+              </a:rPr>
+              <a:t> </a:t>
+            </a:r>
+            <a:r>
+              <a:rPr lang="en-US" altLang="zh-CN" sz="1200" dirty="0">
                 <a:solidFill>
                   <a:srgbClr val="BCBEC4"/>
                 </a:solidFill>
@@ -29774,7 +30181,7 @@
               <a:t>(`</a:t>
             </a:r>
             <a:r>
-              <a:rPr lang="en-US" altLang="zh-CN" sz="1200" err="1">
+              <a:rPr lang="en-US" altLang="zh-CN" sz="1200" dirty="0" err="1">
                 <a:solidFill>
                   <a:srgbClr val="6AAB73"/>
                 </a:solidFill>
@@ -29784,7 +30191,7 @@
               <a:t>userID</a:t>
             </a:r>
             <a:r>
-              <a:rPr lang="en-US" altLang="zh-CN" sz="1200">
+              <a:rPr lang="en-US" altLang="zh-CN" sz="1200" dirty="0">
                 <a:solidFill>
                   <a:srgbClr val="BCBEC4"/>
                 </a:solidFill>
@@ -29794,17 +30201,17 @@
               <a:t>`)</a:t>
             </a:r>
             <a:r>
-              <a:rPr lang="zh-CN" altLang="en-US" sz="1200">
-                <a:solidFill>
-                  <a:srgbClr val="BCBEC4"/>
-                </a:solidFill>
-                <a:ea typeface="+mn-lt"/>
-                <a:cs typeface="+mn-lt"/>
-              </a:rPr>
-              <a:t> </a:t>
-            </a:r>
-            <a:r>
-              <a:rPr lang="en-US" altLang="zh-CN" sz="1200">
+              <a:rPr lang="zh-CN" altLang="en-US" sz="1200" dirty="0">
+                <a:solidFill>
+                  <a:srgbClr val="BCBEC4"/>
+                </a:solidFill>
+                <a:ea typeface="+mn-lt"/>
+                <a:cs typeface="+mn-lt"/>
+              </a:rPr>
+              <a:t> </a:t>
+            </a:r>
+            <a:r>
+              <a:rPr lang="en-US" altLang="zh-CN" sz="1200" dirty="0">
                 <a:solidFill>
                   <a:srgbClr val="CF8E6D"/>
                 </a:solidFill>
@@ -29814,7 +30221,7 @@
               <a:t>ON</a:t>
             </a:r>
             <a:r>
-              <a:rPr lang="zh-CN" altLang="en-US" sz="1200">
+              <a:rPr lang="zh-CN" altLang="en-US" sz="1200" dirty="0">
                 <a:solidFill>
                   <a:srgbClr val="CF8E6D"/>
                 </a:solidFill>
@@ -29824,7 +30231,7 @@
               <a:t> </a:t>
             </a:r>
             <a:r>
-              <a:rPr lang="en-US" altLang="zh-CN" sz="1200">
+              <a:rPr lang="en-US" altLang="zh-CN" sz="1200" dirty="0">
                 <a:solidFill>
                   <a:srgbClr val="CF8E6D"/>
                 </a:solidFill>
@@ -29834,7 +30241,7 @@
               <a:t>DELETE</a:t>
             </a:r>
             <a:r>
-              <a:rPr lang="zh-CN" altLang="en-US" sz="1200">
+              <a:rPr lang="zh-CN" altLang="en-US" sz="1200" dirty="0">
                 <a:solidFill>
                   <a:srgbClr val="CF8E6D"/>
                 </a:solidFill>
@@ -29844,7 +30251,7 @@
               <a:t> </a:t>
             </a:r>
             <a:r>
-              <a:rPr lang="en-US" altLang="zh-CN" sz="1200">
+              <a:rPr lang="en-US" altLang="zh-CN" sz="1200" dirty="0">
                 <a:solidFill>
                   <a:srgbClr val="CF8E6D"/>
                 </a:solidFill>
@@ -29854,7 +30261,7 @@
               <a:t>CASCADE</a:t>
             </a:r>
             <a:r>
-              <a:rPr lang="zh-CN" altLang="en-US" sz="1200">
+              <a:rPr lang="zh-CN" altLang="en-US" sz="1200" dirty="0">
                 <a:solidFill>
                   <a:srgbClr val="CF8E6D"/>
                 </a:solidFill>
@@ -29864,7 +30271,7 @@
               <a:t> </a:t>
             </a:r>
             <a:r>
-              <a:rPr lang="en-US" altLang="zh-CN" sz="1200">
+              <a:rPr lang="en-US" altLang="zh-CN" sz="1200" dirty="0">
                 <a:solidFill>
                   <a:srgbClr val="CF8E6D"/>
                 </a:solidFill>
@@ -29874,7 +30281,7 @@
               <a:t>ON</a:t>
             </a:r>
             <a:r>
-              <a:rPr lang="zh-CN" altLang="en-US" sz="1200">
+              <a:rPr lang="zh-CN" altLang="en-US" sz="1200" dirty="0">
                 <a:solidFill>
                   <a:srgbClr val="CF8E6D"/>
                 </a:solidFill>
@@ -29884,7 +30291,7 @@
               <a:t> </a:t>
             </a:r>
             <a:r>
-              <a:rPr lang="en-US" altLang="zh-CN" sz="1200">
+              <a:rPr lang="en-US" altLang="zh-CN" sz="1200" dirty="0">
                 <a:solidFill>
                   <a:srgbClr val="CF8E6D"/>
                 </a:solidFill>
@@ -29894,17 +30301,17 @@
               <a:t>UPDATE</a:t>
             </a:r>
             <a:r>
-              <a:rPr lang="zh-CN" altLang="en-US" sz="1200">
-                <a:solidFill>
-                  <a:srgbClr val="BCBEC4"/>
-                </a:solidFill>
-                <a:ea typeface="+mn-lt"/>
-                <a:cs typeface="+mn-lt"/>
-              </a:rPr>
-              <a:t> </a:t>
-            </a:r>
-            <a:r>
-              <a:rPr lang="en-US" altLang="zh-CN" sz="1200">
+              <a:rPr lang="zh-CN" altLang="en-US" sz="1200" dirty="0">
+                <a:solidFill>
+                  <a:srgbClr val="BCBEC4"/>
+                </a:solidFill>
+                <a:ea typeface="+mn-lt"/>
+                <a:cs typeface="+mn-lt"/>
+              </a:rPr>
+              <a:t> </a:t>
+            </a:r>
+            <a:r>
+              <a:rPr lang="en-US" altLang="zh-CN" sz="1200" dirty="0">
                 <a:solidFill>
                   <a:srgbClr val="BCBEC4"/>
                 </a:solidFill>
@@ -29914,13 +30321,13 @@
               <a:t>CASCADE</a:t>
             </a:r>
             <a:br>
-              <a:rPr lang="zh-CN" altLang="en-US" sz="1200">
+              <a:rPr lang="zh-CN" altLang="en-US" sz="1200" dirty="0">
                 <a:ea typeface="+mn-lt"/>
                 <a:cs typeface="+mn-lt"/>
               </a:rPr>
             </a:br>
             <a:r>
-              <a:rPr lang="en-US" altLang="zh-CN" sz="1200">
+              <a:rPr lang="en-US" altLang="zh-CN" sz="1200" dirty="0">
                 <a:solidFill>
                   <a:srgbClr val="BCBEC4"/>
                 </a:solidFill>
@@ -29929,13 +30336,13 @@
               </a:rPr>
               <a:t>)</a:t>
             </a:r>
-            <a:endParaRPr lang="zh-CN" altLang="en-US" sz="1200"/>
+            <a:endParaRPr lang="zh-CN" altLang="en-US" sz="1200" dirty="0"/>
           </a:p>
           <a:p>
             <a:pPr>
               <a:buNone/>
             </a:pPr>
-            <a:endParaRPr lang="zh-CN" sz="1400">
+            <a:endParaRPr lang="zh-CN" sz="1400" dirty="0">
               <a:solidFill>
                 <a:srgbClr val="BCBEC4"/>
               </a:solidFill>
@@ -29948,7 +30355,7 @@
             <a:pPr marL="0" indent="0">
               <a:buNone/>
             </a:pPr>
-            <a:endParaRPr lang="zh-CN" altLang="en-US" sz="2000">
+            <a:endParaRPr lang="zh-CN" altLang="en-US" sz="2000" dirty="0">
               <a:solidFill>
                 <a:srgbClr val="366091"/>
               </a:solidFill>
@@ -29958,7 +30365,7 @@
             </a:endParaRPr>
           </a:p>
           <a:p>
-            <a:endParaRPr lang="en-GB" sz="1100">
+            <a:endParaRPr lang="en-GB" sz="1100" dirty="0">
               <a:solidFill>
                 <a:srgbClr val="000000"/>
               </a:solidFill>
@@ -29968,7 +30375,7 @@
             </a:endParaRPr>
           </a:p>
           <a:p>
-            <a:endParaRPr lang="it-IT" sz="1400">
+            <a:endParaRPr lang="it-IT" sz="1400" dirty="0">
               <a:solidFill>
                 <a:srgbClr val="333333"/>
               </a:solidFill>
@@ -29978,7 +30385,7 @@
             </a:endParaRPr>
           </a:p>
           <a:p>
-            <a:endParaRPr lang="it-IT" altLang="zh-CN" sz="1100">
+            <a:endParaRPr lang="it-IT" altLang="zh-CN" sz="1100" dirty="0">
               <a:solidFill>
                 <a:srgbClr val="000000"/>
               </a:solidFill>
@@ -29989,7 +30396,7 @@
           </a:p>
           <a:p>
             <a:pPr marL="342900" indent="-342900"/>
-            <a:endParaRPr lang="it-IT" altLang="zh-CN" sz="2000">
+            <a:endParaRPr lang="it-IT" altLang="zh-CN" sz="2000" dirty="0">
               <a:latin typeface="Gill Sans MT"/>
               <a:ea typeface="DengXian"/>
             </a:endParaRPr>
@@ -30051,6 +30458,41 @@
               <a:t>Local database schema</a:t>
             </a:r>
             <a:endParaRPr lang="zh-CN"/>
+          </a:p>
+        </p:txBody>
+      </p:sp>
+      <p:sp>
+        <p:nvSpPr>
+          <p:cNvPr id="5" name="文本框 4">
+            <a:extLst>
+              <a:ext uri="{FF2B5EF4-FFF2-40B4-BE49-F238E27FC236}">
+                <a16:creationId xmlns:a16="http://schemas.microsoft.com/office/drawing/2014/main" id="{EC9B7878-A5F0-05DE-C808-F6330B3BB420}"/>
+              </a:ext>
+            </a:extLst>
+          </p:cNvPr>
+          <p:cNvSpPr txBox="1"/>
+          <p:nvPr/>
+        </p:nvSpPr>
+        <p:spPr>
+          <a:xfrm>
+            <a:off x="3017520" y="3108012"/>
+            <a:ext cx="6122126" cy="646331"/>
+          </a:xfrm>
+          <a:prstGeom prst="rect">
+            <a:avLst/>
+          </a:prstGeom>
+          <a:noFill/>
+        </p:spPr>
+        <p:txBody>
+          <a:bodyPr wrap="square">
+            <a:spAutoFit/>
+          </a:bodyPr>
+          <a:lstStyle/>
+          <a:p>
+            <a:br>
+              <a:rPr lang="it-IT" dirty="0"/>
+            </a:br>
+            <a:endParaRPr lang="it-IT" dirty="0"/>
           </a:p>
         </p:txBody>
       </p:sp>
